--- a/docs/presentations/2026-04-26-evo-agents/2-paper-style-ko.pptx
+++ b/docs/presentations/2026-04-26-evo-agents/2-paper-style-ko.pptx
@@ -39,6 +39,12 @@
     <p:sldId id="287" r:id="rId38"/>
     <p:sldId id="288" r:id="rId39"/>
     <p:sldId id="289" r:id="rId40"/>
+    <p:sldId id="290" r:id="rId41"/>
+    <p:sldId id="291" r:id="rId42"/>
+    <p:sldId id="292" r:id="rId43"/>
+    <p:sldId id="293" r:id="rId44"/>
+    <p:sldId id="294" r:id="rId45"/>
+    <p:sldId id="295" r:id="rId46"/>
   </p:sldIdLst>
   <p:sldSz cx="12191695" cy="6858000" type="screen4x3"/>
   <p:notesSz cx="6858000" cy="9144000"/>
@@ -3284,7 +3290,7 @@
                 </a:solidFill>
                 <a:latin typeface="NanumGothic"/>
               </a:rPr>
-              <a:t>thyun.park · 논문화 형식 발표 자료 · 2026-04-26</a:t>
+              <a:t>thyun.park · 논문화 형식 발표 자료 · 2026-04-27 (v3 반영본)</a:t>
             </a:r>
           </a:p>
         </p:txBody>
@@ -4788,21 +4794,73 @@
                 </a:solidFill>
                 <a:latin typeface="NanumGothic"/>
               </a:rPr>
-              <a:t>4.4 Accept rule + max_agents 제약</a:t>
-            </a:r>
-          </a:p>
-        </p:txBody>
-      </p:sp>
-      <p:sp>
-        <p:nvSpPr>
-          <p:cNvPr id="5" name="TextBox 4"/>
+              <a:t>4.4 Controller v3 — full-pass + strict accept</a:t>
+            </a:r>
+          </a:p>
+        </p:txBody>
+      </p:sp>
+      <p:sp>
+        <p:nvSpPr>
+          <p:cNvPr id="5" name="Rounded Rectangle 4"/>
+          <p:cNvSpPr/>
+          <p:nvPr/>
+        </p:nvSpPr>
+        <p:spPr>
+          <a:xfrm>
+            <a:off x="548640" y="1188720"/>
+            <a:ext cx="11064240" cy="411480"/>
+          </a:xfrm>
+          <a:prstGeom prst="roundRect">
+            <a:avLst/>
+          </a:prstGeom>
+          <a:solidFill>
+            <a:srgbClr val="B85042"/>
+          </a:solidFill>
+          <a:ln>
+            <a:noFill/>
+          </a:ln>
+        </p:spPr>
+        <p:style>
+          <a:lnRef idx="1">
+            <a:schemeClr val="accent1"/>
+          </a:lnRef>
+          <a:fillRef idx="3">
+            <a:schemeClr val="accent1"/>
+          </a:fillRef>
+          <a:effectRef idx="2">
+            <a:schemeClr val="accent1"/>
+          </a:effectRef>
+          <a:fontRef idx="minor">
+            <a:schemeClr val="lt1"/>
+          </a:fontRef>
+        </p:style>
+        <p:txBody>
+          <a:bodyPr rtlCol="0" anchor="ctr" lIns="45720" rIns="45720" tIns="27432" bIns="27432"/>
+          <a:lstStyle/>
+          <a:p>
+            <a:pPr algn="ctr"/>
+            <a:r>
+              <a:rPr sz="1200" b="1">
+                <a:solidFill>
+                  <a:srgbClr val="FFFFFF"/>
+                </a:solidFill>
+                <a:latin typeface="NanumGothic"/>
+              </a:rPr>
+              <a:t>Streaming run #1·#2가 노출한 3대 문제</a:t>
+            </a:r>
+          </a:p>
+        </p:txBody>
+      </p:sp>
+      <p:sp>
+        <p:nvSpPr>
+          <p:cNvPr id="6" name="TextBox 5"/>
           <p:cNvSpPr txBox="1"/>
           <p:nvPr/>
         </p:nvSpPr>
         <p:spPr>
           <a:xfrm>
-            <a:off x="548640" y="1280160"/>
-            <a:ext cx="11064240" cy="5120640"/>
+            <a:off x="548640" y="1627632"/>
+            <a:ext cx="11064240" cy="1691640"/>
           </a:xfrm>
           <a:prstGeom prst="rect">
             <a:avLst/>
@@ -4821,13 +4879,136 @@
               </a:lnSpc>
             </a:pPr>
             <a:r>
-              <a:rPr sz="1300">
+              <a:rPr sz="1200">
+                <a:solidFill>
+                  <a:srgbClr val="B85042"/>
+                </a:solidFill>
+                <a:latin typeface="NanumGothic"/>
+              </a:rPr>
+              <a:t>• (P1) cross-batch best_val_acc 비신뢰 — max over 독립 부트스트랩 batch.</a:t>
+            </a:r>
+          </a:p>
+          <a:p>
+            <a:pPr>
+              <a:lnSpc>
+                <a:spcPct val="130000"/>
+              </a:lnSpc>
+            </a:pPr>
+            <a:r>
+              <a:rPr sz="1200">
+                <a:solidFill>
+                  <a:srgbClr val="B85042"/>
+                </a:solidFill>
+                <a:latin typeface="NanumGothic"/>
+              </a:rPr>
+              <a:t>• (P2) max_agents=6 binding — run #1·#2 6 round을 INVALID로 잃음.</a:t>
+            </a:r>
+          </a:p>
+          <a:p>
+            <a:pPr>
+              <a:lnSpc>
+                <a:spcPct val="130000"/>
+              </a:lnSpc>
+            </a:pPr>
+            <a:r>
+              <a:rPr sz="1200">
+                <a:solidFill>
+                  <a:srgbClr val="B85042"/>
+                </a:solidFill>
+                <a:latin typeface="NanumGothic"/>
+              </a:rPr>
+              <a:t>• (P3) orphan-edit INVALID — partial-wire add_agent / orphan prune.</a:t>
+            </a:r>
+          </a:p>
+        </p:txBody>
+      </p:sp>
+      <p:sp>
+        <p:nvSpPr>
+          <p:cNvPr id="7" name="Rounded Rectangle 6"/>
+          <p:cNvSpPr/>
+          <p:nvPr/>
+        </p:nvSpPr>
+        <p:spPr>
+          <a:xfrm>
+            <a:off x="548640" y="3383280"/>
+            <a:ext cx="11064240" cy="411480"/>
+          </a:xfrm>
+          <a:prstGeom prst="roundRect">
+            <a:avLst/>
+          </a:prstGeom>
+          <a:solidFill>
+            <a:srgbClr val="2C5F2D"/>
+          </a:solidFill>
+          <a:ln>
+            <a:noFill/>
+          </a:ln>
+        </p:spPr>
+        <p:style>
+          <a:lnRef idx="1">
+            <a:schemeClr val="accent1"/>
+          </a:lnRef>
+          <a:fillRef idx="3">
+            <a:schemeClr val="accent1"/>
+          </a:fillRef>
+          <a:effectRef idx="2">
+            <a:schemeClr val="accent1"/>
+          </a:effectRef>
+          <a:fontRef idx="minor">
+            <a:schemeClr val="lt1"/>
+          </a:fontRef>
+        </p:style>
+        <p:txBody>
+          <a:bodyPr rtlCol="0" anchor="ctr" lIns="45720" rIns="45720" tIns="27432" bIns="27432"/>
+          <a:lstStyle/>
+          <a:p>
+            <a:pPr algn="ctr"/>
+            <a:r>
+              <a:rPr sz="1200" b="1">
+                <a:solidFill>
+                  <a:srgbClr val="FFFFFF"/>
+                </a:solidFill>
+                <a:latin typeface="NanumGothic"/>
+              </a:rPr>
+              <a:t>v3의 응답</a:t>
+            </a:r>
+          </a:p>
+        </p:txBody>
+      </p:sp>
+      <p:sp>
+        <p:nvSpPr>
+          <p:cNvPr id="8" name="TextBox 7"/>
+          <p:cNvSpPr txBox="1"/>
+          <p:nvPr/>
+        </p:nvSpPr>
+        <p:spPr>
+          <a:xfrm>
+            <a:off x="548640" y="3822191"/>
+            <a:ext cx="11064240" cy="2651760"/>
+          </a:xfrm>
+          <a:prstGeom prst="rect">
+            <a:avLst/>
+          </a:prstGeom>
+          <a:noFill/>
+        </p:spPr>
+        <p:txBody>
+          <a:bodyPr wrap="square" lIns="54864" rIns="54864" tIns="36576" bIns="36576">
+            <a:spAutoFit/>
+          </a:bodyPr>
+          <a:lstStyle/>
+          <a:p>
+            <a:pPr>
+              <a:lnSpc>
+                <a:spcPct val="130000"/>
+              </a:lnSpc>
+            </a:pPr>
+            <a:r>
+              <a:rPr sz="1200">
                 <a:solidFill>
                   <a:srgbClr val="36454F"/>
                 </a:solidFill>
                 <a:latin typeface="NanumGothic"/>
               </a:rPr>
-              <a:t>• Legacy mode (Opt-2 strict): best_graph / best_val_acc는 strict val 향상 시에만 advance (val_acc &gt; best_val_acc); tie REJECT.</a:t>
+              <a:t>• Mode: streaming → legacy-style full-pass per iter (n_train=30 동일 task 재사용).</a:t>
             </a:r>
           </a:p>
           <a:p>
@@ -4837,13 +5018,13 @@
               </a:lnSpc>
             </a:pPr>
             <a:r>
-              <a:rPr sz="1300">
+              <a:rPr sz="1200">
                 <a:solidFill>
                   <a:srgbClr val="36454F"/>
                 </a:solidFill>
                 <a:latin typeface="NanumGothic"/>
               </a:rPr>
-              <a:t>• Streaming mode: paired Δ &gt; ε 채택 (default ε = 0.0).</a:t>
+              <a:t>• Accept rule: train_acc(candidate) &gt; train_acc(best) — strict.</a:t>
             </a:r>
           </a:p>
           <a:p>
@@ -4853,13 +5034,29 @@
               </a:lnSpc>
             </a:pPr>
             <a:r>
-              <a:rPr sz="1300">
+              <a:rPr sz="1200">
+                <a:solidFill>
+                  <a:srgbClr val="36454F"/>
+                </a:solidFill>
+                <a:latin typeface="NanumGothic"/>
+              </a:rPr>
+              <a:t>• max_agents: 10 HARD (apply_edits가 INVALID), max_edges: 50 soft (prompt only).</a:t>
+            </a:r>
+          </a:p>
+          <a:p>
+            <a:pPr>
+              <a:lnSpc>
+                <a:spcPct val="130000"/>
+              </a:lnSpc>
+            </a:pPr>
+            <a:r>
+              <a:rPr sz="1200">
                 <a:solidFill>
                   <a:srgbClr val="2C5F2D"/>
                 </a:solidFill>
                 <a:latin typeface="NanumGothic"/>
               </a:rPr>
-              <a:t>• max_agents 제약: 그래프 크기 cap. Default 8 (triage + 2-3 specialists + answer chain 수용). 컨트롤러 user prompt에 `# Constraints` 블록으로 노출.</a:t>
+              <a:t>• apply_edits가 무입력 / 무출력 agent를 silently drop → partial-wire 편집이 INVALID 대신 no-op.</a:t>
             </a:r>
           </a:p>
           <a:p>
@@ -4869,29 +5066,13 @@
               </a:lnSpc>
             </a:pPr>
             <a:r>
-              <a:rPr sz="1300">
-                <a:solidFill>
-                  <a:srgbClr val="36454F"/>
-                </a:solidFill>
-                <a:latin typeface="NanumGothic"/>
-              </a:rPr>
-              <a:t>• n_agents == max_agents 도달 시 user prompt에 'AT CAP — only remove_agent / rewrite_persona / topology edits are allowed.' 명시.</a:t>
-            </a:r>
-          </a:p>
-          <a:p>
-            <a:pPr>
-              <a:lnSpc>
-                <a:spcPct val="130000"/>
-              </a:lnSpc>
-            </a:pPr>
-            <a:r>
-              <a:rPr sz="1300">
-                <a:solidFill>
-                  <a:srgbClr val="36454F"/>
-                </a:solidFill>
-                <a:latin typeface="NanumGothic"/>
-              </a:rPr>
-              <a:t>• Prune-DAG reminder: 'X를 제거하면 X에 의존했던 agent를 orphan시키지 말 것'.</a:t>
+              <a:rPr sz="1200">
+                <a:solidFill>
+                  <a:srgbClr val="2C5F2D"/>
+                </a:solidFill>
+                <a:latin typeface="NanumGothic"/>
+              </a:rPr>
+              <a:t>• 모드 자체는 wall ½ (10h → 5h on MEDIQ s=0); reflection density는 §4.5/§4.6에서 강화.</a:t>
             </a:r>
           </a:p>
         </p:txBody>
@@ -4999,7 +5180,7 @@
                 </a:solidFill>
                 <a:latin typeface="NanumGothic"/>
               </a:rPr>
-              <a:t>구현</a:t>
+              <a:t>방법</a:t>
             </a:r>
           </a:p>
         </p:txBody>
@@ -5038,7 +5219,7 @@
                 </a:solidFill>
                 <a:latin typeface="NanumGothic"/>
               </a:rPr>
-              <a:t>5. 구현 (Implementation)</a:t>
+              <a:t>4.5 샘플 단위 reflection + 30 → 3 → 1 계층적 집계</a:t>
             </a:r>
           </a:p>
         </p:txBody>
@@ -5051,8 +5232,8 @@
         </p:nvSpPr>
         <p:spPr>
           <a:xfrm>
-            <a:off x="548640" y="1280160"/>
-            <a:ext cx="5486400" cy="5120640"/>
+            <a:off x="548640" y="1188720"/>
+            <a:ext cx="11064240" cy="457200"/>
           </a:xfrm>
           <a:prstGeom prst="rect">
             <a:avLst/>
@@ -5060,136 +5241,24 @@
           <a:noFill/>
         </p:spPr>
         <p:txBody>
-          <a:bodyPr wrap="square" lIns="54864" rIns="54864" tIns="36576" bIns="36576">
+          <a:bodyPr wrap="square" anchor="t" lIns="54864" rIns="54864" tIns="36576" bIns="36576">
             <a:spAutoFit/>
           </a:bodyPr>
           <a:lstStyle/>
           <a:p>
-            <a:pPr>
-              <a:lnSpc>
-                <a:spcPct val="130000"/>
-              </a:lnSpc>
-            </a:pPr>
-            <a:r>
-              <a:rPr sz="1300">
+            <a:pPr algn="l">
+              <a:lnSpc>
+                <a:spcPct val="120000"/>
+              </a:lnSpc>
+            </a:pPr>
+            <a:r>
+              <a:rPr sz="1200" b="0" i="1">
                 <a:solidFill>
                   <a:srgbClr val="36454F"/>
                 </a:solidFill>
                 <a:latin typeface="NanumGothic"/>
               </a:rPr>
-              <a:t>• src/llm.py — OpenAI-compatible chat client (vLLM @ :8000)</a:t>
-            </a:r>
-          </a:p>
-          <a:p>
-            <a:pPr>
-              <a:lnSpc>
-                <a:spcPct val="130000"/>
-              </a:lnSpc>
-            </a:pPr>
-            <a:r>
-              <a:rPr sz="1300">
-                <a:solidFill>
-                  <a:srgbClr val="36454F"/>
-                </a:solidFill>
-                <a:latin typeface="NanumGothic"/>
-              </a:rPr>
-              <a:t>• src/graph.py — Graph + edit ops + DAG validity 검사</a:t>
-            </a:r>
-          </a:p>
-          <a:p>
-            <a:pPr>
-              <a:lnSpc>
-                <a:spcPct val="130000"/>
-              </a:lnSpc>
-            </a:pPr>
-            <a:r>
-              <a:rPr sz="1300">
-                <a:solidFill>
-                  <a:srgbClr val="36454F"/>
-                </a:solidFill>
-                <a:latin typeface="NanumGothic"/>
-              </a:rPr>
-              <a:t>• src/orchestrator.py — Task → Tape 실행</a:t>
-            </a:r>
-          </a:p>
-          <a:p>
-            <a:pPr>
-              <a:lnSpc>
-                <a:spcPct val="130000"/>
-              </a:lnSpc>
-            </a:pPr>
-            <a:r>
-              <a:rPr sz="1300">
-                <a:solidFill>
-                  <a:srgbClr val="36454F"/>
-                </a:solidFill>
-                <a:latin typeface="NanumGothic"/>
-              </a:rPr>
-              <a:t>• src/controller.py — Reflection LLM, propose_edits()</a:t>
-            </a:r>
-          </a:p>
-          <a:p>
-            <a:pPr>
-              <a:lnSpc>
-                <a:spcPct val="130000"/>
-              </a:lnSpc>
-            </a:pPr>
-            <a:r>
-              <a:rPr sz="1300">
-                <a:solidFill>
-                  <a:srgbClr val="36454F"/>
-                </a:solidFill>
-                <a:latin typeface="NanumGothic"/>
-              </a:rPr>
-              <a:t>• src/evolve.py — legacy + streaming evolve loops</a:t>
-            </a:r>
-          </a:p>
-          <a:p>
-            <a:pPr>
-              <a:lnSpc>
-                <a:spcPct val="130000"/>
-              </a:lnSpc>
-            </a:pPr>
-            <a:r>
-              <a:rPr sz="1300">
-                <a:solidFill>
-                  <a:srgbClr val="36454F"/>
-                </a:solidFill>
-                <a:latin typeface="NanumGothic"/>
-              </a:rPr>
-              <a:t>• src/score.py — MCQ exact-match (MEDIQ) + LLM-judge</a:t>
-            </a:r>
-          </a:p>
-          <a:p>
-            <a:pPr>
-              <a:lnSpc>
-                <a:spcPct val="130000"/>
-              </a:lnSpc>
-            </a:pPr>
-            <a:r>
-              <a:rPr sz="1300">
-                <a:solidFill>
-                  <a:srgbClr val="36454F"/>
-                </a:solidFill>
-                <a:latin typeface="NanumGothic"/>
-              </a:rPr>
-              <a:t>• scripts/run_pilot.py — 드라이버</a:t>
-            </a:r>
-          </a:p>
-          <a:p>
-            <a:pPr>
-              <a:lnSpc>
-                <a:spcPct val="130000"/>
-              </a:lnSpc>
-            </a:pPr>
-            <a:r>
-              <a:rPr sz="1300">
-                <a:solidFill>
-                  <a:srgbClr val="36454F"/>
-                </a:solidFill>
-                <a:latin typeface="NanumGothic"/>
-              </a:rPr>
-              <a:t>• scripts/serve_vllm.sh — vLLM 0.19.1 + gcc 자동 설치</a:t>
+              <a:t>각 train task 마다 컨트롤러를 1회 호출 → 그 한 샘플의 tape이 그래프에 대해 무엇을 시사하는지 평가.</a:t>
             </a:r>
           </a:p>
         </p:txBody>
@@ -5202,8 +5271,8 @@
         </p:nvSpPr>
         <p:spPr>
           <a:xfrm>
-            <a:off x="6309360" y="1371600"/>
-            <a:ext cx="5303520" cy="457200"/>
+            <a:off x="548640" y="1691640"/>
+            <a:ext cx="5303520" cy="411480"/>
           </a:xfrm>
           <a:prstGeom prst="roundRect">
             <a:avLst/>
@@ -5241,7 +5310,7 @@
                 </a:solidFill>
                 <a:latin typeface="NanumGothic"/>
               </a:rPr>
-              <a:t>백본: Qwen2.5-32B-Instruct (bf16, single H200)</a:t>
+              <a:t>eval_sample 출력 스키마</a:t>
             </a:r>
           </a:p>
         </p:txBody>
@@ -5254,8 +5323,8 @@
         </p:nvSpPr>
         <p:spPr>
           <a:xfrm>
-            <a:off x="6309360" y="1920240"/>
-            <a:ext cx="5303520" cy="4480560"/>
+            <a:off x="548640" y="2121408"/>
+            <a:ext cx="5303520" cy="4297680"/>
           </a:xfrm>
           <a:prstGeom prst="rect">
             <a:avLst/>
@@ -5280,7 +5349,7 @@
                 </a:solidFill>
                 <a:latin typeface="NanumGothic"/>
               </a:rPr>
-              <a:t>• vLLM + prefix caching</a:t>
+              <a:t>• rationale (2-4 문장, tape 인용)</a:t>
             </a:r>
           </a:p>
           <a:p>
@@ -5296,7 +5365,7 @@
                 </a:solidFill>
                 <a:latin typeface="NanumGothic"/>
               </a:rPr>
-              <a:t>• EVO_GPU_UTIL=0.55 (공유 GPU)</a:t>
+              <a:t>• suggested_edits (0-3개 candidate)</a:t>
             </a:r>
           </a:p>
           <a:p>
@@ -5312,7 +5381,7 @@
                 </a:solidFill>
                 <a:latin typeface="NanumGothic"/>
               </a:rPr>
-              <a:t>• max_model_len = 16384</a:t>
+              <a:t>• priority: 0-100 (자기 의견 강도)</a:t>
             </a:r>
           </a:p>
           <a:p>
@@ -5328,7 +5397,7 @@
                 </a:solidFill>
                 <a:latin typeface="NanumGothic"/>
               </a:rPr>
-              <a:t>• uv-managed env, .python-version pin</a:t>
+              <a:t>• target_aspect ∈ {structure, role, length, expertise}</a:t>
             </a:r>
           </a:p>
           <a:p>
@@ -5340,11 +5409,102 @@
             <a:r>
               <a:rPr sz="1200">
                 <a:solidFill>
+                  <a:srgbClr val="97BC62"/>
+                </a:solidFill>
+                <a:latin typeface="NanumGothic"/>
+              </a:rPr>
+              <a:t>• → 컨트롤러가 자가-보정을 통해 노이즈한 샘플에 가중치를 줄임.</a:t>
+            </a:r>
+          </a:p>
+        </p:txBody>
+      </p:sp>
+      <p:sp>
+        <p:nvSpPr>
+          <p:cNvPr id="8" name="Rounded Rectangle 7"/>
+          <p:cNvSpPr/>
+          <p:nvPr/>
+        </p:nvSpPr>
+        <p:spPr>
+          <a:xfrm>
+            <a:off x="6126480" y="1691640"/>
+            <a:ext cx="5486400" cy="411480"/>
+          </a:xfrm>
+          <a:prstGeom prst="roundRect">
+            <a:avLst/>
+          </a:prstGeom>
+          <a:solidFill>
+            <a:srgbClr val="2C5F2D"/>
+          </a:solidFill>
+          <a:ln>
+            <a:noFill/>
+          </a:ln>
+        </p:spPr>
+        <p:style>
+          <a:lnRef idx="1">
+            <a:schemeClr val="accent1"/>
+          </a:lnRef>
+          <a:fillRef idx="3">
+            <a:schemeClr val="accent1"/>
+          </a:fillRef>
+          <a:effectRef idx="2">
+            <a:schemeClr val="accent1"/>
+          </a:effectRef>
+          <a:fontRef idx="minor">
+            <a:schemeClr val="lt1"/>
+          </a:fontRef>
+        </p:style>
+        <p:txBody>
+          <a:bodyPr rtlCol="0" anchor="ctr" lIns="45720" rIns="45720" tIns="27432" bIns="27432"/>
+          <a:lstStyle/>
+          <a:p>
+            <a:pPr algn="ctr"/>
+            <a:r>
+              <a:rPr sz="1200" b="1">
+                <a:solidFill>
+                  <a:srgbClr val="FFFFFF"/>
+                </a:solidFill>
+                <a:latin typeface="NanumGothic"/>
+              </a:rPr>
+              <a:t>Hierarchical aggregation</a:t>
+            </a:r>
+          </a:p>
+        </p:txBody>
+      </p:sp>
+      <p:sp>
+        <p:nvSpPr>
+          <p:cNvPr id="9" name="TextBox 8"/>
+          <p:cNvSpPr txBox="1"/>
+          <p:nvPr/>
+        </p:nvSpPr>
+        <p:spPr>
+          <a:xfrm>
+            <a:off x="6126480" y="2121408"/>
+            <a:ext cx="5486400" cy="4297680"/>
+          </a:xfrm>
+          <a:prstGeom prst="rect">
+            <a:avLst/>
+          </a:prstGeom>
+          <a:noFill/>
+        </p:spPr>
+        <p:txBody>
+          <a:bodyPr wrap="square" lIns="54864" rIns="54864" tIns="36576" bIns="36576">
+            <a:spAutoFit/>
+          </a:bodyPr>
+          <a:lstStyle/>
+          <a:p>
+            <a:pPr>
+              <a:lnSpc>
+                <a:spcPct val="130000"/>
+              </a:lnSpc>
+            </a:pPr>
+            <a:r>
+              <a:rPr sz="1200">
+                <a:solidFill>
                   <a:srgbClr val="36454F"/>
                 </a:solidFill>
                 <a:latin typeface="NanumGothic"/>
               </a:rPr>
-              <a:t>• 각 run: results/&lt;run_id&gt;/{evolve_log.json, results.json, plots/}</a:t>
+              <a:t>• 30 sample-evals (priority 내림차순)</a:t>
             </a:r>
           </a:p>
           <a:p>
@@ -5356,11 +5516,59 @@
             <a:r>
               <a:rPr sz="1200">
                 <a:solidFill>
-                  <a:srgbClr val="97BC62"/>
-                </a:solidFill>
-                <a:latin typeface="NanumGothic"/>
-              </a:rPr>
-              <a:t>• 코드 + 결과: github.com/namam3gy (project repo)</a:t>
+                  <a:srgbClr val="36454F"/>
+                </a:solidFill>
+                <a:latin typeface="NanumGothic"/>
+              </a:rPr>
+              <a:t>•   → groups of 10 → 3 mid_decisions</a:t>
+            </a:r>
+          </a:p>
+          <a:p>
+            <a:pPr>
+              <a:lnSpc>
+                <a:spcPct val="130000"/>
+              </a:lnSpc>
+            </a:pPr>
+            <a:r>
+              <a:rPr sz="1200">
+                <a:solidFill>
+                  <a:srgbClr val="36454F"/>
+                </a:solidFill>
+                <a:latin typeface="NanumGothic"/>
+              </a:rPr>
+              <a:t>•   → 1 final EditBatch → apply_edits</a:t>
+            </a:r>
+          </a:p>
+          <a:p>
+            <a:pPr>
+              <a:lnSpc>
+                <a:spcPct val="130000"/>
+              </a:lnSpc>
+            </a:pPr>
+            <a:r>
+              <a:rPr sz="1300">
+                <a:solidFill>
+                  <a:srgbClr val="36454F"/>
+                </a:solidFill>
+                <a:latin typeface="NanumGothic"/>
+              </a:rPr>
+              <a:t>  – aggregate_mid: 패턴 공유 샘플에 가중, priority=100 outlier에 과반응 금지.</a:t>
+            </a:r>
+          </a:p>
+          <a:p>
+            <a:pPr>
+              <a:lnSpc>
+                <a:spcPct val="130000"/>
+              </a:lnSpc>
+            </a:pPr>
+            <a:r>
+              <a:rPr sz="1200">
+                <a:solidFill>
+                  <a:srgbClr val="2C5F2D"/>
+                </a:solidFill>
+                <a:latin typeface="NanumGothic"/>
+              </a:rPr>
+              <a:t>• 이 구조가 한 샘플의 노이즈가 그래프 편집을 좌우하지 못하게 막음.</a:t>
             </a:r>
           </a:p>
         </p:txBody>
@@ -5468,7 +5676,7 @@
                 </a:solidFill>
                 <a:latin typeface="NanumGothic"/>
               </a:rPr>
-              <a:t>실험 설정</a:t>
+              <a:t>방법</a:t>
             </a:r>
           </a:p>
         </p:txBody>
@@ -5507,7 +5715,7 @@
                 </a:solidFill>
                 <a:latin typeface="NanumGothic"/>
               </a:rPr>
-              <a:t>6.1 실험 설정 — 도메인</a:t>
+              <a:t>4.6 [SUMMARY] / [QUERY] — 워커 DAG side-channel</a:t>
             </a:r>
           </a:p>
         </p:txBody>
@@ -5520,8 +5728,8 @@
         </p:nvSpPr>
         <p:spPr>
           <a:xfrm>
-            <a:off x="548640" y="1280160"/>
-            <a:ext cx="3657600" cy="457200"/>
+            <a:off x="548640" y="1188720"/>
+            <a:ext cx="5303520" cy="411480"/>
           </a:xfrm>
           <a:prstGeom prst="roundRect">
             <a:avLst/>
@@ -5553,13 +5761,13 @@
           <a:p>
             <a:pPr algn="ctr"/>
             <a:r>
-              <a:rPr sz="1300" b="1">
+              <a:rPr sz="1100" b="1">
                 <a:solidFill>
                   <a:srgbClr val="FFFFFF"/>
                 </a:solidFill>
                 <a:latin typeface="NanumGothic"/>
               </a:rPr>
-              <a:t>FinanceBench (LLM-judge)</a:t>
+              <a:t>[SUMMARY] (S-2) — agent 출력 강제 구조</a:t>
             </a:r>
           </a:p>
         </p:txBody>
@@ -5572,8 +5780,8 @@
         </p:nvSpPr>
         <p:spPr>
           <a:xfrm>
-            <a:off x="548640" y="1783080"/>
-            <a:ext cx="3657600" cy="4572000"/>
+            <a:off x="548640" y="1627632"/>
+            <a:ext cx="5303520" cy="4846320"/>
           </a:xfrm>
           <a:prstGeom prst="rect">
             <a:avLst/>
@@ -5592,13 +5800,13 @@
               </a:lnSpc>
             </a:pPr>
             <a:r>
-              <a:rPr sz="1200">
+              <a:rPr sz="1100">
                 <a:solidFill>
                   <a:srgbClr val="36454F"/>
                 </a:solidFill>
                 <a:latin typeface="NanumGothic"/>
               </a:rPr>
-              <a:t>• 10-K 추출 QA</a:t>
+              <a:t>• 각 워커는 응답 끝에 다음 블록을 emit:</a:t>
             </a:r>
           </a:p>
           <a:p>
@@ -5608,13 +5816,13 @@
               </a:lnSpc>
             </a:pPr>
             <a:r>
-              <a:rPr sz="1200">
+              <a:rPr sz="1300">
                 <a:solidFill>
                   <a:srgbClr val="36454F"/>
                 </a:solidFill>
                 <a:latin typeface="NanumGothic"/>
               </a:rPr>
-              <a:t>• GAAP / TTM / 회계연도</a:t>
+              <a:t>  –   [SUMMARY] claim / evidence / confidence [/SUMMARY]</a:t>
             </a:r>
           </a:p>
           <a:p>
@@ -5624,13 +5832,13 @@
               </a:lnSpc>
             </a:pPr>
             <a:r>
-              <a:rPr sz="1200">
+              <a:rPr sz="1100">
                 <a:solidFill>
                   <a:srgbClr val="36454F"/>
                 </a:solidFill>
                 <a:latin typeface="NanumGothic"/>
               </a:rPr>
-              <a:t>• 긴 컨텍스트 retrieval</a:t>
+              <a:t>• orchestrator가 정규식으로 추출 → 다음 워커의 prompt 앞에 [Conversation so far] 블록으로 prepend.</a:t>
             </a:r>
           </a:p>
           <a:p>
@@ -5640,13 +5848,29 @@
               </a:lnSpc>
             </a:pPr>
             <a:r>
-              <a:rPr sz="1200">
+              <a:rPr sz="1100">
+                <a:solidFill>
+                  <a:srgbClr val="2C5F2D"/>
+                </a:solidFill>
+                <a:latin typeface="NanumGothic"/>
+              </a:rPr>
+              <a:t>• → agent.inputs 와는 *독립된* 추가 정보 채널 (W-2: 같은 task에 대해 모든 워커가 claim/evidence/confidence를 공유).</a:t>
+            </a:r>
+          </a:p>
+          <a:p>
+            <a:pPr>
+              <a:lnSpc>
+                <a:spcPct val="130000"/>
+              </a:lnSpc>
+            </a:pPr>
+            <a:r>
+              <a:rPr sz="1100">
                 <a:solidFill>
                   <a:srgbClr val="36454F"/>
                 </a:solidFill>
                 <a:latin typeface="NanumGothic"/>
               </a:rPr>
-              <a:t>• 실패: hedging, 기간 혼동</a:t>
+              <a:t>• Fallback: 누락 시 마지막 문장으로 claim 채움 (no INVALID).</a:t>
             </a:r>
           </a:p>
         </p:txBody>
@@ -5659,8 +5883,8 @@
         </p:nvSpPr>
         <p:spPr>
           <a:xfrm>
-            <a:off x="4297680" y="1280160"/>
-            <a:ext cx="3657600" cy="457200"/>
+            <a:off x="6126480" y="1188720"/>
+            <a:ext cx="5486400" cy="411480"/>
           </a:xfrm>
           <a:prstGeom prst="roundRect">
             <a:avLst/>
@@ -5692,13 +5916,13 @@
           <a:p>
             <a:pPr algn="ctr"/>
             <a:r>
-              <a:rPr sz="1300" b="1">
+              <a:rPr sz="1100" b="1">
                 <a:solidFill>
                   <a:srgbClr val="FFFFFF"/>
                 </a:solidFill>
                 <a:latin typeface="NanumGothic"/>
               </a:rPr>
-              <a:t>MEDIQ (MCQ exact-match)</a:t>
+              <a:t>[QUERY] (Q-3) — one-shot peer Q&amp;A</a:t>
             </a:r>
           </a:p>
         </p:txBody>
@@ -5711,8 +5935,8 @@
         </p:nvSpPr>
         <p:spPr>
           <a:xfrm>
-            <a:off x="4297680" y="1783080"/>
-            <a:ext cx="3657600" cy="4572000"/>
+            <a:off x="6126480" y="1627632"/>
+            <a:ext cx="5486400" cy="4846320"/>
           </a:xfrm>
           <a:prstGeom prst="rect">
             <a:avLst/>
@@ -5731,13 +5955,13 @@
               </a:lnSpc>
             </a:pPr>
             <a:r>
-              <a:rPr sz="1200">
+              <a:rPr sz="1100">
                 <a:solidFill>
                   <a:srgbClr val="36454F"/>
                 </a:solidFill>
                 <a:latin typeface="NanumGothic"/>
               </a:rPr>
-              <a:t>• 임상 vignette → MCQ</a:t>
+              <a:t>• 워커 prompt에 "원하면 다른 에이전트 1명에게 [QUERY &lt;name&gt;] &lt;질문&gt; 한 줄 출력 후 STOP" instruction 추가.</a:t>
             </a:r>
           </a:p>
           <a:p>
@@ -5747,13 +5971,13 @@
               </a:lnSpc>
             </a:pPr>
             <a:r>
-              <a:rPr sz="1200">
+              <a:rPr sz="1100">
                 <a:solidFill>
                   <a:srgbClr val="36454F"/>
                 </a:solidFill>
                 <a:latin typeface="NanumGothic"/>
               </a:rPr>
-              <a:t>• 감별 진단 (differential dx)</a:t>
+              <a:t>• Call A (메인) → [QUERY] 검출 시 Call B (lite-mode 답변, 256 tok, 재귀 금지) → Call C (메인 재개, 답변 부착)</a:t>
             </a:r>
           </a:p>
           <a:p>
@@ -5763,13 +5987,13 @@
               </a:lnSpc>
             </a:pPr>
             <a:r>
-              <a:rPr sz="1200">
+              <a:rPr sz="1100">
                 <a:solidFill>
                   <a:srgbClr val="36454F"/>
                 </a:solidFill>
                 <a:latin typeface="NanumGothic"/>
               </a:rPr>
-              <a:t>• Base-rate reasoning</a:t>
+              <a:t>• Hard rules: 답변자는 query 금지 / 1 query/노드/태스크 / 노드당 최악 3 LLM 호출.</a:t>
             </a:r>
           </a:p>
           <a:p>
@@ -5779,191 +6003,13 @@
               </a:lnSpc>
             </a:pPr>
             <a:r>
-              <a:rPr sz="1200">
-                <a:solidFill>
-                  <a:srgbClr val="36454F"/>
-                </a:solidFill>
-                <a:latin typeface="NanumGothic"/>
-              </a:rPr>
-              <a:t>• 실패: 인구학 무시</a:t>
-            </a:r>
-          </a:p>
-        </p:txBody>
-      </p:sp>
-      <p:sp>
-        <p:nvSpPr>
-          <p:cNvPr id="9" name="Rounded Rectangle 8"/>
-          <p:cNvSpPr/>
-          <p:nvPr/>
-        </p:nvSpPr>
-        <p:spPr>
-          <a:xfrm>
-            <a:off x="8046720" y="1280160"/>
-            <a:ext cx="3657600" cy="457200"/>
-          </a:xfrm>
-          <a:prstGeom prst="roundRect">
-            <a:avLst/>
-          </a:prstGeom>
-          <a:solidFill>
-            <a:srgbClr val="2C5F2D"/>
-          </a:solidFill>
-          <a:ln>
-            <a:noFill/>
-          </a:ln>
-        </p:spPr>
-        <p:style>
-          <a:lnRef idx="1">
-            <a:schemeClr val="accent1"/>
-          </a:lnRef>
-          <a:fillRef idx="3">
-            <a:schemeClr val="accent1"/>
-          </a:fillRef>
-          <a:effectRef idx="2">
-            <a:schemeClr val="accent1"/>
-          </a:effectRef>
-          <a:fontRef idx="minor">
-            <a:schemeClr val="lt1"/>
-          </a:fontRef>
-        </p:style>
-        <p:txBody>
-          <a:bodyPr rtlCol="0" anchor="ctr" lIns="45720" rIns="45720" tIns="27432" bIns="27432"/>
-          <a:lstStyle/>
-          <a:p>
-            <a:pPr algn="ctr"/>
-            <a:r>
-              <a:rPr sz="1300" b="1">
-                <a:solidFill>
-                  <a:srgbClr val="FFFFFF"/>
-                </a:solidFill>
-                <a:latin typeface="NanumGothic"/>
-              </a:rPr>
-              <a:t>AgentClinic (LLM-judge)</a:t>
-            </a:r>
-          </a:p>
-        </p:txBody>
-      </p:sp>
-      <p:sp>
-        <p:nvSpPr>
-          <p:cNvPr id="10" name="TextBox 9"/>
-          <p:cNvSpPr txBox="1"/>
-          <p:nvPr/>
-        </p:nvSpPr>
-        <p:spPr>
-          <a:xfrm>
-            <a:off x="8046720" y="1783080"/>
-            <a:ext cx="3657600" cy="4572000"/>
-          </a:xfrm>
-          <a:prstGeom prst="rect">
-            <a:avLst/>
-          </a:prstGeom>
-          <a:noFill/>
-        </p:spPr>
-        <p:txBody>
-          <a:bodyPr wrap="square" lIns="54864" rIns="54864" tIns="36576" bIns="36576">
-            <a:spAutoFit/>
-          </a:bodyPr>
-          <a:lstStyle/>
-          <a:p>
-            <a:pPr>
-              <a:lnSpc>
-                <a:spcPct val="130000"/>
-              </a:lnSpc>
-            </a:pPr>
-            <a:r>
-              <a:rPr sz="1200">
-                <a:solidFill>
-                  <a:srgbClr val="36454F"/>
-                </a:solidFill>
-                <a:latin typeface="NanumGothic"/>
-              </a:rPr>
-              <a:t>• single-pass 임상 케이스</a:t>
-            </a:r>
-          </a:p>
-          <a:p>
-            <a:pPr>
-              <a:lnSpc>
-                <a:spcPct val="130000"/>
-              </a:lnSpc>
-            </a:pPr>
-            <a:r>
-              <a:rPr sz="1200">
-                <a:solidFill>
-                  <a:srgbClr val="36454F"/>
-                </a:solidFill>
-                <a:latin typeface="NanumGothic"/>
-              </a:rPr>
-              <a:t>• Specialty routing</a:t>
-            </a:r>
-          </a:p>
-          <a:p>
-            <a:pPr>
-              <a:lnSpc>
-                <a:spcPct val="130000"/>
-              </a:lnSpc>
-            </a:pPr>
-            <a:r>
-              <a:rPr sz="1200">
-                <a:solidFill>
-                  <a:srgbClr val="36454F"/>
-                </a:solidFill>
-                <a:latin typeface="NanumGothic"/>
-              </a:rPr>
-              <a:t>• Decisive answer 요구</a:t>
-            </a:r>
-          </a:p>
-          <a:p>
-            <a:pPr>
-              <a:lnSpc>
-                <a:spcPct val="130000"/>
-              </a:lnSpc>
-            </a:pPr>
-            <a:r>
-              <a:rPr sz="1200">
-                <a:solidFill>
-                  <a:srgbClr val="36454F"/>
-                </a:solidFill>
-                <a:latin typeface="NanumGothic"/>
-              </a:rPr>
-              <a:t>• 실패: triage 오류</a:t>
-            </a:r>
-          </a:p>
-        </p:txBody>
-      </p:sp>
-      <p:sp>
-        <p:nvSpPr>
-          <p:cNvPr id="11" name="TextBox 10"/>
-          <p:cNvSpPr txBox="1"/>
-          <p:nvPr/>
-        </p:nvSpPr>
-        <p:spPr>
-          <a:xfrm>
-            <a:off x="548640" y="5943600"/>
-            <a:ext cx="11064240" cy="548640"/>
-          </a:xfrm>
-          <a:prstGeom prst="rect">
-            <a:avLst/>
-          </a:prstGeom>
-          <a:noFill/>
-        </p:spPr>
-        <p:txBody>
-          <a:bodyPr wrap="square" anchor="t" lIns="54864" rIns="54864" tIns="36576" bIns="36576">
-            <a:spAutoFit/>
-          </a:bodyPr>
-          <a:lstStyle/>
-          <a:p>
-            <a:pPr algn="l">
-              <a:lnSpc>
-                <a:spcPct val="120000"/>
-              </a:lnSpc>
-            </a:pPr>
-            <a:r>
-              <a:rPr sz="1200" b="0" i="1">
-                <a:solidFill>
-                  <a:srgbClr val="36454F"/>
-                </a:solidFill>
-                <a:latin typeface="NanumGothic"/>
-              </a:rPr>
-              <a:t>공통: Qwen2.5-32B-Instruct, val/test sample 분할 별도, seed 명시.</a:t>
+              <a:rPr sz="1100">
+                <a:solidFill>
+                  <a:srgbClr val="2C5F2D"/>
+                </a:solidFill>
+                <a:latin typeface="NanumGothic"/>
+              </a:rPr>
+              <a:t>• → 워커 단위 reflection density 증가, 단순 cascade가 아닌 협업 가능.</a:t>
             </a:r>
           </a:p>
         </p:txBody>
@@ -6071,7 +6117,7 @@
                 </a:solidFill>
                 <a:latin typeface="NanumGothic"/>
               </a:rPr>
-              <a:t>실험 설정</a:t>
+              <a:t>방법</a:t>
             </a:r>
           </a:p>
         </p:txBody>
@@ -6110,21 +6156,425 @@
                 </a:solidFill>
                 <a:latin typeface="NanumGothic"/>
               </a:rPr>
-              <a:t>6.2 측정 지표 + 노이즈 floor</a:t>
-            </a:r>
-          </a:p>
-        </p:txBody>
-      </p:sp>
-      <p:sp>
-        <p:nvSpPr>
-          <p:cNvPr id="5" name="TextBox 4"/>
+              <a:t>4.7 Accept rule + max_agents 제약 (3 모드 비교)</a:t>
+            </a:r>
+          </a:p>
+        </p:txBody>
+      </p:sp>
+      <p:graphicFrame>
+        <p:nvGraphicFramePr>
+          <p:cNvPr id="5" name="Table 4"/>
+          <p:cNvGraphicFramePr>
+            <a:graphicFrameLocks noGrp="1"/>
+          </p:cNvGraphicFramePr>
+          <p:nvPr/>
+        </p:nvGraphicFramePr>
+        <p:xfrm>
+          <a:off x="548640" y="1280160"/>
+          <a:ext cx="11064240" cy="2194560"/>
+        </p:xfrm>
+        <a:graphic>
+          <a:graphicData uri="http://schemas.openxmlformats.org/drawingml/2006/table">
+            <a:tbl>
+              <a:tblPr firstRow="1" bandRow="1">
+                <a:tableStyleId>{5C22544A-7EE6-4342-B048-85BDC9FD1C3A}</a:tableStyleId>
+              </a:tblPr>
+              <a:tblGrid>
+                <a:gridCol w="2766060"/>
+                <a:gridCol w="2766060"/>
+                <a:gridCol w="2766060"/>
+                <a:gridCol w="2766060"/>
+              </a:tblGrid>
+              <a:tr h="548640">
+                <a:tc>
+                  <a:txBody>
+                    <a:bodyPr lIns="45720" rIns="45720"/>
+                    <a:lstStyle/>
+                    <a:p>
+                      <a:pPr algn="ctr"/>
+                      <a:r>
+                        <a:rPr sz="1300" b="1">
+                          <a:solidFill>
+                            <a:srgbClr val="FFFFFF"/>
+                          </a:solidFill>
+                          <a:latin typeface="NanumGothic"/>
+                        </a:rPr>
+                        <a:t>모드</a:t>
+                      </a:r>
+                    </a:p>
+                  </a:txBody>
+                  <a:tcPr>
+                    <a:solidFill>
+                      <a:srgbClr val="2C5F2D"/>
+                    </a:solidFill>
+                  </a:tcPr>
+                </a:tc>
+                <a:tc>
+                  <a:txBody>
+                    <a:bodyPr lIns="45720" rIns="45720"/>
+                    <a:lstStyle/>
+                    <a:p>
+                      <a:pPr algn="ctr"/>
+                      <a:r>
+                        <a:rPr sz="1300" b="1">
+                          <a:solidFill>
+                            <a:srgbClr val="FFFFFF"/>
+                          </a:solidFill>
+                          <a:latin typeface="NanumGothic"/>
+                        </a:rPr>
+                        <a:t>Accept rule</a:t>
+                      </a:r>
+                    </a:p>
+                  </a:txBody>
+                  <a:tcPr>
+                    <a:solidFill>
+                      <a:srgbClr val="2C5F2D"/>
+                    </a:solidFill>
+                  </a:tcPr>
+                </a:tc>
+                <a:tc>
+                  <a:txBody>
+                    <a:bodyPr lIns="45720" rIns="45720"/>
+                    <a:lstStyle/>
+                    <a:p>
+                      <a:pPr algn="ctr"/>
+                      <a:r>
+                        <a:rPr sz="1300" b="1">
+                          <a:solidFill>
+                            <a:srgbClr val="FFFFFF"/>
+                          </a:solidFill>
+                          <a:latin typeface="NanumGothic"/>
+                        </a:rPr>
+                        <a:t>max_agents</a:t>
+                      </a:r>
+                    </a:p>
+                  </a:txBody>
+                  <a:tcPr>
+                    <a:solidFill>
+                      <a:srgbClr val="2C5F2D"/>
+                    </a:solidFill>
+                  </a:tcPr>
+                </a:tc>
+                <a:tc>
+                  <a:txBody>
+                    <a:bodyPr lIns="45720" rIns="45720"/>
+                    <a:lstStyle/>
+                    <a:p>
+                      <a:pPr algn="ctr"/>
+                      <a:r>
+                        <a:rPr sz="1300" b="1">
+                          <a:solidFill>
+                            <a:srgbClr val="FFFFFF"/>
+                          </a:solidFill>
+                          <a:latin typeface="NanumGothic"/>
+                        </a:rPr>
+                        <a:t>기타 제약</a:t>
+                      </a:r>
+                    </a:p>
+                  </a:txBody>
+                  <a:tcPr>
+                    <a:solidFill>
+                      <a:srgbClr val="2C5F2D"/>
+                    </a:solidFill>
+                  </a:tcPr>
+                </a:tc>
+              </a:tr>
+              <a:tr h="548640">
+                <a:tc>
+                  <a:txBody>
+                    <a:bodyPr lIns="54864" rIns="54864"/>
+                    <a:lstStyle/>
+                    <a:p>
+                      <a:pPr algn="l"/>
+                      <a:r>
+                        <a:rPr sz="1200">
+                          <a:solidFill>
+                            <a:srgbClr val="36454F"/>
+                          </a:solidFill>
+                          <a:latin typeface="NanumGothic"/>
+                        </a:rPr>
+                        <a:t>Legacy (v1, v2 n=30)</a:t>
+                      </a:r>
+                    </a:p>
+                  </a:txBody>
+                  <a:tcPr>
+                    <a:solidFill>
+                      <a:srgbClr val="F5F5F5"/>
+                    </a:solidFill>
+                  </a:tcPr>
+                </a:tc>
+                <a:tc>
+                  <a:txBody>
+                    <a:bodyPr lIns="54864" rIns="54864"/>
+                    <a:lstStyle/>
+                    <a:p>
+                      <a:pPr algn="ctr"/>
+                      <a:r>
+                        <a:rPr sz="1200">
+                          <a:solidFill>
+                            <a:srgbClr val="36454F"/>
+                          </a:solidFill>
+                          <a:latin typeface="NanumGothic"/>
+                        </a:rPr>
+                        <a:t>val_acc &gt; best (strict)</a:t>
+                      </a:r>
+                    </a:p>
+                  </a:txBody>
+                  <a:tcPr>
+                    <a:solidFill>
+                      <a:srgbClr val="F5F5F5"/>
+                    </a:solidFill>
+                  </a:tcPr>
+                </a:tc>
+                <a:tc>
+                  <a:txBody>
+                    <a:bodyPr lIns="54864" rIns="54864"/>
+                    <a:lstStyle/>
+                    <a:p>
+                      <a:pPr algn="ctr"/>
+                      <a:r>
+                        <a:rPr sz="1200">
+                          <a:solidFill>
+                            <a:srgbClr val="36454F"/>
+                          </a:solidFill>
+                          <a:latin typeface="NanumGothic"/>
+                        </a:rPr>
+                        <a:t>8 (soft)</a:t>
+                      </a:r>
+                    </a:p>
+                  </a:txBody>
+                  <a:tcPr>
+                    <a:solidFill>
+                      <a:srgbClr val="F5F5F5"/>
+                    </a:solidFill>
+                  </a:tcPr>
+                </a:tc>
+                <a:tc>
+                  <a:txBody>
+                    <a:bodyPr lIns="54864" rIns="54864"/>
+                    <a:lstStyle/>
+                    <a:p>
+                      <a:pPr algn="ctr"/>
+                      <a:r>
+                        <a:rPr sz="1200">
+                          <a:solidFill>
+                            <a:srgbClr val="36454F"/>
+                          </a:solidFill>
+                          <a:latin typeface="NanumGothic"/>
+                        </a:rPr>
+                        <a:t>tie REJECT</a:t>
+                      </a:r>
+                    </a:p>
+                  </a:txBody>
+                  <a:tcPr>
+                    <a:solidFill>
+                      <a:srgbClr val="F5F5F5"/>
+                    </a:solidFill>
+                  </a:tcPr>
+                </a:tc>
+              </a:tr>
+              <a:tr h="548640">
+                <a:tc>
+                  <a:txBody>
+                    <a:bodyPr lIns="54864" rIns="54864"/>
+                    <a:lstStyle/>
+                    <a:p>
+                      <a:pPr algn="l"/>
+                      <a:r>
+                        <a:rPr sz="1200">
+                          <a:solidFill>
+                            <a:srgbClr val="36454F"/>
+                          </a:solidFill>
+                          <a:latin typeface="NanumGothic"/>
+                        </a:rPr>
+                        <a:t>Streaming (v2 §5.1)</a:t>
+                      </a:r>
+                    </a:p>
+                  </a:txBody>
+                  <a:tcPr>
+                    <a:solidFill>
+                      <a:srgbClr val="FFFFFF"/>
+                    </a:solidFill>
+                  </a:tcPr>
+                </a:tc>
+                <a:tc>
+                  <a:txBody>
+                    <a:bodyPr lIns="54864" rIns="54864"/>
+                    <a:lstStyle/>
+                    <a:p>
+                      <a:pPr algn="ctr"/>
+                      <a:r>
+                        <a:rPr sz="1200">
+                          <a:solidFill>
+                            <a:srgbClr val="36454F"/>
+                          </a:solidFill>
+                          <a:latin typeface="NanumGothic"/>
+                        </a:rPr>
+                        <a:t>paired Δ &gt; ε on same batch</a:t>
+                      </a:r>
+                    </a:p>
+                  </a:txBody>
+                  <a:tcPr>
+                    <a:solidFill>
+                      <a:srgbClr val="FFFFFF"/>
+                    </a:solidFill>
+                  </a:tcPr>
+                </a:tc>
+                <a:tc>
+                  <a:txBody>
+                    <a:bodyPr lIns="54864" rIns="54864"/>
+                    <a:lstStyle/>
+                    <a:p>
+                      <a:pPr algn="ctr"/>
+                      <a:r>
+                        <a:rPr sz="1200">
+                          <a:solidFill>
+                            <a:srgbClr val="36454F"/>
+                          </a:solidFill>
+                          <a:latin typeface="NanumGothic"/>
+                        </a:rPr>
+                        <a:t>8 (soft)</a:t>
+                      </a:r>
+                    </a:p>
+                  </a:txBody>
+                  <a:tcPr>
+                    <a:solidFill>
+                      <a:srgbClr val="FFFFFF"/>
+                    </a:solidFill>
+                  </a:tcPr>
+                </a:tc>
+                <a:tc>
+                  <a:txBody>
+                    <a:bodyPr lIns="54864" rIns="54864"/>
+                    <a:lstStyle/>
+                    <a:p>
+                      <a:pPr algn="ctr"/>
+                      <a:r>
+                        <a:rPr sz="1200">
+                          <a:solidFill>
+                            <a:srgbClr val="36454F"/>
+                          </a:solidFill>
+                          <a:latin typeface="NanumGothic"/>
+                        </a:rPr>
+                        <a:t>concept-level repeat (soft)</a:t>
+                      </a:r>
+                    </a:p>
+                  </a:txBody>
+                  <a:tcPr>
+                    <a:solidFill>
+                      <a:srgbClr val="FFFFFF"/>
+                    </a:solidFill>
+                  </a:tcPr>
+                </a:tc>
+              </a:tr>
+              <a:tr h="548640">
+                <a:tc>
+                  <a:txBody>
+                    <a:bodyPr lIns="54864" rIns="54864"/>
+                    <a:lstStyle/>
+                    <a:p>
+                      <a:pPr algn="l"/>
+                      <a:r>
+                        <a:rPr sz="1200">
+                          <a:solidFill>
+                            <a:srgbClr val="36454F"/>
+                          </a:solidFill>
+                          <a:latin typeface="NanumGothic"/>
+                        </a:rPr>
+                        <a:t>v3 full-pass (§5.2)</a:t>
+                      </a:r>
+                    </a:p>
+                  </a:txBody>
+                  <a:tcPr>
+                    <a:solidFill>
+                      <a:srgbClr val="F5F5F5"/>
+                    </a:solidFill>
+                  </a:tcPr>
+                </a:tc>
+                <a:tc>
+                  <a:txBody>
+                    <a:bodyPr lIns="54864" rIns="54864"/>
+                    <a:lstStyle/>
+                    <a:p>
+                      <a:pPr algn="ctr"/>
+                      <a:r>
+                        <a:rPr sz="1200">
+                          <a:solidFill>
+                            <a:srgbClr val="36454F"/>
+                          </a:solidFill>
+                          <a:latin typeface="NanumGothic"/>
+                        </a:rPr>
+                        <a:t>train_acc(cand) &gt; train_acc(best)</a:t>
+                      </a:r>
+                    </a:p>
+                  </a:txBody>
+                  <a:tcPr>
+                    <a:solidFill>
+                      <a:srgbClr val="F5F5F5"/>
+                    </a:solidFill>
+                  </a:tcPr>
+                </a:tc>
+                <a:tc>
+                  <a:txBody>
+                    <a:bodyPr lIns="54864" rIns="54864"/>
+                    <a:lstStyle/>
+                    <a:p>
+                      <a:pPr algn="ctr"/>
+                      <a:r>
+                        <a:rPr sz="1200">
+                          <a:solidFill>
+                            <a:srgbClr val="36454F"/>
+                          </a:solidFill>
+                          <a:latin typeface="NanumGothic"/>
+                        </a:rPr>
+                        <a:t>10 HARD</a:t>
+                      </a:r>
+                    </a:p>
+                  </a:txBody>
+                  <a:tcPr>
+                    <a:solidFill>
+                      <a:srgbClr val="F5F5F5"/>
+                    </a:solidFill>
+                  </a:tcPr>
+                </a:tc>
+                <a:tc>
+                  <a:txBody>
+                    <a:bodyPr lIns="54864" rIns="54864"/>
+                    <a:lstStyle/>
+                    <a:p>
+                      <a:pPr algn="ctr"/>
+                      <a:r>
+                        <a:rPr sz="1200">
+                          <a:solidFill>
+                            <a:srgbClr val="36454F"/>
+                          </a:solidFill>
+                          <a:latin typeface="NanumGothic"/>
+                        </a:rPr>
+                        <a:t>orphan auto-drop, max_edges=50 soft</a:t>
+                      </a:r>
+                    </a:p>
+                  </a:txBody>
+                  <a:tcPr>
+                    <a:solidFill>
+                      <a:srgbClr val="F5F5F5"/>
+                    </a:solidFill>
+                  </a:tcPr>
+                </a:tc>
+              </a:tr>
+            </a:tbl>
+          </a:graphicData>
+        </a:graphic>
+      </p:graphicFrame>
+      <p:sp>
+        <p:nvSpPr>
+          <p:cNvPr id="6" name="TextBox 5"/>
           <p:cNvSpPr txBox="1"/>
           <p:nvPr/>
         </p:nvSpPr>
         <p:spPr>
           <a:xfrm>
-            <a:off x="548640" y="1280160"/>
-            <a:ext cx="11064240" cy="5120640"/>
+            <a:off x="548640" y="3749039"/>
+            <a:ext cx="11064240" cy="2651760"/>
           </a:xfrm>
           <a:prstGeom prst="rect">
             <a:avLst/>
@@ -6143,77 +6593,45 @@
               </a:lnSpc>
             </a:pPr>
             <a:r>
-              <a:rPr sz="1400">
+              <a:rPr sz="1200">
+                <a:solidFill>
+                  <a:srgbClr val="2C5F2D"/>
+                </a:solidFill>
+                <a:latin typeface="NanumGothic"/>
+              </a:rPr>
+              <a:t>• v3에서 max_agents가 HARD인 이유: prompt-only soft가 컨트롤러에 무시되어 streaming 30~40% INVALID를 만든 사례 (run #1·#2). HARD로 옮기되 cap을 8 → 10으로 완화.</a:t>
+            </a:r>
+          </a:p>
+          <a:p>
+            <a:pPr>
+              <a:lnSpc>
+                <a:spcPct val="130000"/>
+              </a:lnSpc>
+            </a:pPr>
+            <a:r>
+              <a:rPr sz="1200">
+                <a:solidFill>
+                  <a:srgbClr val="2C5F2D"/>
+                </a:solidFill>
+                <a:latin typeface="NanumGothic"/>
+              </a:rPr>
+              <a:t>• orphan auto-drop: apply_edits가 incoming/outgoing 0인 노드를 조용히 제거 → v3 첫 run에서 INVALID 0/10 달성 (streaming 4/10·2/10 대비).</a:t>
+            </a:r>
+          </a:p>
+          <a:p>
+            <a:pPr>
+              <a:lnSpc>
+                <a:spcPct val="130000"/>
+              </a:lnSpc>
+            </a:pPr>
+            <a:r>
+              <a:rPr sz="1200">
                 <a:solidFill>
                   <a:srgbClr val="36454F"/>
                 </a:solidFill>
                 <a:latin typeface="NanumGothic"/>
               </a:rPr>
-              <a:t>• Test acc — 보유한 test split (n=30 또는 n=50)에서의 정확도.</a:t>
-            </a:r>
-          </a:p>
-          <a:p>
-            <a:pPr>
-              <a:lnSpc>
-                <a:spcPct val="130000"/>
-              </a:lnSpc>
-            </a:pPr>
-            <a:r>
-              <a:rPr sz="1400">
-                <a:solidFill>
-                  <a:srgbClr val="36454F"/>
-                </a:solidFill>
-                <a:latin typeface="NanumGothic"/>
-              </a:rPr>
-              <a:t>• Paired-accept rate — streaming mode에서 ACCEPT된 라운드 수 / 전체 유효 라운드.</a:t>
-            </a:r>
-          </a:p>
-          <a:p>
-            <a:pPr>
-              <a:lnSpc>
-                <a:spcPct val="130000"/>
-              </a:lnSpc>
-            </a:pPr>
-            <a:r>
-              <a:rPr sz="1400">
-                <a:solidFill>
-                  <a:srgbClr val="36454F"/>
-                </a:solidFill>
-                <a:latin typeface="NanumGothic"/>
-              </a:rPr>
-              <a:t>• Token cost — controller_tokens + worker_tokens 합 (run 단위).</a:t>
-            </a:r>
-          </a:p>
-          <a:p>
-            <a:pPr>
-              <a:lnSpc>
-                <a:spcPct val="130000"/>
-              </a:lnSpc>
-            </a:pPr>
-            <a:r>
-              <a:rPr sz="1400">
-                <a:solidFill>
-                  <a:srgbClr val="B85042"/>
-                </a:solidFill>
-                <a:latin typeface="NanumGothic"/>
-              </a:rPr>
-              <a:t>• Same-graph 노이즈 floor ≈ ±13pp at n=30 (FinanceBench v2 retry 사례; vLLM batch-ordering, KV-cache state 비결정성, sample 분할 조합).</a:t>
-            </a:r>
-          </a:p>
-          <a:p>
-            <a:pPr>
-              <a:lnSpc>
-                <a:spcPct val="130000"/>
-              </a:lnSpc>
-            </a:pPr>
-            <a:r>
-              <a:rPr sz="1400">
-                <a:solidFill>
-                  <a:srgbClr val="2C5F2D"/>
-                </a:solidFill>
-                <a:latin typeface="NanumGothic"/>
-              </a:rPr>
-              <a:t>• → n=30 단일 시드에서 도출한 architectural Δ는 노이즈 안에 묻힘. 다중 시드/배치 평균이 필수.</a:t>
+              <a:t>• 3 모드 모두 reflection-only (학습 없음, 검색 archive 없음).</a:t>
             </a:r>
           </a:p>
         </p:txBody>
@@ -6334,8 +6752,8 @@
         </p:nvSpPr>
         <p:spPr>
           <a:xfrm>
-            <a:off x="548640" y="1371600"/>
-            <a:ext cx="11064240" cy="5029200"/>
+            <a:off x="548640" y="1280160"/>
+            <a:ext cx="11064240" cy="5212080"/>
           </a:xfrm>
           <a:prstGeom prst="rect">
             <a:avLst/>
@@ -6350,19 +6768,19 @@
           <a:p>
             <a:pPr algn="l">
               <a:lnSpc>
-                <a:spcPct val="140000"/>
-              </a:lnSpc>
-            </a:pPr>
-            <a:r>
-              <a:rPr sz="1400" b="0" i="0">
+                <a:spcPct val="135000"/>
+              </a:lnSpc>
+            </a:pPr>
+            <a:r>
+              <a:rPr sz="1300" b="0" i="0">
                 <a:solidFill>
                   <a:srgbClr val="36454F"/>
                 </a:solidFill>
                 <a:latin typeface="NanumGothic"/>
               </a:rPr>
               <a:t>본 연구는 멀티-에이전트 DAG (위상 + 페르소나 + 엣지)를 LLM 컨트롤러가 오직 in-context 성찰(reflection)만으로 점진적 편집할 수 있는지 묻는 파일럿 연구이다. 컨트롤러는 검색 알고리즘이나 RL 학습 없이, 워커 에이전트들의 trajectory tape을 읽어 다음 라운드에 적용할 EditBatch만 출력한다.
-Qwen2.5-32B 백본 위에서 FinanceBench / MEDIQ / AgentClinic 세 도메인을 대상으로 베이스라인 (CoT, Planner-Executor)과 진화 그래프를 비교한다.
-v1 컨트롤러는 도메인 어휘 없는 'verifier 추가' 반사 행동만 보였고, v2 컨트롤러는 'organization-designer' 프레이밍 + 도메인 brief 도입으로 전문가 페르소나 (예: differential_diagnostician, gaap_analyst)를 출력했다. 측정 노이즈 ±13pp가 architectural 효과를 가리는 문제를 발견하여 streaming evolve 모드 (paired-batch)를 도입했고, 이는 첫 실제 run에서 4/10 paired ACCEPT를 달성 (legacy 1/9 대비). 다중 시드 sweep은 진행 중이다.</a:t>
+Qwen2.5-32B 백본 위에서 FinanceBench / MEDIQ / AgentClinic 세 도메인을 대상으로 CoT, Planner-Executor 두 베이스라인과 진화 그래프를 비교한다.
+v1은 'verifier 추가' 반사만 보였고, v2는 'organization-designer' 프레이밍 + 도메인 brief로 전문가 페르소나(예: differential_diagnostician, gaap_analyst)를 출력. 측정 노이즈 ±13pp 문제를 해결하기 위한 streaming paired-batch 모드는 두 시드에서 Δ vs P-E = +4pp로 재현. 그러나 streaming의 cross-batch absolute acc, max_agents binding, orphan-edit INVALID 라는 구조적 한계를 보고 Controller v3 (full-pass + 샘플 단위 reflection 30→3→1 hierarchical aggregation + 워커 DAG의 [SUMMARY]/[QUERY] side-channel Q&amp;A + orphan auto-drop)를 설계·구현. v3 첫 run (MEDIQ s=0)에서 Evolved 52% &gt; CoT 46% (+6pp) 로 파일럿 최초 CoT-beat 결과 (단일 시드). multi-seed sweep이 venue submission 직전 잔여 작업.</a:t>
             </a:r>
           </a:p>
         </p:txBody>
@@ -6381,7 +6799,7 @@
     <p:bg>
       <p:bgPr>
         <a:solidFill>
-          <a:srgbClr val="2C5F2D"/>
+          <a:srgbClr val="F5F5F5"/>
         </a:solidFill>
         <a:effectLst/>
       </p:bgPr>
@@ -6401,14 +6819,14 @@
         </p:nvSpPr>
         <p:spPr>
           <a:xfrm>
-            <a:off x="548640" y="3108960"/>
-            <a:ext cx="228600" cy="822960"/>
+            <a:off x="0" y="0"/>
+            <a:ext cx="12191695" cy="164592"/>
           </a:xfrm>
           <a:prstGeom prst="rect">
             <a:avLst/>
           </a:prstGeom>
           <a:solidFill>
-            <a:srgbClr val="97BC62"/>
+            <a:srgbClr val="2C5F2D"/>
           </a:solidFill>
           <a:ln>
             <a:noFill/>
@@ -6444,8 +6862,47 @@
         </p:nvSpPr>
         <p:spPr>
           <a:xfrm>
-            <a:off x="1005840" y="3017520"/>
-            <a:ext cx="10972800" cy="914400"/>
+            <a:off x="548640" y="246888"/>
+            <a:ext cx="10972800" cy="292608"/>
+          </a:xfrm>
+          <a:prstGeom prst="rect">
+            <a:avLst/>
+          </a:prstGeom>
+          <a:noFill/>
+        </p:spPr>
+        <p:txBody>
+          <a:bodyPr wrap="square" anchor="t" lIns="54864" rIns="54864" tIns="36576" bIns="36576">
+            <a:spAutoFit/>
+          </a:bodyPr>
+          <a:lstStyle/>
+          <a:p>
+            <a:pPr algn="l">
+              <a:lnSpc>
+                <a:spcPct val="120000"/>
+              </a:lnSpc>
+            </a:pPr>
+            <a:r>
+              <a:rPr sz="1100" b="1" i="0">
+                <a:solidFill>
+                  <a:srgbClr val="97BC62"/>
+                </a:solidFill>
+                <a:latin typeface="NanumGothic"/>
+              </a:rPr>
+              <a:t>구현</a:t>
+            </a:r>
+          </a:p>
+        </p:txBody>
+      </p:sp>
+      <p:sp>
+        <p:nvSpPr>
+          <p:cNvPr id="4" name="TextBox 3"/>
+          <p:cNvSpPr txBox="1"/>
+          <p:nvPr/>
+        </p:nvSpPr>
+        <p:spPr>
+          <a:xfrm>
+            <a:off x="548640" y="502920"/>
+            <a:ext cx="11064240" cy="822960"/>
           </a:xfrm>
           <a:prstGeom prst="rect">
             <a:avLst/>
@@ -6464,27 +6921,27 @@
               </a:lnSpc>
             </a:pPr>
             <a:r>
-              <a:rPr sz="3800" b="1" i="0">
-                <a:solidFill>
-                  <a:srgbClr val="FFFFFF"/>
-                </a:solidFill>
-                <a:latin typeface="NanumGothic"/>
-              </a:rPr>
-              <a:t>7. 실험 결과</a:t>
-            </a:r>
-          </a:p>
-        </p:txBody>
-      </p:sp>
-      <p:sp>
-        <p:nvSpPr>
-          <p:cNvPr id="4" name="TextBox 3"/>
+              <a:rPr sz="3000" b="1" i="0">
+                <a:solidFill>
+                  <a:srgbClr val="36454F"/>
+                </a:solidFill>
+                <a:latin typeface="NanumGothic"/>
+              </a:rPr>
+              <a:t>5. 구현 (Implementation)</a:t>
+            </a:r>
+          </a:p>
+        </p:txBody>
+      </p:sp>
+      <p:sp>
+        <p:nvSpPr>
+          <p:cNvPr id="5" name="TextBox 4"/>
           <p:cNvSpPr txBox="1"/>
           <p:nvPr/>
         </p:nvSpPr>
         <p:spPr>
           <a:xfrm>
-            <a:off x="1005840" y="4023360"/>
-            <a:ext cx="10972800" cy="1280160"/>
+            <a:off x="548640" y="1280160"/>
+            <a:ext cx="5486400" cy="5120640"/>
           </a:xfrm>
           <a:prstGeom prst="rect">
             <a:avLst/>
@@ -6492,24 +6949,307 @@
           <a:noFill/>
         </p:spPr>
         <p:txBody>
-          <a:bodyPr wrap="square" anchor="t" lIns="54864" rIns="54864" tIns="36576" bIns="36576">
+          <a:bodyPr wrap="square" lIns="54864" rIns="54864" tIns="36576" bIns="36576">
             <a:spAutoFit/>
           </a:bodyPr>
           <a:lstStyle/>
           <a:p>
-            <a:pPr algn="l">
-              <a:lnSpc>
-                <a:spcPct val="120000"/>
-              </a:lnSpc>
-            </a:pPr>
-            <a:r>
-              <a:rPr sz="1600" b="0" i="1">
-                <a:solidFill>
-                  <a:srgbClr val="CFD3D7"/>
-                </a:solidFill>
-                <a:latin typeface="NanumGothic"/>
-              </a:rPr>
-              <a:t>calib_01 → v1 n=30 → v2 n=30 → streaming run #1 → patches sanity → §5.2 ongoing</a:t>
+            <a:pPr>
+              <a:lnSpc>
+                <a:spcPct val="130000"/>
+              </a:lnSpc>
+            </a:pPr>
+            <a:r>
+              <a:rPr sz="1300">
+                <a:solidFill>
+                  <a:srgbClr val="36454F"/>
+                </a:solidFill>
+                <a:latin typeface="NanumGothic"/>
+              </a:rPr>
+              <a:t>• src/llm.py — OpenAI-compatible chat client (vLLM @ :8000)</a:t>
+            </a:r>
+          </a:p>
+          <a:p>
+            <a:pPr>
+              <a:lnSpc>
+                <a:spcPct val="130000"/>
+              </a:lnSpc>
+            </a:pPr>
+            <a:r>
+              <a:rPr sz="1300">
+                <a:solidFill>
+                  <a:srgbClr val="36454F"/>
+                </a:solidFill>
+                <a:latin typeface="NanumGothic"/>
+              </a:rPr>
+              <a:t>• src/graph.py — Graph + edit ops + DAG validity 검사</a:t>
+            </a:r>
+          </a:p>
+          <a:p>
+            <a:pPr>
+              <a:lnSpc>
+                <a:spcPct val="130000"/>
+              </a:lnSpc>
+            </a:pPr>
+            <a:r>
+              <a:rPr sz="1300">
+                <a:solidFill>
+                  <a:srgbClr val="36454F"/>
+                </a:solidFill>
+                <a:latin typeface="NanumGothic"/>
+              </a:rPr>
+              <a:t>• src/orchestrator.py — Task → Tape 실행</a:t>
+            </a:r>
+          </a:p>
+          <a:p>
+            <a:pPr>
+              <a:lnSpc>
+                <a:spcPct val="130000"/>
+              </a:lnSpc>
+            </a:pPr>
+            <a:r>
+              <a:rPr sz="1300">
+                <a:solidFill>
+                  <a:srgbClr val="36454F"/>
+                </a:solidFill>
+                <a:latin typeface="NanumGothic"/>
+              </a:rPr>
+              <a:t>• src/controller.py — Reflection LLM, propose_edits()</a:t>
+            </a:r>
+          </a:p>
+          <a:p>
+            <a:pPr>
+              <a:lnSpc>
+                <a:spcPct val="130000"/>
+              </a:lnSpc>
+            </a:pPr>
+            <a:r>
+              <a:rPr sz="1300">
+                <a:solidFill>
+                  <a:srgbClr val="36454F"/>
+                </a:solidFill>
+                <a:latin typeface="NanumGothic"/>
+              </a:rPr>
+              <a:t>• src/evolve.py — legacy + streaming evolve loops</a:t>
+            </a:r>
+          </a:p>
+          <a:p>
+            <a:pPr>
+              <a:lnSpc>
+                <a:spcPct val="130000"/>
+              </a:lnSpc>
+            </a:pPr>
+            <a:r>
+              <a:rPr sz="1300">
+                <a:solidFill>
+                  <a:srgbClr val="36454F"/>
+                </a:solidFill>
+                <a:latin typeface="NanumGothic"/>
+              </a:rPr>
+              <a:t>• src/score.py — MCQ exact-match (MEDIQ) + LLM-judge</a:t>
+            </a:r>
+          </a:p>
+          <a:p>
+            <a:pPr>
+              <a:lnSpc>
+                <a:spcPct val="130000"/>
+              </a:lnSpc>
+            </a:pPr>
+            <a:r>
+              <a:rPr sz="1300">
+                <a:solidFill>
+                  <a:srgbClr val="36454F"/>
+                </a:solidFill>
+                <a:latin typeface="NanumGothic"/>
+              </a:rPr>
+              <a:t>• scripts/run_pilot.py — 드라이버</a:t>
+            </a:r>
+          </a:p>
+          <a:p>
+            <a:pPr>
+              <a:lnSpc>
+                <a:spcPct val="130000"/>
+              </a:lnSpc>
+            </a:pPr>
+            <a:r>
+              <a:rPr sz="1300">
+                <a:solidFill>
+                  <a:srgbClr val="36454F"/>
+                </a:solidFill>
+                <a:latin typeface="NanumGothic"/>
+              </a:rPr>
+              <a:t>• scripts/serve_vllm.sh — vLLM 0.19.1 + gcc 자동 설치</a:t>
+            </a:r>
+          </a:p>
+        </p:txBody>
+      </p:sp>
+      <p:sp>
+        <p:nvSpPr>
+          <p:cNvPr id="6" name="Rounded Rectangle 5"/>
+          <p:cNvSpPr/>
+          <p:nvPr/>
+        </p:nvSpPr>
+        <p:spPr>
+          <a:xfrm>
+            <a:off x="6309360" y="1371600"/>
+            <a:ext cx="5303520" cy="457200"/>
+          </a:xfrm>
+          <a:prstGeom prst="roundRect">
+            <a:avLst/>
+          </a:prstGeom>
+          <a:solidFill>
+            <a:srgbClr val="2C5F2D"/>
+          </a:solidFill>
+          <a:ln>
+            <a:noFill/>
+          </a:ln>
+        </p:spPr>
+        <p:style>
+          <a:lnRef idx="1">
+            <a:schemeClr val="accent1"/>
+          </a:lnRef>
+          <a:fillRef idx="3">
+            <a:schemeClr val="accent1"/>
+          </a:fillRef>
+          <a:effectRef idx="2">
+            <a:schemeClr val="accent1"/>
+          </a:effectRef>
+          <a:fontRef idx="minor">
+            <a:schemeClr val="lt1"/>
+          </a:fontRef>
+        </p:style>
+        <p:txBody>
+          <a:bodyPr rtlCol="0" anchor="ctr" lIns="45720" rIns="45720" tIns="27432" bIns="27432"/>
+          <a:lstStyle/>
+          <a:p>
+            <a:pPr algn="ctr"/>
+            <a:r>
+              <a:rPr sz="1200" b="1">
+                <a:solidFill>
+                  <a:srgbClr val="FFFFFF"/>
+                </a:solidFill>
+                <a:latin typeface="NanumGothic"/>
+              </a:rPr>
+              <a:t>백본: Qwen2.5-32B-Instruct (bf16, single H200)</a:t>
+            </a:r>
+          </a:p>
+        </p:txBody>
+      </p:sp>
+      <p:sp>
+        <p:nvSpPr>
+          <p:cNvPr id="7" name="TextBox 6"/>
+          <p:cNvSpPr txBox="1"/>
+          <p:nvPr/>
+        </p:nvSpPr>
+        <p:spPr>
+          <a:xfrm>
+            <a:off x="6309360" y="1920240"/>
+            <a:ext cx="5303520" cy="4480560"/>
+          </a:xfrm>
+          <a:prstGeom prst="rect">
+            <a:avLst/>
+          </a:prstGeom>
+          <a:noFill/>
+        </p:spPr>
+        <p:txBody>
+          <a:bodyPr wrap="square" lIns="54864" rIns="54864" tIns="36576" bIns="36576">
+            <a:spAutoFit/>
+          </a:bodyPr>
+          <a:lstStyle/>
+          <a:p>
+            <a:pPr>
+              <a:lnSpc>
+                <a:spcPct val="130000"/>
+              </a:lnSpc>
+            </a:pPr>
+            <a:r>
+              <a:rPr sz="1200">
+                <a:solidFill>
+                  <a:srgbClr val="36454F"/>
+                </a:solidFill>
+                <a:latin typeface="NanumGothic"/>
+              </a:rPr>
+              <a:t>• vLLM + prefix caching</a:t>
+            </a:r>
+          </a:p>
+          <a:p>
+            <a:pPr>
+              <a:lnSpc>
+                <a:spcPct val="130000"/>
+              </a:lnSpc>
+            </a:pPr>
+            <a:r>
+              <a:rPr sz="1200">
+                <a:solidFill>
+                  <a:srgbClr val="36454F"/>
+                </a:solidFill>
+                <a:latin typeface="NanumGothic"/>
+              </a:rPr>
+              <a:t>• EVO_GPU_UTIL=0.55 (공유 GPU)</a:t>
+            </a:r>
+          </a:p>
+          <a:p>
+            <a:pPr>
+              <a:lnSpc>
+                <a:spcPct val="130000"/>
+              </a:lnSpc>
+            </a:pPr>
+            <a:r>
+              <a:rPr sz="1200">
+                <a:solidFill>
+                  <a:srgbClr val="36454F"/>
+                </a:solidFill>
+                <a:latin typeface="NanumGothic"/>
+              </a:rPr>
+              <a:t>• max_model_len = 16384</a:t>
+            </a:r>
+          </a:p>
+          <a:p>
+            <a:pPr>
+              <a:lnSpc>
+                <a:spcPct val="130000"/>
+              </a:lnSpc>
+            </a:pPr>
+            <a:r>
+              <a:rPr sz="1200">
+                <a:solidFill>
+                  <a:srgbClr val="36454F"/>
+                </a:solidFill>
+                <a:latin typeface="NanumGothic"/>
+              </a:rPr>
+              <a:t>• uv-managed env, .python-version pin</a:t>
+            </a:r>
+          </a:p>
+          <a:p>
+            <a:pPr>
+              <a:lnSpc>
+                <a:spcPct val="130000"/>
+              </a:lnSpc>
+            </a:pPr>
+            <a:r>
+              <a:rPr sz="1200">
+                <a:solidFill>
+                  <a:srgbClr val="36454F"/>
+                </a:solidFill>
+                <a:latin typeface="NanumGothic"/>
+              </a:rPr>
+              <a:t>• 각 run: results/&lt;run_id&gt;/{evolve_log.json, results.json, plots/}</a:t>
+            </a:r>
+          </a:p>
+          <a:p>
+            <a:pPr>
+              <a:lnSpc>
+                <a:spcPct val="130000"/>
+              </a:lnSpc>
+            </a:pPr>
+            <a:r>
+              <a:rPr sz="1200">
+                <a:solidFill>
+                  <a:srgbClr val="97BC62"/>
+                </a:solidFill>
+                <a:latin typeface="NanumGothic"/>
+              </a:rPr>
+              <a:t>• 코드 + 결과: github.com/namam3gy (project repo)</a:t>
             </a:r>
           </a:p>
         </p:txBody>
@@ -6617,7 +7357,7 @@
                 </a:solidFill>
                 <a:latin typeface="NanumGothic"/>
               </a:rPr>
-              <a:t>실험 결과</a:t>
+              <a:t>실험 설정</a:t>
             </a:r>
           </a:p>
         </p:txBody>
@@ -6656,35 +7396,63 @@
                 </a:solidFill>
                 <a:latin typeface="NanumGothic"/>
               </a:rPr>
-              <a:t>7.1 calib_01 (GSM8K) — pilot의 출발점</a:t>
-            </a:r>
-          </a:p>
-        </p:txBody>
-      </p:sp>
-      <p:pic>
-        <p:nvPicPr>
-          <p:cNvPr id="5" name="Picture 4" descr="accuracy_vs_iter.png"/>
-          <p:cNvPicPr>
-            <a:picLocks noChangeAspect="1"/>
-          </p:cNvPicPr>
-          <p:nvPr/>
-        </p:nvPicPr>
-        <p:blipFill>
-          <a:blip r:embed="rId2"/>
-          <a:stretch>
-            <a:fillRect/>
-          </a:stretch>
-        </p:blipFill>
+              <a:t>6.1 실험 설정 — 도메인</a:t>
+            </a:r>
+          </a:p>
+        </p:txBody>
+      </p:sp>
+      <p:sp>
+        <p:nvSpPr>
+          <p:cNvPr id="5" name="Rounded Rectangle 4"/>
+          <p:cNvSpPr/>
+          <p:nvPr/>
+        </p:nvSpPr>
         <p:spPr>
           <a:xfrm>
             <a:off x="548640" y="1280160"/>
-            <a:ext cx="5852160" cy="3901440"/>
-          </a:xfrm>
-          <a:prstGeom prst="rect">
-            <a:avLst/>
-          </a:prstGeom>
-        </p:spPr>
-      </p:pic>
+            <a:ext cx="3657600" cy="457200"/>
+          </a:xfrm>
+          <a:prstGeom prst="roundRect">
+            <a:avLst/>
+          </a:prstGeom>
+          <a:solidFill>
+            <a:srgbClr val="2C5F2D"/>
+          </a:solidFill>
+          <a:ln>
+            <a:noFill/>
+          </a:ln>
+        </p:spPr>
+        <p:style>
+          <a:lnRef idx="1">
+            <a:schemeClr val="accent1"/>
+          </a:lnRef>
+          <a:fillRef idx="3">
+            <a:schemeClr val="accent1"/>
+          </a:fillRef>
+          <a:effectRef idx="2">
+            <a:schemeClr val="accent1"/>
+          </a:effectRef>
+          <a:fontRef idx="minor">
+            <a:schemeClr val="lt1"/>
+          </a:fontRef>
+        </p:style>
+        <p:txBody>
+          <a:bodyPr rtlCol="0" anchor="ctr" lIns="45720" rIns="45720" tIns="27432" bIns="27432"/>
+          <a:lstStyle/>
+          <a:p>
+            <a:pPr algn="ctr"/>
+            <a:r>
+              <a:rPr sz="1300" b="1">
+                <a:solidFill>
+                  <a:srgbClr val="FFFFFF"/>
+                </a:solidFill>
+                <a:latin typeface="NanumGothic"/>
+              </a:rPr>
+              <a:t>FinanceBench (LLM-judge)</a:t>
+            </a:r>
+          </a:p>
+        </p:txBody>
+      </p:sp>
       <p:sp>
         <p:nvSpPr>
           <p:cNvPr id="6" name="TextBox 5"/>
@@ -6693,8 +7461,8 @@
         </p:nvSpPr>
         <p:spPr>
           <a:xfrm>
-            <a:off x="6675120" y="1371600"/>
-            <a:ext cx="5120640" cy="5120640"/>
+            <a:off x="548640" y="1783080"/>
+            <a:ext cx="3657600" cy="4572000"/>
           </a:xfrm>
           <a:prstGeom prst="rect">
             <a:avLst/>
@@ -6719,7 +7487,7 @@
                 </a:solidFill>
                 <a:latin typeface="NanumGothic"/>
               </a:rPr>
-              <a:t>• Setup: n_val = n_test = 50, max_iters = 3, wall ~66 min.</a:t>
+              <a:t>• 10-K 추출 QA</a:t>
             </a:r>
           </a:p>
           <a:p>
@@ -6735,7 +7503,7 @@
                 </a:solidFill>
                 <a:latin typeface="NanumGothic"/>
               </a:rPr>
-              <a:t>• 결과: Evolved 86 % / CoT 92 % / P-E 90 %.</a:t>
+              <a:t>• GAAP / TTM / 회계연도</a:t>
             </a:r>
           </a:p>
           <a:p>
@@ -6747,11 +7515,11 @@
             <a:r>
               <a:rPr sz="1200">
                 <a:solidFill>
-                  <a:srgbClr val="B85042"/>
-                </a:solidFill>
-                <a:latin typeface="NanumGothic"/>
-              </a:rPr>
-              <a:t>• Evolved가 두 baseline 모두에 패배 (test) + 2-3.7× 토큰 비용.</a:t>
+                  <a:srgbClr val="36454F"/>
+                </a:solidFill>
+                <a:latin typeface="NanumGothic"/>
+              </a:rPr>
+              <a:t>• 긴 컨텍스트 retrieval</a:t>
             </a:r>
           </a:p>
           <a:p>
@@ -6763,13 +7531,88 @@
             <a:r>
               <a:rPr sz="1200">
                 <a:solidFill>
-                  <a:srgbClr val="2C5F2D"/>
-                </a:solidFill>
-                <a:latin typeface="NanumGothic"/>
-              </a:rPr>
-              <a:t>• Insight: GSM8K은 단일-모델 saturation + self-contained 텍스트 + 선형 산술 — 정보 비대칭이 없어서 멀티-에이전트의 lever가 없는 도메인.</a:t>
-            </a:r>
-          </a:p>
+                  <a:srgbClr val="36454F"/>
+                </a:solidFill>
+                <a:latin typeface="NanumGothic"/>
+              </a:rPr>
+              <a:t>• 실패: hedging, 기간 혼동</a:t>
+            </a:r>
+          </a:p>
+        </p:txBody>
+      </p:sp>
+      <p:sp>
+        <p:nvSpPr>
+          <p:cNvPr id="7" name="Rounded Rectangle 6"/>
+          <p:cNvSpPr/>
+          <p:nvPr/>
+        </p:nvSpPr>
+        <p:spPr>
+          <a:xfrm>
+            <a:off x="4297680" y="1280160"/>
+            <a:ext cx="3657600" cy="457200"/>
+          </a:xfrm>
+          <a:prstGeom prst="roundRect">
+            <a:avLst/>
+          </a:prstGeom>
+          <a:solidFill>
+            <a:srgbClr val="2C5F2D"/>
+          </a:solidFill>
+          <a:ln>
+            <a:noFill/>
+          </a:ln>
+        </p:spPr>
+        <p:style>
+          <a:lnRef idx="1">
+            <a:schemeClr val="accent1"/>
+          </a:lnRef>
+          <a:fillRef idx="3">
+            <a:schemeClr val="accent1"/>
+          </a:fillRef>
+          <a:effectRef idx="2">
+            <a:schemeClr val="accent1"/>
+          </a:effectRef>
+          <a:fontRef idx="minor">
+            <a:schemeClr val="lt1"/>
+          </a:fontRef>
+        </p:style>
+        <p:txBody>
+          <a:bodyPr rtlCol="0" anchor="ctr" lIns="45720" rIns="45720" tIns="27432" bIns="27432"/>
+          <a:lstStyle/>
+          <a:p>
+            <a:pPr algn="ctr"/>
+            <a:r>
+              <a:rPr sz="1300" b="1">
+                <a:solidFill>
+                  <a:srgbClr val="FFFFFF"/>
+                </a:solidFill>
+                <a:latin typeface="NanumGothic"/>
+              </a:rPr>
+              <a:t>MEDIQ (MCQ exact-match)</a:t>
+            </a:r>
+          </a:p>
+        </p:txBody>
+      </p:sp>
+      <p:sp>
+        <p:nvSpPr>
+          <p:cNvPr id="8" name="TextBox 7"/>
+          <p:cNvSpPr txBox="1"/>
+          <p:nvPr/>
+        </p:nvSpPr>
+        <p:spPr>
+          <a:xfrm>
+            <a:off x="4297680" y="1783080"/>
+            <a:ext cx="3657600" cy="4572000"/>
+          </a:xfrm>
+          <a:prstGeom prst="rect">
+            <a:avLst/>
+          </a:prstGeom>
+          <a:noFill/>
+        </p:spPr>
+        <p:txBody>
+          <a:bodyPr wrap="square" lIns="54864" rIns="54864" tIns="36576" bIns="36576">
+            <a:spAutoFit/>
+          </a:bodyPr>
+          <a:lstStyle/>
           <a:p>
             <a:pPr>
               <a:lnSpc>
@@ -6783,7 +7626,233 @@
                 </a:solidFill>
                 <a:latin typeface="NanumGothic"/>
               </a:rPr>
-              <a:t>• → 도메인 피봇 결정 (FinanceBench / MEDIQ / AgentClinic).</a:t>
+              <a:t>• 임상 vignette → MCQ</a:t>
+            </a:r>
+          </a:p>
+          <a:p>
+            <a:pPr>
+              <a:lnSpc>
+                <a:spcPct val="130000"/>
+              </a:lnSpc>
+            </a:pPr>
+            <a:r>
+              <a:rPr sz="1200">
+                <a:solidFill>
+                  <a:srgbClr val="36454F"/>
+                </a:solidFill>
+                <a:latin typeface="NanumGothic"/>
+              </a:rPr>
+              <a:t>• 감별 진단 (differential dx)</a:t>
+            </a:r>
+          </a:p>
+          <a:p>
+            <a:pPr>
+              <a:lnSpc>
+                <a:spcPct val="130000"/>
+              </a:lnSpc>
+            </a:pPr>
+            <a:r>
+              <a:rPr sz="1200">
+                <a:solidFill>
+                  <a:srgbClr val="36454F"/>
+                </a:solidFill>
+                <a:latin typeface="NanumGothic"/>
+              </a:rPr>
+              <a:t>• Base-rate reasoning</a:t>
+            </a:r>
+          </a:p>
+          <a:p>
+            <a:pPr>
+              <a:lnSpc>
+                <a:spcPct val="130000"/>
+              </a:lnSpc>
+            </a:pPr>
+            <a:r>
+              <a:rPr sz="1200">
+                <a:solidFill>
+                  <a:srgbClr val="36454F"/>
+                </a:solidFill>
+                <a:latin typeface="NanumGothic"/>
+              </a:rPr>
+              <a:t>• 실패: 인구학 무시</a:t>
+            </a:r>
+          </a:p>
+        </p:txBody>
+      </p:sp>
+      <p:sp>
+        <p:nvSpPr>
+          <p:cNvPr id="9" name="Rounded Rectangle 8"/>
+          <p:cNvSpPr/>
+          <p:nvPr/>
+        </p:nvSpPr>
+        <p:spPr>
+          <a:xfrm>
+            <a:off x="8046720" y="1280160"/>
+            <a:ext cx="3657600" cy="457200"/>
+          </a:xfrm>
+          <a:prstGeom prst="roundRect">
+            <a:avLst/>
+          </a:prstGeom>
+          <a:solidFill>
+            <a:srgbClr val="2C5F2D"/>
+          </a:solidFill>
+          <a:ln>
+            <a:noFill/>
+          </a:ln>
+        </p:spPr>
+        <p:style>
+          <a:lnRef idx="1">
+            <a:schemeClr val="accent1"/>
+          </a:lnRef>
+          <a:fillRef idx="3">
+            <a:schemeClr val="accent1"/>
+          </a:fillRef>
+          <a:effectRef idx="2">
+            <a:schemeClr val="accent1"/>
+          </a:effectRef>
+          <a:fontRef idx="minor">
+            <a:schemeClr val="lt1"/>
+          </a:fontRef>
+        </p:style>
+        <p:txBody>
+          <a:bodyPr rtlCol="0" anchor="ctr" lIns="45720" rIns="45720" tIns="27432" bIns="27432"/>
+          <a:lstStyle/>
+          <a:p>
+            <a:pPr algn="ctr"/>
+            <a:r>
+              <a:rPr sz="1300" b="1">
+                <a:solidFill>
+                  <a:srgbClr val="FFFFFF"/>
+                </a:solidFill>
+                <a:latin typeface="NanumGothic"/>
+              </a:rPr>
+              <a:t>AgentClinic (LLM-judge)</a:t>
+            </a:r>
+          </a:p>
+        </p:txBody>
+      </p:sp>
+      <p:sp>
+        <p:nvSpPr>
+          <p:cNvPr id="10" name="TextBox 9"/>
+          <p:cNvSpPr txBox="1"/>
+          <p:nvPr/>
+        </p:nvSpPr>
+        <p:spPr>
+          <a:xfrm>
+            <a:off x="8046720" y="1783080"/>
+            <a:ext cx="3657600" cy="4572000"/>
+          </a:xfrm>
+          <a:prstGeom prst="rect">
+            <a:avLst/>
+          </a:prstGeom>
+          <a:noFill/>
+        </p:spPr>
+        <p:txBody>
+          <a:bodyPr wrap="square" lIns="54864" rIns="54864" tIns="36576" bIns="36576">
+            <a:spAutoFit/>
+          </a:bodyPr>
+          <a:lstStyle/>
+          <a:p>
+            <a:pPr>
+              <a:lnSpc>
+                <a:spcPct val="130000"/>
+              </a:lnSpc>
+            </a:pPr>
+            <a:r>
+              <a:rPr sz="1200">
+                <a:solidFill>
+                  <a:srgbClr val="36454F"/>
+                </a:solidFill>
+                <a:latin typeface="NanumGothic"/>
+              </a:rPr>
+              <a:t>• single-pass 임상 케이스</a:t>
+            </a:r>
+          </a:p>
+          <a:p>
+            <a:pPr>
+              <a:lnSpc>
+                <a:spcPct val="130000"/>
+              </a:lnSpc>
+            </a:pPr>
+            <a:r>
+              <a:rPr sz="1200">
+                <a:solidFill>
+                  <a:srgbClr val="36454F"/>
+                </a:solidFill>
+                <a:latin typeface="NanumGothic"/>
+              </a:rPr>
+              <a:t>• Specialty routing</a:t>
+            </a:r>
+          </a:p>
+          <a:p>
+            <a:pPr>
+              <a:lnSpc>
+                <a:spcPct val="130000"/>
+              </a:lnSpc>
+            </a:pPr>
+            <a:r>
+              <a:rPr sz="1200">
+                <a:solidFill>
+                  <a:srgbClr val="36454F"/>
+                </a:solidFill>
+                <a:latin typeface="NanumGothic"/>
+              </a:rPr>
+              <a:t>• Decisive answer 요구</a:t>
+            </a:r>
+          </a:p>
+          <a:p>
+            <a:pPr>
+              <a:lnSpc>
+                <a:spcPct val="130000"/>
+              </a:lnSpc>
+            </a:pPr>
+            <a:r>
+              <a:rPr sz="1200">
+                <a:solidFill>
+                  <a:srgbClr val="36454F"/>
+                </a:solidFill>
+                <a:latin typeface="NanumGothic"/>
+              </a:rPr>
+              <a:t>• 실패: triage 오류</a:t>
+            </a:r>
+          </a:p>
+        </p:txBody>
+      </p:sp>
+      <p:sp>
+        <p:nvSpPr>
+          <p:cNvPr id="11" name="TextBox 10"/>
+          <p:cNvSpPr txBox="1"/>
+          <p:nvPr/>
+        </p:nvSpPr>
+        <p:spPr>
+          <a:xfrm>
+            <a:off x="548640" y="5943600"/>
+            <a:ext cx="11064240" cy="548640"/>
+          </a:xfrm>
+          <a:prstGeom prst="rect">
+            <a:avLst/>
+          </a:prstGeom>
+          <a:noFill/>
+        </p:spPr>
+        <p:txBody>
+          <a:bodyPr wrap="square" anchor="t" lIns="54864" rIns="54864" tIns="36576" bIns="36576">
+            <a:spAutoFit/>
+          </a:bodyPr>
+          <a:lstStyle/>
+          <a:p>
+            <a:pPr algn="l">
+              <a:lnSpc>
+                <a:spcPct val="120000"/>
+              </a:lnSpc>
+            </a:pPr>
+            <a:r>
+              <a:rPr sz="1200" b="0" i="1">
+                <a:solidFill>
+                  <a:srgbClr val="36454F"/>
+                </a:solidFill>
+                <a:latin typeface="NanumGothic"/>
+              </a:rPr>
+              <a:t>공통: Qwen2.5-32B-Instruct, val/test sample 분할 별도, seed 명시.</a:t>
             </a:r>
           </a:p>
         </p:txBody>
@@ -6797,6 +7866,677 @@
 </file>
 
 <file path=ppt/slides/slide22.xml><?xml version="1.0" encoding="utf-8"?>
+<p:sld xmlns:a="http://schemas.openxmlformats.org/drawingml/2006/main" xmlns:p="http://schemas.openxmlformats.org/presentationml/2006/main" xmlns:r="http://schemas.openxmlformats.org/officeDocument/2006/relationships">
+  <p:cSld>
+    <p:bg>
+      <p:bgPr>
+        <a:solidFill>
+          <a:srgbClr val="F5F5F5"/>
+        </a:solidFill>
+        <a:effectLst/>
+      </p:bgPr>
+    </p:bg>
+    <p:spTree>
+      <p:nvGrpSpPr>
+        <p:cNvPr id="1" name=""/>
+        <p:cNvGrpSpPr/>
+        <p:nvPr/>
+      </p:nvGrpSpPr>
+      <p:grpSpPr/>
+      <p:sp>
+        <p:nvSpPr>
+          <p:cNvPr id="2" name="Rectangle 1"/>
+          <p:cNvSpPr/>
+          <p:nvPr/>
+        </p:nvSpPr>
+        <p:spPr>
+          <a:xfrm>
+            <a:off x="0" y="0"/>
+            <a:ext cx="12191695" cy="164592"/>
+          </a:xfrm>
+          <a:prstGeom prst="rect">
+            <a:avLst/>
+          </a:prstGeom>
+          <a:solidFill>
+            <a:srgbClr val="2C5F2D"/>
+          </a:solidFill>
+          <a:ln>
+            <a:noFill/>
+          </a:ln>
+        </p:spPr>
+        <p:style>
+          <a:lnRef idx="1">
+            <a:schemeClr val="accent1"/>
+          </a:lnRef>
+          <a:fillRef idx="3">
+            <a:schemeClr val="accent1"/>
+          </a:fillRef>
+          <a:effectRef idx="2">
+            <a:schemeClr val="accent1"/>
+          </a:effectRef>
+          <a:fontRef idx="minor">
+            <a:schemeClr val="lt1"/>
+          </a:fontRef>
+        </p:style>
+        <p:txBody>
+          <a:bodyPr rtlCol="0" anchor="ctr"/>
+          <a:lstStyle/>
+          <a:p>
+            <a:pPr algn="ctr"/>
+          </a:p>
+        </p:txBody>
+      </p:sp>
+      <p:sp>
+        <p:nvSpPr>
+          <p:cNvPr id="3" name="TextBox 2"/>
+          <p:cNvSpPr txBox="1"/>
+          <p:nvPr/>
+        </p:nvSpPr>
+        <p:spPr>
+          <a:xfrm>
+            <a:off x="548640" y="246888"/>
+            <a:ext cx="10972800" cy="292608"/>
+          </a:xfrm>
+          <a:prstGeom prst="rect">
+            <a:avLst/>
+          </a:prstGeom>
+          <a:noFill/>
+        </p:spPr>
+        <p:txBody>
+          <a:bodyPr wrap="square" anchor="t" lIns="54864" rIns="54864" tIns="36576" bIns="36576">
+            <a:spAutoFit/>
+          </a:bodyPr>
+          <a:lstStyle/>
+          <a:p>
+            <a:pPr algn="l">
+              <a:lnSpc>
+                <a:spcPct val="120000"/>
+              </a:lnSpc>
+            </a:pPr>
+            <a:r>
+              <a:rPr sz="1100" b="1" i="0">
+                <a:solidFill>
+                  <a:srgbClr val="97BC62"/>
+                </a:solidFill>
+                <a:latin typeface="NanumGothic"/>
+              </a:rPr>
+              <a:t>실험 설정</a:t>
+            </a:r>
+          </a:p>
+        </p:txBody>
+      </p:sp>
+      <p:sp>
+        <p:nvSpPr>
+          <p:cNvPr id="4" name="TextBox 3"/>
+          <p:cNvSpPr txBox="1"/>
+          <p:nvPr/>
+        </p:nvSpPr>
+        <p:spPr>
+          <a:xfrm>
+            <a:off x="548640" y="502920"/>
+            <a:ext cx="11064240" cy="822960"/>
+          </a:xfrm>
+          <a:prstGeom prst="rect">
+            <a:avLst/>
+          </a:prstGeom>
+          <a:noFill/>
+        </p:spPr>
+        <p:txBody>
+          <a:bodyPr wrap="square" anchor="ctr" lIns="54864" rIns="54864" tIns="36576" bIns="36576">
+            <a:spAutoFit/>
+          </a:bodyPr>
+          <a:lstStyle/>
+          <a:p>
+            <a:pPr algn="l">
+              <a:lnSpc>
+                <a:spcPct val="120000"/>
+              </a:lnSpc>
+            </a:pPr>
+            <a:r>
+              <a:rPr sz="3000" b="1" i="0">
+                <a:solidFill>
+                  <a:srgbClr val="36454F"/>
+                </a:solidFill>
+                <a:latin typeface="NanumGothic"/>
+              </a:rPr>
+              <a:t>6.2 측정 지표 + 노이즈 floor</a:t>
+            </a:r>
+          </a:p>
+        </p:txBody>
+      </p:sp>
+      <p:sp>
+        <p:nvSpPr>
+          <p:cNvPr id="5" name="TextBox 4"/>
+          <p:cNvSpPr txBox="1"/>
+          <p:nvPr/>
+        </p:nvSpPr>
+        <p:spPr>
+          <a:xfrm>
+            <a:off x="548640" y="1280160"/>
+            <a:ext cx="11064240" cy="5120640"/>
+          </a:xfrm>
+          <a:prstGeom prst="rect">
+            <a:avLst/>
+          </a:prstGeom>
+          <a:noFill/>
+        </p:spPr>
+        <p:txBody>
+          <a:bodyPr wrap="square" lIns="54864" rIns="54864" tIns="36576" bIns="36576">
+            <a:spAutoFit/>
+          </a:bodyPr>
+          <a:lstStyle/>
+          <a:p>
+            <a:pPr>
+              <a:lnSpc>
+                <a:spcPct val="130000"/>
+              </a:lnSpc>
+            </a:pPr>
+            <a:r>
+              <a:rPr sz="1400">
+                <a:solidFill>
+                  <a:srgbClr val="36454F"/>
+                </a:solidFill>
+                <a:latin typeface="NanumGothic"/>
+              </a:rPr>
+              <a:t>• Test acc — 보유한 test split (n=30 또는 n=50)에서의 정확도.</a:t>
+            </a:r>
+          </a:p>
+          <a:p>
+            <a:pPr>
+              <a:lnSpc>
+                <a:spcPct val="130000"/>
+              </a:lnSpc>
+            </a:pPr>
+            <a:r>
+              <a:rPr sz="1400">
+                <a:solidFill>
+                  <a:srgbClr val="36454F"/>
+                </a:solidFill>
+                <a:latin typeface="NanumGothic"/>
+              </a:rPr>
+              <a:t>• Paired-accept rate — streaming mode에서 ACCEPT된 라운드 수 / 전체 유효 라운드.</a:t>
+            </a:r>
+          </a:p>
+          <a:p>
+            <a:pPr>
+              <a:lnSpc>
+                <a:spcPct val="130000"/>
+              </a:lnSpc>
+            </a:pPr>
+            <a:r>
+              <a:rPr sz="1400">
+                <a:solidFill>
+                  <a:srgbClr val="36454F"/>
+                </a:solidFill>
+                <a:latin typeface="NanumGothic"/>
+              </a:rPr>
+              <a:t>• Token cost — controller_tokens + worker_tokens 합 (run 단위).</a:t>
+            </a:r>
+          </a:p>
+          <a:p>
+            <a:pPr>
+              <a:lnSpc>
+                <a:spcPct val="130000"/>
+              </a:lnSpc>
+            </a:pPr>
+            <a:r>
+              <a:rPr sz="1400">
+                <a:solidFill>
+                  <a:srgbClr val="B85042"/>
+                </a:solidFill>
+                <a:latin typeface="NanumGothic"/>
+              </a:rPr>
+              <a:t>• Same-graph 노이즈 floor ≈ ±13pp at n=30 (FinanceBench v2 retry 사례; vLLM batch-ordering, KV-cache state 비결정성, sample 분할 조합).</a:t>
+            </a:r>
+          </a:p>
+          <a:p>
+            <a:pPr>
+              <a:lnSpc>
+                <a:spcPct val="130000"/>
+              </a:lnSpc>
+            </a:pPr>
+            <a:r>
+              <a:rPr sz="1400">
+                <a:solidFill>
+                  <a:srgbClr val="2C5F2D"/>
+                </a:solidFill>
+                <a:latin typeface="NanumGothic"/>
+              </a:rPr>
+              <a:t>• → n=30 단일 시드에서 도출한 architectural Δ는 노이즈 안에 묻힘. 다중 시드/배치 평균이 필수.</a:t>
+            </a:r>
+          </a:p>
+        </p:txBody>
+      </p:sp>
+    </p:spTree>
+  </p:cSld>
+  <p:clrMapOvr>
+    <a:masterClrMapping/>
+  </p:clrMapOvr>
+</p:sld>
+</file>
+
+<file path=ppt/slides/slide23.xml><?xml version="1.0" encoding="utf-8"?>
+<p:sld xmlns:a="http://schemas.openxmlformats.org/drawingml/2006/main" xmlns:p="http://schemas.openxmlformats.org/presentationml/2006/main" xmlns:r="http://schemas.openxmlformats.org/officeDocument/2006/relationships">
+  <p:cSld>
+    <p:bg>
+      <p:bgPr>
+        <a:solidFill>
+          <a:srgbClr val="2C5F2D"/>
+        </a:solidFill>
+        <a:effectLst/>
+      </p:bgPr>
+    </p:bg>
+    <p:spTree>
+      <p:nvGrpSpPr>
+        <p:cNvPr id="1" name=""/>
+        <p:cNvGrpSpPr/>
+        <p:nvPr/>
+      </p:nvGrpSpPr>
+      <p:grpSpPr/>
+      <p:sp>
+        <p:nvSpPr>
+          <p:cNvPr id="2" name="Rectangle 1"/>
+          <p:cNvSpPr/>
+          <p:nvPr/>
+        </p:nvSpPr>
+        <p:spPr>
+          <a:xfrm>
+            <a:off x="548640" y="3108960"/>
+            <a:ext cx="228600" cy="822960"/>
+          </a:xfrm>
+          <a:prstGeom prst="rect">
+            <a:avLst/>
+          </a:prstGeom>
+          <a:solidFill>
+            <a:srgbClr val="97BC62"/>
+          </a:solidFill>
+          <a:ln>
+            <a:noFill/>
+          </a:ln>
+        </p:spPr>
+        <p:style>
+          <a:lnRef idx="1">
+            <a:schemeClr val="accent1"/>
+          </a:lnRef>
+          <a:fillRef idx="3">
+            <a:schemeClr val="accent1"/>
+          </a:fillRef>
+          <a:effectRef idx="2">
+            <a:schemeClr val="accent1"/>
+          </a:effectRef>
+          <a:fontRef idx="minor">
+            <a:schemeClr val="lt1"/>
+          </a:fontRef>
+        </p:style>
+        <p:txBody>
+          <a:bodyPr rtlCol="0" anchor="ctr"/>
+          <a:lstStyle/>
+          <a:p>
+            <a:pPr algn="ctr"/>
+          </a:p>
+        </p:txBody>
+      </p:sp>
+      <p:sp>
+        <p:nvSpPr>
+          <p:cNvPr id="3" name="TextBox 2"/>
+          <p:cNvSpPr txBox="1"/>
+          <p:nvPr/>
+        </p:nvSpPr>
+        <p:spPr>
+          <a:xfrm>
+            <a:off x="1005840" y="3017520"/>
+            <a:ext cx="10972800" cy="914400"/>
+          </a:xfrm>
+          <a:prstGeom prst="rect">
+            <a:avLst/>
+          </a:prstGeom>
+          <a:noFill/>
+        </p:spPr>
+        <p:txBody>
+          <a:bodyPr wrap="square" anchor="ctr" lIns="54864" rIns="54864" tIns="36576" bIns="36576">
+            <a:spAutoFit/>
+          </a:bodyPr>
+          <a:lstStyle/>
+          <a:p>
+            <a:pPr algn="l">
+              <a:lnSpc>
+                <a:spcPct val="120000"/>
+              </a:lnSpc>
+            </a:pPr>
+            <a:r>
+              <a:rPr sz="3800" b="1" i="0">
+                <a:solidFill>
+                  <a:srgbClr val="FFFFFF"/>
+                </a:solidFill>
+                <a:latin typeface="NanumGothic"/>
+              </a:rPr>
+              <a:t>7. 실험 결과</a:t>
+            </a:r>
+          </a:p>
+        </p:txBody>
+      </p:sp>
+      <p:sp>
+        <p:nvSpPr>
+          <p:cNvPr id="4" name="TextBox 3"/>
+          <p:cNvSpPr txBox="1"/>
+          <p:nvPr/>
+        </p:nvSpPr>
+        <p:spPr>
+          <a:xfrm>
+            <a:off x="1005840" y="4023360"/>
+            <a:ext cx="10972800" cy="1280160"/>
+          </a:xfrm>
+          <a:prstGeom prst="rect">
+            <a:avLst/>
+          </a:prstGeom>
+          <a:noFill/>
+        </p:spPr>
+        <p:txBody>
+          <a:bodyPr wrap="square" anchor="t" lIns="54864" rIns="54864" tIns="36576" bIns="36576">
+            <a:spAutoFit/>
+          </a:bodyPr>
+          <a:lstStyle/>
+          <a:p>
+            <a:pPr algn="l">
+              <a:lnSpc>
+                <a:spcPct val="120000"/>
+              </a:lnSpc>
+            </a:pPr>
+            <a:r>
+              <a:rPr sz="1600" b="0" i="1">
+                <a:solidFill>
+                  <a:srgbClr val="CFD3D7"/>
+                </a:solidFill>
+                <a:latin typeface="NanumGothic"/>
+              </a:rPr>
+              <a:t>calib_01 → v1 n=30 → v2 n=30 → streaming run #1 → patches sanity → §5.2 ongoing</a:t>
+            </a:r>
+          </a:p>
+        </p:txBody>
+      </p:sp>
+    </p:spTree>
+  </p:cSld>
+  <p:clrMapOvr>
+    <a:masterClrMapping/>
+  </p:clrMapOvr>
+</p:sld>
+</file>
+
+<file path=ppt/slides/slide24.xml><?xml version="1.0" encoding="utf-8"?>
+<p:sld xmlns:a="http://schemas.openxmlformats.org/drawingml/2006/main" xmlns:p="http://schemas.openxmlformats.org/presentationml/2006/main" xmlns:r="http://schemas.openxmlformats.org/officeDocument/2006/relationships">
+  <p:cSld>
+    <p:bg>
+      <p:bgPr>
+        <a:solidFill>
+          <a:srgbClr val="F5F5F5"/>
+        </a:solidFill>
+        <a:effectLst/>
+      </p:bgPr>
+    </p:bg>
+    <p:spTree>
+      <p:nvGrpSpPr>
+        <p:cNvPr id="1" name=""/>
+        <p:cNvGrpSpPr/>
+        <p:nvPr/>
+      </p:nvGrpSpPr>
+      <p:grpSpPr/>
+      <p:sp>
+        <p:nvSpPr>
+          <p:cNvPr id="2" name="Rectangle 1"/>
+          <p:cNvSpPr/>
+          <p:nvPr/>
+        </p:nvSpPr>
+        <p:spPr>
+          <a:xfrm>
+            <a:off x="0" y="0"/>
+            <a:ext cx="12191695" cy="164592"/>
+          </a:xfrm>
+          <a:prstGeom prst="rect">
+            <a:avLst/>
+          </a:prstGeom>
+          <a:solidFill>
+            <a:srgbClr val="2C5F2D"/>
+          </a:solidFill>
+          <a:ln>
+            <a:noFill/>
+          </a:ln>
+        </p:spPr>
+        <p:style>
+          <a:lnRef idx="1">
+            <a:schemeClr val="accent1"/>
+          </a:lnRef>
+          <a:fillRef idx="3">
+            <a:schemeClr val="accent1"/>
+          </a:fillRef>
+          <a:effectRef idx="2">
+            <a:schemeClr val="accent1"/>
+          </a:effectRef>
+          <a:fontRef idx="minor">
+            <a:schemeClr val="lt1"/>
+          </a:fontRef>
+        </p:style>
+        <p:txBody>
+          <a:bodyPr rtlCol="0" anchor="ctr"/>
+          <a:lstStyle/>
+          <a:p>
+            <a:pPr algn="ctr"/>
+          </a:p>
+        </p:txBody>
+      </p:sp>
+      <p:sp>
+        <p:nvSpPr>
+          <p:cNvPr id="3" name="TextBox 2"/>
+          <p:cNvSpPr txBox="1"/>
+          <p:nvPr/>
+        </p:nvSpPr>
+        <p:spPr>
+          <a:xfrm>
+            <a:off x="548640" y="246888"/>
+            <a:ext cx="10972800" cy="292608"/>
+          </a:xfrm>
+          <a:prstGeom prst="rect">
+            <a:avLst/>
+          </a:prstGeom>
+          <a:noFill/>
+        </p:spPr>
+        <p:txBody>
+          <a:bodyPr wrap="square" anchor="t" lIns="54864" rIns="54864" tIns="36576" bIns="36576">
+            <a:spAutoFit/>
+          </a:bodyPr>
+          <a:lstStyle/>
+          <a:p>
+            <a:pPr algn="l">
+              <a:lnSpc>
+                <a:spcPct val="120000"/>
+              </a:lnSpc>
+            </a:pPr>
+            <a:r>
+              <a:rPr sz="1100" b="1" i="0">
+                <a:solidFill>
+                  <a:srgbClr val="97BC62"/>
+                </a:solidFill>
+                <a:latin typeface="NanumGothic"/>
+              </a:rPr>
+              <a:t>실험 결과</a:t>
+            </a:r>
+          </a:p>
+        </p:txBody>
+      </p:sp>
+      <p:sp>
+        <p:nvSpPr>
+          <p:cNvPr id="4" name="TextBox 3"/>
+          <p:cNvSpPr txBox="1"/>
+          <p:nvPr/>
+        </p:nvSpPr>
+        <p:spPr>
+          <a:xfrm>
+            <a:off x="548640" y="502920"/>
+            <a:ext cx="11064240" cy="822960"/>
+          </a:xfrm>
+          <a:prstGeom prst="rect">
+            <a:avLst/>
+          </a:prstGeom>
+          <a:noFill/>
+        </p:spPr>
+        <p:txBody>
+          <a:bodyPr wrap="square" anchor="ctr" lIns="54864" rIns="54864" tIns="36576" bIns="36576">
+            <a:spAutoFit/>
+          </a:bodyPr>
+          <a:lstStyle/>
+          <a:p>
+            <a:pPr algn="l">
+              <a:lnSpc>
+                <a:spcPct val="120000"/>
+              </a:lnSpc>
+            </a:pPr>
+            <a:r>
+              <a:rPr sz="3000" b="1" i="0">
+                <a:solidFill>
+                  <a:srgbClr val="36454F"/>
+                </a:solidFill>
+                <a:latin typeface="NanumGothic"/>
+              </a:rPr>
+              <a:t>7.1 calib_01 (GSM8K) — pilot의 출발점</a:t>
+            </a:r>
+          </a:p>
+        </p:txBody>
+      </p:sp>
+      <p:pic>
+        <p:nvPicPr>
+          <p:cNvPr id="5" name="Picture 4" descr="accuracy_vs_iter.png"/>
+          <p:cNvPicPr>
+            <a:picLocks noChangeAspect="1"/>
+          </p:cNvPicPr>
+          <p:nvPr/>
+        </p:nvPicPr>
+        <p:blipFill>
+          <a:blip r:embed="rId2"/>
+          <a:stretch>
+            <a:fillRect/>
+          </a:stretch>
+        </p:blipFill>
+        <p:spPr>
+          <a:xfrm>
+            <a:off x="548640" y="1280160"/>
+            <a:ext cx="5852160" cy="3901440"/>
+          </a:xfrm>
+          <a:prstGeom prst="rect">
+            <a:avLst/>
+          </a:prstGeom>
+        </p:spPr>
+      </p:pic>
+      <p:sp>
+        <p:nvSpPr>
+          <p:cNvPr id="6" name="TextBox 5"/>
+          <p:cNvSpPr txBox="1"/>
+          <p:nvPr/>
+        </p:nvSpPr>
+        <p:spPr>
+          <a:xfrm>
+            <a:off x="6675120" y="1371600"/>
+            <a:ext cx="5120640" cy="5120640"/>
+          </a:xfrm>
+          <a:prstGeom prst="rect">
+            <a:avLst/>
+          </a:prstGeom>
+          <a:noFill/>
+        </p:spPr>
+        <p:txBody>
+          <a:bodyPr wrap="square" lIns="54864" rIns="54864" tIns="36576" bIns="36576">
+            <a:spAutoFit/>
+          </a:bodyPr>
+          <a:lstStyle/>
+          <a:p>
+            <a:pPr>
+              <a:lnSpc>
+                <a:spcPct val="130000"/>
+              </a:lnSpc>
+            </a:pPr>
+            <a:r>
+              <a:rPr sz="1200">
+                <a:solidFill>
+                  <a:srgbClr val="36454F"/>
+                </a:solidFill>
+                <a:latin typeface="NanumGothic"/>
+              </a:rPr>
+              <a:t>• Setup: n_val = n_test = 50, max_iters = 3, wall ~66 min.</a:t>
+            </a:r>
+          </a:p>
+          <a:p>
+            <a:pPr>
+              <a:lnSpc>
+                <a:spcPct val="130000"/>
+              </a:lnSpc>
+            </a:pPr>
+            <a:r>
+              <a:rPr sz="1200">
+                <a:solidFill>
+                  <a:srgbClr val="36454F"/>
+                </a:solidFill>
+                <a:latin typeface="NanumGothic"/>
+              </a:rPr>
+              <a:t>• 결과: Evolved 86 % / CoT 92 % / P-E 90 %.</a:t>
+            </a:r>
+          </a:p>
+          <a:p>
+            <a:pPr>
+              <a:lnSpc>
+                <a:spcPct val="130000"/>
+              </a:lnSpc>
+            </a:pPr>
+            <a:r>
+              <a:rPr sz="1200">
+                <a:solidFill>
+                  <a:srgbClr val="B85042"/>
+                </a:solidFill>
+                <a:latin typeface="NanumGothic"/>
+              </a:rPr>
+              <a:t>• Evolved가 두 baseline 모두에 패배 (test) + 2-3.7× 토큰 비용.</a:t>
+            </a:r>
+          </a:p>
+          <a:p>
+            <a:pPr>
+              <a:lnSpc>
+                <a:spcPct val="130000"/>
+              </a:lnSpc>
+            </a:pPr>
+            <a:r>
+              <a:rPr sz="1200">
+                <a:solidFill>
+                  <a:srgbClr val="2C5F2D"/>
+                </a:solidFill>
+                <a:latin typeface="NanumGothic"/>
+              </a:rPr>
+              <a:t>• Insight: GSM8K은 단일-모델 saturation + self-contained 텍스트 + 선형 산술 — 정보 비대칭이 없어서 멀티-에이전트의 lever가 없는 도메인.</a:t>
+            </a:r>
+          </a:p>
+          <a:p>
+            <a:pPr>
+              <a:lnSpc>
+                <a:spcPct val="130000"/>
+              </a:lnSpc>
+            </a:pPr>
+            <a:r>
+              <a:rPr sz="1200">
+                <a:solidFill>
+                  <a:srgbClr val="36454F"/>
+                </a:solidFill>
+                <a:latin typeface="NanumGothic"/>
+              </a:rPr>
+              <a:t>• → 도메인 피봇 결정 (FinanceBench / MEDIQ / AgentClinic).</a:t>
+            </a:r>
+          </a:p>
+        </p:txBody>
+      </p:sp>
+    </p:spTree>
+  </p:cSld>
+  <p:clrMapOvr>
+    <a:masterClrMapping/>
+  </p:clrMapOvr>
+</p:sld>
+</file>
+
+<file path=ppt/slides/slide25.xml><?xml version="1.0" encoding="utf-8"?>
 <p:sld xmlns:a="http://schemas.openxmlformats.org/drawingml/2006/main" xmlns:p="http://schemas.openxmlformats.org/presentationml/2006/main" xmlns:r="http://schemas.openxmlformats.org/officeDocument/2006/relationships">
   <p:cSld>
     <p:bg>
@@ -7527,7 +9267,7 @@
 </p:sld>
 </file>
 
-<file path=ppt/slides/slide23.xml><?xml version="1.0" encoding="utf-8"?>
+<file path=ppt/slides/slide26.xml><?xml version="1.0" encoding="utf-8"?>
 <p:sld xmlns:a="http://schemas.openxmlformats.org/drawingml/2006/main" xmlns:p="http://schemas.openxmlformats.org/presentationml/2006/main" xmlns:r="http://schemas.openxmlformats.org/officeDocument/2006/relationships">
   <p:cSld>
     <p:bg>
@@ -8335,7 +10075,7 @@
 </p:sld>
 </file>
 
-<file path=ppt/slides/slide24.xml><?xml version="1.0" encoding="utf-8"?>
+<file path=ppt/slides/slide27.xml><?xml version="1.0" encoding="utf-8"?>
 <p:sld xmlns:a="http://schemas.openxmlformats.org/drawingml/2006/main" xmlns:p="http://schemas.openxmlformats.org/presentationml/2006/main" xmlns:r="http://schemas.openxmlformats.org/officeDocument/2006/relationships">
   <p:cSld>
     <p:bg>
@@ -8613,931 +10353,6 @@
                 <a:latin typeface="NanumGothic"/>
               </a:rPr>
               <a:t>• legacy v2가 3 도메인 × 3 iter에서 1 ACCEPT였던 것과 비교 — streaming-mode가 fire함.</a:t>
-            </a:r>
-          </a:p>
-        </p:txBody>
-      </p:sp>
-    </p:spTree>
-  </p:cSld>
-  <p:clrMapOvr>
-    <a:masterClrMapping/>
-  </p:clrMapOvr>
-</p:sld>
-</file>
-
-<file path=ppt/slides/slide25.xml><?xml version="1.0" encoding="utf-8"?>
-<p:sld xmlns:a="http://schemas.openxmlformats.org/drawingml/2006/main" xmlns:p="http://schemas.openxmlformats.org/presentationml/2006/main" xmlns:r="http://schemas.openxmlformats.org/officeDocument/2006/relationships">
-  <p:cSld>
-    <p:bg>
-      <p:bgPr>
-        <a:solidFill>
-          <a:srgbClr val="F5F5F5"/>
-        </a:solidFill>
-        <a:effectLst/>
-      </p:bgPr>
-    </p:bg>
-    <p:spTree>
-      <p:nvGrpSpPr>
-        <p:cNvPr id="1" name=""/>
-        <p:cNvGrpSpPr/>
-        <p:nvPr/>
-      </p:nvGrpSpPr>
-      <p:grpSpPr/>
-      <p:sp>
-        <p:nvSpPr>
-          <p:cNvPr id="2" name="Rectangle 1"/>
-          <p:cNvSpPr/>
-          <p:nvPr/>
-        </p:nvSpPr>
-        <p:spPr>
-          <a:xfrm>
-            <a:off x="0" y="0"/>
-            <a:ext cx="12191695" cy="164592"/>
-          </a:xfrm>
-          <a:prstGeom prst="rect">
-            <a:avLst/>
-          </a:prstGeom>
-          <a:solidFill>
-            <a:srgbClr val="2C5F2D"/>
-          </a:solidFill>
-          <a:ln>
-            <a:noFill/>
-          </a:ln>
-        </p:spPr>
-        <p:style>
-          <a:lnRef idx="1">
-            <a:schemeClr val="accent1"/>
-          </a:lnRef>
-          <a:fillRef idx="3">
-            <a:schemeClr val="accent1"/>
-          </a:fillRef>
-          <a:effectRef idx="2">
-            <a:schemeClr val="accent1"/>
-          </a:effectRef>
-          <a:fontRef idx="minor">
-            <a:schemeClr val="lt1"/>
-          </a:fontRef>
-        </p:style>
-        <p:txBody>
-          <a:bodyPr rtlCol="0" anchor="ctr"/>
-          <a:lstStyle/>
-          <a:p>
-            <a:pPr algn="ctr"/>
-          </a:p>
-        </p:txBody>
-      </p:sp>
-      <p:sp>
-        <p:nvSpPr>
-          <p:cNvPr id="3" name="TextBox 2"/>
-          <p:cNvSpPr txBox="1"/>
-          <p:nvPr/>
-        </p:nvSpPr>
-        <p:spPr>
-          <a:xfrm>
-            <a:off x="548640" y="246888"/>
-            <a:ext cx="10972800" cy="292608"/>
-          </a:xfrm>
-          <a:prstGeom prst="rect">
-            <a:avLst/>
-          </a:prstGeom>
-          <a:noFill/>
-        </p:spPr>
-        <p:txBody>
-          <a:bodyPr wrap="square" anchor="t" lIns="54864" rIns="54864" tIns="36576" bIns="36576">
-            <a:spAutoFit/>
-          </a:bodyPr>
-          <a:lstStyle/>
-          <a:p>
-            <a:pPr algn="l">
-              <a:lnSpc>
-                <a:spcPct val="120000"/>
-              </a:lnSpc>
-            </a:pPr>
-            <a:r>
-              <a:rPr sz="1100" b="1" i="0">
-                <a:solidFill>
-                  <a:srgbClr val="97BC62"/>
-                </a:solidFill>
-                <a:latin typeface="NanumGothic"/>
-              </a:rPr>
-              <a:t>실험 결과</a:t>
-            </a:r>
-          </a:p>
-        </p:txBody>
-      </p:sp>
-      <p:sp>
-        <p:nvSpPr>
-          <p:cNvPr id="4" name="TextBox 3"/>
-          <p:cNvSpPr txBox="1"/>
-          <p:nvPr/>
-        </p:nvSpPr>
-        <p:spPr>
-          <a:xfrm>
-            <a:off x="548640" y="502920"/>
-            <a:ext cx="11064240" cy="822960"/>
-          </a:xfrm>
-          <a:prstGeom prst="rect">
-            <a:avLst/>
-          </a:prstGeom>
-          <a:noFill/>
-        </p:spPr>
-        <p:txBody>
-          <a:bodyPr wrap="square" anchor="ctr" lIns="54864" rIns="54864" tIns="36576" bIns="36576">
-            <a:spAutoFit/>
-          </a:bodyPr>
-          <a:lstStyle/>
-          <a:p>
-            <a:pPr algn="l">
-              <a:lnSpc>
-                <a:spcPct val="120000"/>
-              </a:lnSpc>
-            </a:pPr>
-            <a:r>
-              <a:rPr sz="3000" b="1" i="0">
-                <a:solidFill>
-                  <a:srgbClr val="36454F"/>
-                </a:solidFill>
-                <a:latin typeface="NanumGothic"/>
-              </a:rPr>
-              <a:t>7.5 Streaming run #1 — DAG 진화 시퀀스 + token cost</a:t>
-            </a:r>
-          </a:p>
-        </p:txBody>
-      </p:sp>
-      <p:pic>
-        <p:nvPicPr>
-          <p:cNvPr id="5" name="Picture 4" descr="dag_evolution_seq.png"/>
-          <p:cNvPicPr>
-            <a:picLocks noChangeAspect="1"/>
-          </p:cNvPicPr>
-          <p:nvPr/>
-        </p:nvPicPr>
-        <p:blipFill>
-          <a:blip r:embed="rId2"/>
-          <a:stretch>
-            <a:fillRect/>
-          </a:stretch>
-        </p:blipFill>
-        <p:spPr>
-          <a:xfrm>
-            <a:off x="182880" y="1280160"/>
-            <a:ext cx="11795760" cy="2457450"/>
-          </a:xfrm>
-          <a:prstGeom prst="rect">
-            <a:avLst/>
-          </a:prstGeom>
-        </p:spPr>
-      </p:pic>
-      <p:pic>
-        <p:nvPicPr>
-          <p:cNvPr id="6" name="Picture 5" descr="token_cost_pareto.png"/>
-          <p:cNvPicPr>
-            <a:picLocks noChangeAspect="1"/>
-          </p:cNvPicPr>
-          <p:nvPr/>
-        </p:nvPicPr>
-        <p:blipFill>
-          <a:blip r:embed="rId3"/>
-          <a:stretch>
-            <a:fillRect/>
-          </a:stretch>
-        </p:blipFill>
-        <p:spPr>
-          <a:xfrm>
-            <a:off x="548640" y="4023360"/>
-            <a:ext cx="4114800" cy="2569695"/>
-          </a:xfrm>
-          <a:prstGeom prst="rect">
-            <a:avLst/>
-          </a:prstGeom>
-        </p:spPr>
-      </p:pic>
-      <p:sp>
-        <p:nvSpPr>
-          <p:cNvPr id="7" name="TextBox 6"/>
-          <p:cNvSpPr txBox="1"/>
-          <p:nvPr/>
-        </p:nvSpPr>
-        <p:spPr>
-          <a:xfrm>
-            <a:off x="5029200" y="4023360"/>
-            <a:ext cx="6675120" cy="2468880"/>
-          </a:xfrm>
-          <a:prstGeom prst="rect">
-            <a:avLst/>
-          </a:prstGeom>
-          <a:noFill/>
-        </p:spPr>
-        <p:txBody>
-          <a:bodyPr wrap="square" lIns="54864" rIns="54864" tIns="36576" bIns="36576">
-            <a:spAutoFit/>
-          </a:bodyPr>
-          <a:lstStyle/>
-          <a:p>
-            <a:pPr>
-              <a:lnSpc>
-                <a:spcPct val="130000"/>
-              </a:lnSpc>
-            </a:pPr>
-            <a:r>
-              <a:rPr sz="1100">
-                <a:solidFill>
-                  <a:srgbClr val="36454F"/>
-                </a:solidFill>
-                <a:latin typeface="NanumGothic"/>
-              </a:rPr>
-              <a:t>• Test (n=50): CoT 68 % / P-E 58 % / Evolved 62 %.</a:t>
-            </a:r>
-          </a:p>
-          <a:p>
-            <a:pPr>
-              <a:lnSpc>
-                <a:spcPct val="130000"/>
-              </a:lnSpc>
-            </a:pPr>
-            <a:r>
-              <a:rPr sz="1100">
-                <a:solidFill>
-                  <a:srgbClr val="36454F"/>
-                </a:solidFill>
-                <a:latin typeface="NanumGothic"/>
-              </a:rPr>
-              <a:t>• Token / task: CoT 0.46k / P-E 0.79k / Evolved 2.90k (~6.3×).</a:t>
-            </a:r>
-          </a:p>
-          <a:p>
-            <a:pPr>
-              <a:lnSpc>
-                <a:spcPct val="130000"/>
-              </a:lnSpc>
-            </a:pPr>
-            <a:r>
-              <a:rPr sz="1100">
-                <a:solidFill>
-                  <a:srgbClr val="B85042"/>
-                </a:solidFill>
-                <a:latin typeface="NanumGothic"/>
-              </a:rPr>
-              <a:t>• 토큰을 더 써도 정확도가 올라가지 않음 (이 split에서).</a:t>
-            </a:r>
-          </a:p>
-          <a:p>
-            <a:pPr>
-              <a:lnSpc>
-                <a:spcPct val="130000"/>
-              </a:lnSpc>
-            </a:pPr>
-            <a:r>
-              <a:rPr sz="1100">
-                <a:solidFill>
-                  <a:srgbClr val="36454F"/>
-                </a:solidFill>
-                <a:latin typeface="NanumGothic"/>
-              </a:rPr>
-              <a:t>• Evolved가 P-E보다 +4 pp이지만 CoT보다 −6 pp.</a:t>
-            </a:r>
-          </a:p>
-          <a:p>
-            <a:pPr>
-              <a:lnSpc>
-                <a:spcPct val="130000"/>
-              </a:lnSpc>
-            </a:pPr>
-            <a:r>
-              <a:rPr sz="1100">
-                <a:solidFill>
-                  <a:srgbClr val="2C5F2D"/>
-                </a:solidFill>
-                <a:latin typeface="NanumGothic"/>
-              </a:rPr>
-              <a:t>• → 'streaming 승리'로 인용 금지 — publishable 신호는 paired ACCEPT.</a:t>
-            </a:r>
-          </a:p>
-        </p:txBody>
-      </p:sp>
-    </p:spTree>
-  </p:cSld>
-  <p:clrMapOvr>
-    <a:masterClrMapping/>
-  </p:clrMapOvr>
-</p:sld>
-</file>
-
-<file path=ppt/slides/slide26.xml><?xml version="1.0" encoding="utf-8"?>
-<p:sld xmlns:a="http://schemas.openxmlformats.org/drawingml/2006/main" xmlns:p="http://schemas.openxmlformats.org/presentationml/2006/main" xmlns:r="http://schemas.openxmlformats.org/officeDocument/2006/relationships">
-  <p:cSld>
-    <p:bg>
-      <p:bgPr>
-        <a:solidFill>
-          <a:srgbClr val="F5F5F5"/>
-        </a:solidFill>
-        <a:effectLst/>
-      </p:bgPr>
-    </p:bg>
-    <p:spTree>
-      <p:nvGrpSpPr>
-        <p:cNvPr id="1" name=""/>
-        <p:cNvGrpSpPr/>
-        <p:nvPr/>
-      </p:nvGrpSpPr>
-      <p:grpSpPr/>
-      <p:sp>
-        <p:nvSpPr>
-          <p:cNvPr id="2" name="Rectangle 1"/>
-          <p:cNvSpPr/>
-          <p:nvPr/>
-        </p:nvSpPr>
-        <p:spPr>
-          <a:xfrm>
-            <a:off x="0" y="0"/>
-            <a:ext cx="12191695" cy="164592"/>
-          </a:xfrm>
-          <a:prstGeom prst="rect">
-            <a:avLst/>
-          </a:prstGeom>
-          <a:solidFill>
-            <a:srgbClr val="2C5F2D"/>
-          </a:solidFill>
-          <a:ln>
-            <a:noFill/>
-          </a:ln>
-        </p:spPr>
-        <p:style>
-          <a:lnRef idx="1">
-            <a:schemeClr val="accent1"/>
-          </a:lnRef>
-          <a:fillRef idx="3">
-            <a:schemeClr val="accent1"/>
-          </a:fillRef>
-          <a:effectRef idx="2">
-            <a:schemeClr val="accent1"/>
-          </a:effectRef>
-          <a:fontRef idx="minor">
-            <a:schemeClr val="lt1"/>
-          </a:fontRef>
-        </p:style>
-        <p:txBody>
-          <a:bodyPr rtlCol="0" anchor="ctr"/>
-          <a:lstStyle/>
-          <a:p>
-            <a:pPr algn="ctr"/>
-          </a:p>
-        </p:txBody>
-      </p:sp>
-      <p:sp>
-        <p:nvSpPr>
-          <p:cNvPr id="3" name="TextBox 2"/>
-          <p:cNvSpPr txBox="1"/>
-          <p:nvPr/>
-        </p:nvSpPr>
-        <p:spPr>
-          <a:xfrm>
-            <a:off x="548640" y="246888"/>
-            <a:ext cx="10972800" cy="292608"/>
-          </a:xfrm>
-          <a:prstGeom prst="rect">
-            <a:avLst/>
-          </a:prstGeom>
-          <a:noFill/>
-        </p:spPr>
-        <p:txBody>
-          <a:bodyPr wrap="square" anchor="t" lIns="54864" rIns="54864" tIns="36576" bIns="36576">
-            <a:spAutoFit/>
-          </a:bodyPr>
-          <a:lstStyle/>
-          <a:p>
-            <a:pPr algn="l">
-              <a:lnSpc>
-                <a:spcPct val="120000"/>
-              </a:lnSpc>
-            </a:pPr>
-            <a:r>
-              <a:rPr sz="1100" b="1" i="0">
-                <a:solidFill>
-                  <a:srgbClr val="97BC62"/>
-                </a:solidFill>
-                <a:latin typeface="NanumGothic"/>
-              </a:rPr>
-              <a:t>실험 결과</a:t>
-            </a:r>
-          </a:p>
-        </p:txBody>
-      </p:sp>
-      <p:sp>
-        <p:nvSpPr>
-          <p:cNvPr id="4" name="TextBox 3"/>
-          <p:cNvSpPr txBox="1"/>
-          <p:nvPr/>
-        </p:nvSpPr>
-        <p:spPr>
-          <a:xfrm>
-            <a:off x="548640" y="502920"/>
-            <a:ext cx="11064240" cy="822960"/>
-          </a:xfrm>
-          <a:prstGeom prst="rect">
-            <a:avLst/>
-          </a:prstGeom>
-          <a:noFill/>
-        </p:spPr>
-        <p:txBody>
-          <a:bodyPr wrap="square" anchor="ctr" lIns="54864" rIns="54864" tIns="36576" bIns="36576">
-            <a:spAutoFit/>
-          </a:bodyPr>
-          <a:lstStyle/>
-          <a:p>
-            <a:pPr algn="l">
-              <a:lnSpc>
-                <a:spcPct val="120000"/>
-              </a:lnSpc>
-            </a:pPr>
-            <a:r>
-              <a:rPr sz="3000" b="1" i="0">
-                <a:solidFill>
-                  <a:srgbClr val="36454F"/>
-                </a:solidFill>
-                <a:latin typeface="NanumGothic"/>
-              </a:rPr>
-              <a:t>7.6 §5.1.5 patches + sanity, 그리고 §5.2 ongoing</a:t>
-            </a:r>
-          </a:p>
-        </p:txBody>
-      </p:sp>
-      <p:sp>
-        <p:nvSpPr>
-          <p:cNvPr id="5" name="Rounded Rectangle 4"/>
-          <p:cNvSpPr/>
-          <p:nvPr/>
-        </p:nvSpPr>
-        <p:spPr>
-          <a:xfrm>
-            <a:off x="548640" y="1280160"/>
-            <a:ext cx="4114800" cy="457200"/>
-          </a:xfrm>
-          <a:prstGeom prst="roundRect">
-            <a:avLst/>
-          </a:prstGeom>
-          <a:solidFill>
-            <a:srgbClr val="2C5F2D"/>
-          </a:solidFill>
-          <a:ln>
-            <a:noFill/>
-          </a:ln>
-        </p:spPr>
-        <p:style>
-          <a:lnRef idx="1">
-            <a:schemeClr val="accent1"/>
-          </a:lnRef>
-          <a:fillRef idx="3">
-            <a:schemeClr val="accent1"/>
-          </a:fillRef>
-          <a:effectRef idx="2">
-            <a:schemeClr val="accent1"/>
-          </a:effectRef>
-          <a:fontRef idx="minor">
-            <a:schemeClr val="lt1"/>
-          </a:fontRef>
-        </p:style>
-        <p:txBody>
-          <a:bodyPr rtlCol="0" anchor="ctr" lIns="45720" rIns="45720" tIns="27432" bIns="27432"/>
-          <a:lstStyle/>
-          <a:p>
-            <a:pPr algn="ctr"/>
-            <a:r>
-              <a:rPr sz="1200" b="1">
-                <a:solidFill>
-                  <a:srgbClr val="FFFFFF"/>
-                </a:solidFill>
-                <a:latin typeface="NanumGothic"/>
-              </a:rPr>
-              <a:t>Patches (commit 8405c78)</a:t>
-            </a:r>
-          </a:p>
-        </p:txBody>
-      </p:sp>
-      <p:sp>
-        <p:nvSpPr>
-          <p:cNvPr id="6" name="TextBox 5"/>
-          <p:cNvSpPr txBox="1"/>
-          <p:nvPr/>
-        </p:nvSpPr>
-        <p:spPr>
-          <a:xfrm>
-            <a:off x="548640" y="1783080"/>
-            <a:ext cx="5486400" cy="4572000"/>
-          </a:xfrm>
-          <a:prstGeom prst="rect">
-            <a:avLst/>
-          </a:prstGeom>
-          <a:noFill/>
-        </p:spPr>
-        <p:txBody>
-          <a:bodyPr wrap="square" lIns="54864" rIns="54864" tIns="36576" bIns="36576">
-            <a:spAutoFit/>
-          </a:bodyPr>
-          <a:lstStyle/>
-          <a:p>
-            <a:pPr>
-              <a:lnSpc>
-                <a:spcPct val="130000"/>
-              </a:lnSpc>
-            </a:pPr>
-            <a:r>
-              <a:rPr sz="1200">
-                <a:solidFill>
-                  <a:srgbClr val="36454F"/>
-                </a:solidFill>
-                <a:latin typeface="NanumGothic"/>
-              </a:rPr>
-              <a:t>• max_agents → user prompt # Constraints 라인</a:t>
-            </a:r>
-          </a:p>
-          <a:p>
-            <a:pPr>
-              <a:lnSpc>
-                <a:spcPct val="130000"/>
-              </a:lnSpc>
-            </a:pPr>
-            <a:r>
-              <a:rPr sz="1200">
-                <a:solidFill>
-                  <a:srgbClr val="36454F"/>
-                </a:solidFill>
-                <a:latin typeface="NanumGothic"/>
-              </a:rPr>
-              <a:t>• AT CAP 시 add_agent 금지 명시</a:t>
-            </a:r>
-          </a:p>
-          <a:p>
-            <a:pPr>
-              <a:lnSpc>
-                <a:spcPct val="130000"/>
-              </a:lnSpc>
-            </a:pPr>
-            <a:r>
-              <a:rPr sz="1200">
-                <a:solidFill>
-                  <a:srgbClr val="36454F"/>
-                </a:solidFill>
-                <a:latin typeface="NanumGothic"/>
-              </a:rPr>
-              <a:t>• prune-DAG reminder (orphan 방지)</a:t>
-            </a:r>
-          </a:p>
-          <a:p>
-            <a:pPr>
-              <a:lnSpc>
-                <a:spcPct val="130000"/>
-              </a:lnSpc>
-            </a:pPr>
-            <a:r>
-              <a:rPr sz="1200">
-                <a:solidFill>
-                  <a:srgbClr val="36454F"/>
-                </a:solidFill>
-                <a:latin typeface="NanumGothic"/>
-              </a:rPr>
-              <a:t>• concept-level anti-repeat callout</a:t>
-            </a:r>
-          </a:p>
-          <a:p>
-            <a:pPr>
-              <a:lnSpc>
-                <a:spcPct val="130000"/>
-              </a:lnSpc>
-            </a:pPr>
-            <a:r>
-              <a:rPr sz="1200">
-                <a:solidFill>
-                  <a:srgbClr val="36454F"/>
-                </a:solidFill>
-                <a:latin typeface="NanumGothic"/>
-              </a:rPr>
-              <a:t>• --max-agents default 6 → 8</a:t>
-            </a:r>
-          </a:p>
-        </p:txBody>
-      </p:sp>
-      <p:sp>
-        <p:nvSpPr>
-          <p:cNvPr id="7" name="Rounded Rectangle 6"/>
-          <p:cNvSpPr/>
-          <p:nvPr/>
-        </p:nvSpPr>
-        <p:spPr>
-          <a:xfrm>
-            <a:off x="6309360" y="1280160"/>
-            <a:ext cx="5212080" cy="457200"/>
-          </a:xfrm>
-          <a:prstGeom prst="roundRect">
-            <a:avLst/>
-          </a:prstGeom>
-          <a:solidFill>
-            <a:srgbClr val="2C5F2D"/>
-          </a:solidFill>
-          <a:ln>
-            <a:noFill/>
-          </a:ln>
-        </p:spPr>
-        <p:style>
-          <a:lnRef idx="1">
-            <a:schemeClr val="accent1"/>
-          </a:lnRef>
-          <a:fillRef idx="3">
-            <a:schemeClr val="accent1"/>
-          </a:fillRef>
-          <a:effectRef idx="2">
-            <a:schemeClr val="accent1"/>
-          </a:effectRef>
-          <a:fontRef idx="minor">
-            <a:schemeClr val="lt1"/>
-          </a:fontRef>
-        </p:style>
-        <p:txBody>
-          <a:bodyPr rtlCol="0" anchor="ctr" lIns="45720" rIns="45720" tIns="27432" bIns="27432"/>
-          <a:lstStyle/>
-          <a:p>
-            <a:pPr algn="ctr"/>
-            <a:r>
-              <a:rPr sz="1200" b="1">
-                <a:solidFill>
-                  <a:srgbClr val="FFFFFF"/>
-                </a:solidFill>
-                <a:latin typeface="NanumGothic"/>
-              </a:rPr>
-              <a:t>Sanity (sanity_streaming_v3_mediq_s0)</a:t>
-            </a:r>
-          </a:p>
-        </p:txBody>
-      </p:sp>
-      <p:sp>
-        <p:nvSpPr>
-          <p:cNvPr id="8" name="TextBox 7"/>
-          <p:cNvSpPr txBox="1"/>
-          <p:nvPr/>
-        </p:nvSpPr>
-        <p:spPr>
-          <a:xfrm>
-            <a:off x="6309360" y="1783080"/>
-            <a:ext cx="5212080" cy="4572000"/>
-          </a:xfrm>
-          <a:prstGeom prst="rect">
-            <a:avLst/>
-          </a:prstGeom>
-          <a:noFill/>
-        </p:spPr>
-        <p:txBody>
-          <a:bodyPr wrap="square" lIns="54864" rIns="54864" tIns="36576" bIns="36576">
-            <a:spAutoFit/>
-          </a:bodyPr>
-          <a:lstStyle/>
-          <a:p>
-            <a:pPr>
-              <a:lnSpc>
-                <a:spcPct val="130000"/>
-              </a:lnSpc>
-            </a:pPr>
-            <a:r>
-              <a:rPr sz="1200">
-                <a:solidFill>
-                  <a:srgbClr val="36454F"/>
-                </a:solidFill>
-                <a:latin typeface="NanumGothic"/>
-              </a:rPr>
-              <a:t>• B=20 R=3 mediq seed=0, ~50분 wall</a:t>
-            </a:r>
-          </a:p>
-          <a:p>
-            <a:pPr>
-              <a:lnSpc>
-                <a:spcPct val="130000"/>
-              </a:lnSpc>
-            </a:pPr>
-            <a:r>
-              <a:rPr sz="1200">
-                <a:solidFill>
-                  <a:srgbClr val="36454F"/>
-                </a:solidFill>
-                <a:latin typeface="NanumGothic"/>
-              </a:rPr>
-              <a:t>• r2 paired ACCEPT (Δ=+5pp)</a:t>
-            </a:r>
-          </a:p>
-          <a:p>
-            <a:pPr>
-              <a:lnSpc>
-                <a:spcPct val="130000"/>
-              </a:lnSpc>
-            </a:pPr>
-            <a:r>
-              <a:rPr sz="1200">
-                <a:solidFill>
-                  <a:srgbClr val="36454F"/>
-                </a:solidFill>
-                <a:latin typeface="NanumGothic"/>
-              </a:rPr>
-              <a:t>• _build_user_prompt 직접 호출로 # Constraints 렌더 확인</a:t>
-            </a:r>
-          </a:p>
-          <a:p>
-            <a:pPr>
-              <a:lnSpc>
-                <a:spcPct val="130000"/>
-              </a:lnSpc>
-            </a:pPr>
-            <a:r>
-              <a:rPr sz="1200">
-                <a:solidFill>
-                  <a:srgbClr val="B85042"/>
-                </a:solidFill>
-                <a:latin typeface="NanumGothic"/>
-              </a:rPr>
-              <a:t>• R=3에서 cap-binding / concept-level fire 미관찰 (best-effort).</a:t>
-            </a:r>
-          </a:p>
-        </p:txBody>
-      </p:sp>
-      <p:sp>
-        <p:nvSpPr>
-          <p:cNvPr id="9" name="TextBox 8"/>
-          <p:cNvSpPr txBox="1"/>
-          <p:nvPr/>
-        </p:nvSpPr>
-        <p:spPr>
-          <a:xfrm>
-            <a:off x="548640" y="5943600"/>
-            <a:ext cx="11064240" cy="548640"/>
-          </a:xfrm>
-          <a:prstGeom prst="rect">
-            <a:avLst/>
-          </a:prstGeom>
-          <a:noFill/>
-        </p:spPr>
-        <p:txBody>
-          <a:bodyPr wrap="square" anchor="t" lIns="54864" rIns="54864" tIns="36576" bIns="36576">
-            <a:spAutoFit/>
-          </a:bodyPr>
-          <a:lstStyle/>
-          <a:p>
-            <a:pPr algn="l">
-              <a:lnSpc>
-                <a:spcPct val="120000"/>
-              </a:lnSpc>
-            </a:pPr>
-            <a:r>
-              <a:rPr sz="1200" b="0" i="1">
-                <a:solidFill>
-                  <a:srgbClr val="B85042"/>
-                </a:solidFill>
-                <a:latin typeface="NanumGothic"/>
-              </a:rPr>
-              <a:t>§5.2 MEDIQ seed=1 진행 중 (이 발표 시작 시 R3/10, ETA ~16 UTC; 결과는 추후 보강).</a:t>
-            </a:r>
-          </a:p>
-        </p:txBody>
-      </p:sp>
-    </p:spTree>
-  </p:cSld>
-  <p:clrMapOvr>
-    <a:masterClrMapping/>
-  </p:clrMapOvr>
-</p:sld>
-</file>
-
-<file path=ppt/slides/slide27.xml><?xml version="1.0" encoding="utf-8"?>
-<p:sld xmlns:a="http://schemas.openxmlformats.org/drawingml/2006/main" xmlns:p="http://schemas.openxmlformats.org/presentationml/2006/main" xmlns:r="http://schemas.openxmlformats.org/officeDocument/2006/relationships">
-  <p:cSld>
-    <p:bg>
-      <p:bgPr>
-        <a:solidFill>
-          <a:srgbClr val="2C5F2D"/>
-        </a:solidFill>
-        <a:effectLst/>
-      </p:bgPr>
-    </p:bg>
-    <p:spTree>
-      <p:nvGrpSpPr>
-        <p:cNvPr id="1" name=""/>
-        <p:cNvGrpSpPr/>
-        <p:nvPr/>
-      </p:nvGrpSpPr>
-      <p:grpSpPr/>
-      <p:sp>
-        <p:nvSpPr>
-          <p:cNvPr id="2" name="Rectangle 1"/>
-          <p:cNvSpPr/>
-          <p:nvPr/>
-        </p:nvSpPr>
-        <p:spPr>
-          <a:xfrm>
-            <a:off x="548640" y="3108960"/>
-            <a:ext cx="228600" cy="822960"/>
-          </a:xfrm>
-          <a:prstGeom prst="rect">
-            <a:avLst/>
-          </a:prstGeom>
-          <a:solidFill>
-            <a:srgbClr val="97BC62"/>
-          </a:solidFill>
-          <a:ln>
-            <a:noFill/>
-          </a:ln>
-        </p:spPr>
-        <p:style>
-          <a:lnRef idx="1">
-            <a:schemeClr val="accent1"/>
-          </a:lnRef>
-          <a:fillRef idx="3">
-            <a:schemeClr val="accent1"/>
-          </a:fillRef>
-          <a:effectRef idx="2">
-            <a:schemeClr val="accent1"/>
-          </a:effectRef>
-          <a:fontRef idx="minor">
-            <a:schemeClr val="lt1"/>
-          </a:fontRef>
-        </p:style>
-        <p:txBody>
-          <a:bodyPr rtlCol="0" anchor="ctr"/>
-          <a:lstStyle/>
-          <a:p>
-            <a:pPr algn="ctr"/>
-          </a:p>
-        </p:txBody>
-      </p:sp>
-      <p:sp>
-        <p:nvSpPr>
-          <p:cNvPr id="3" name="TextBox 2"/>
-          <p:cNvSpPr txBox="1"/>
-          <p:nvPr/>
-        </p:nvSpPr>
-        <p:spPr>
-          <a:xfrm>
-            <a:off x="1005840" y="3017520"/>
-            <a:ext cx="10972800" cy="914400"/>
-          </a:xfrm>
-          <a:prstGeom prst="rect">
-            <a:avLst/>
-          </a:prstGeom>
-          <a:noFill/>
-        </p:spPr>
-        <p:txBody>
-          <a:bodyPr wrap="square" anchor="ctr" lIns="54864" rIns="54864" tIns="36576" bIns="36576">
-            <a:spAutoFit/>
-          </a:bodyPr>
-          <a:lstStyle/>
-          <a:p>
-            <a:pPr algn="l">
-              <a:lnSpc>
-                <a:spcPct val="120000"/>
-              </a:lnSpc>
-            </a:pPr>
-            <a:r>
-              <a:rPr sz="3800" b="1" i="0">
-                <a:solidFill>
-                  <a:srgbClr val="FFFFFF"/>
-                </a:solidFill>
-                <a:latin typeface="NanumGothic"/>
-              </a:rPr>
-              <a:t>8. 분석 (Analysis)</a:t>
-            </a:r>
-          </a:p>
-        </p:txBody>
-      </p:sp>
-      <p:sp>
-        <p:nvSpPr>
-          <p:cNvPr id="4" name="TextBox 3"/>
-          <p:cNvSpPr txBox="1"/>
-          <p:nvPr/>
-        </p:nvSpPr>
-        <p:spPr>
-          <a:xfrm>
-            <a:off x="1005840" y="4023360"/>
-            <a:ext cx="10972800" cy="1280160"/>
-          </a:xfrm>
-          <a:prstGeom prst="rect">
-            <a:avLst/>
-          </a:prstGeom>
-          <a:noFill/>
-        </p:spPr>
-        <p:txBody>
-          <a:bodyPr wrap="square" anchor="t" lIns="54864" rIns="54864" tIns="36576" bIns="36576">
-            <a:spAutoFit/>
-          </a:bodyPr>
-          <a:lstStyle/>
-          <a:p>
-            <a:pPr algn="l">
-              <a:lnSpc>
-                <a:spcPct val="120000"/>
-              </a:lnSpc>
-            </a:pPr>
-            <a:r>
-              <a:rPr sz="1600" b="0" i="1">
-                <a:solidFill>
-                  <a:srgbClr val="CFD3D7"/>
-                </a:solidFill>
-                <a:latin typeface="NanumGothic"/>
-              </a:rPr>
-              <a:t>측정 노이즈 · 토큰 비용 · 실패 모드</a:t>
             </a:r>
           </a:p>
         </p:txBody>
@@ -9645,7 +10460,7 @@
                 </a:solidFill>
                 <a:latin typeface="NanumGothic"/>
               </a:rPr>
-              <a:t>분석</a:t>
+              <a:t>실험 결과</a:t>
             </a:r>
           </a:p>
         </p:txBody>
@@ -9684,21 +10499,69 @@
                 </a:solidFill>
                 <a:latin typeface="NanumGothic"/>
               </a:rPr>
-              <a:t>8.1 측정 노이즈와 paired-batch의 효과</a:t>
-            </a:r>
-          </a:p>
-        </p:txBody>
-      </p:sp>
-      <p:sp>
-        <p:nvSpPr>
-          <p:cNvPr id="5" name="TextBox 4"/>
+              <a:t>7.5 Streaming run #1 — DAG 진화 시퀀스 + token cost</a:t>
+            </a:r>
+          </a:p>
+        </p:txBody>
+      </p:sp>
+      <p:pic>
+        <p:nvPicPr>
+          <p:cNvPr id="5" name="Picture 4" descr="dag_evolution_seq.png"/>
+          <p:cNvPicPr>
+            <a:picLocks noChangeAspect="1"/>
+          </p:cNvPicPr>
+          <p:nvPr/>
+        </p:nvPicPr>
+        <p:blipFill>
+          <a:blip r:embed="rId2"/>
+          <a:stretch>
+            <a:fillRect/>
+          </a:stretch>
+        </p:blipFill>
+        <p:spPr>
+          <a:xfrm>
+            <a:off x="182880" y="1280160"/>
+            <a:ext cx="11795760" cy="2457450"/>
+          </a:xfrm>
+          <a:prstGeom prst="rect">
+            <a:avLst/>
+          </a:prstGeom>
+        </p:spPr>
+      </p:pic>
+      <p:pic>
+        <p:nvPicPr>
+          <p:cNvPr id="6" name="Picture 5" descr="token_cost_pareto.png"/>
+          <p:cNvPicPr>
+            <a:picLocks noChangeAspect="1"/>
+          </p:cNvPicPr>
+          <p:nvPr/>
+        </p:nvPicPr>
+        <p:blipFill>
+          <a:blip r:embed="rId3"/>
+          <a:stretch>
+            <a:fillRect/>
+          </a:stretch>
+        </p:blipFill>
+        <p:spPr>
+          <a:xfrm>
+            <a:off x="548640" y="4023360"/>
+            <a:ext cx="4114800" cy="2569695"/>
+          </a:xfrm>
+          <a:prstGeom prst="rect">
+            <a:avLst/>
+          </a:prstGeom>
+        </p:spPr>
+      </p:pic>
+      <p:sp>
+        <p:nvSpPr>
+          <p:cNvPr id="7" name="TextBox 6"/>
           <p:cNvSpPr txBox="1"/>
           <p:nvPr/>
         </p:nvSpPr>
         <p:spPr>
           <a:xfrm>
-            <a:off x="548640" y="1280160"/>
-            <a:ext cx="11064240" cy="5120640"/>
+            <a:off x="5029200" y="4023360"/>
+            <a:ext cx="6675120" cy="2468880"/>
           </a:xfrm>
           <a:prstGeom prst="rect">
             <a:avLst/>
@@ -9717,13 +10580,13 @@
               </a:lnSpc>
             </a:pPr>
             <a:r>
-              <a:rPr sz="1400">
+              <a:rPr sz="1100">
                 <a:solidFill>
                   <a:srgbClr val="36454F"/>
                 </a:solidFill>
                 <a:latin typeface="NanumGothic"/>
               </a:rPr>
-              <a:t>• Same-graph cross-run 노이즈 ±13 pp (FinanceBench v2 retry, n=30, vLLM 비결정성).</a:t>
+              <a:t>• Test (n=50): CoT 68 % / P-E 58 % / Evolved 62 %.</a:t>
             </a:r>
           </a:p>
           <a:p>
@@ -9733,13 +10596,13 @@
               </a:lnSpc>
             </a:pPr>
             <a:r>
-              <a:rPr sz="1400">
+              <a:rPr sz="1100">
                 <a:solidFill>
                   <a:srgbClr val="36454F"/>
                 </a:solidFill>
                 <a:latin typeface="NanumGothic"/>
               </a:rPr>
-              <a:t>• Legacy mode는 cross-batch 비교 → 작은 architectural Δ가 노이즈에 휩쓸려 reject.</a:t>
+              <a:t>• Token / task: CoT 0.46k / P-E 0.79k / Evolved 2.90k (~6.3×).</a:t>
             </a:r>
           </a:p>
           <a:p>
@@ -9749,45 +10612,45 @@
               </a:lnSpc>
             </a:pPr>
             <a:r>
-              <a:rPr sz="1400">
+              <a:rPr sz="1100">
+                <a:solidFill>
+                  <a:srgbClr val="B85042"/>
+                </a:solidFill>
+                <a:latin typeface="NanumGothic"/>
+              </a:rPr>
+              <a:t>• 토큰을 더 써도 정확도가 올라가지 않음 (이 split에서).</a:t>
+            </a:r>
+          </a:p>
+          <a:p>
+            <a:pPr>
+              <a:lnSpc>
+                <a:spcPct val="130000"/>
+              </a:lnSpc>
+            </a:pPr>
+            <a:r>
+              <a:rPr sz="1100">
+                <a:solidFill>
+                  <a:srgbClr val="36454F"/>
+                </a:solidFill>
+                <a:latin typeface="NanumGothic"/>
+              </a:rPr>
+              <a:t>• Evolved가 P-E보다 +4 pp이지만 CoT보다 −6 pp.</a:t>
+            </a:r>
+          </a:p>
+          <a:p>
+            <a:pPr>
+              <a:lnSpc>
+                <a:spcPct val="130000"/>
+              </a:lnSpc>
+            </a:pPr>
+            <a:r>
+              <a:rPr sz="1100">
                 <a:solidFill>
                   <a:srgbClr val="2C5F2D"/>
                 </a:solidFill>
                 <a:latin typeface="NanumGothic"/>
               </a:rPr>
-              <a:t>• Streaming paired-batch는 best vs candidate를 SAME batch에 넣어 노이즈를 cancel. 1/9 → 4/10 ACCEPT 비약은 이 효과의 직접 증거.</a:t>
-            </a:r>
-          </a:p>
-          <a:p>
-            <a:pPr>
-              <a:lnSpc>
-                <a:spcPct val="130000"/>
-              </a:lnSpc>
-            </a:pPr>
-            <a:r>
-              <a:rPr sz="1400">
-                <a:solidFill>
-                  <a:srgbClr val="B85042"/>
-                </a:solidFill>
-                <a:latin typeface="NanumGothic"/>
-              </a:rPr>
-              <a:t>• 그러나 절대 정확도는 여전히 bootstrap 분포에 의존 → best_val_acc &gt; seed_batch_acc criterion은 streaming에서 구조적으로 broken (max over 독립 batch). 채택 안 함.</a:t>
-            </a:r>
-          </a:p>
-          <a:p>
-            <a:pPr>
-              <a:lnSpc>
-                <a:spcPct val="130000"/>
-              </a:lnSpc>
-            </a:pPr>
-            <a:r>
-              <a:rPr sz="1400">
-                <a:solidFill>
-                  <a:srgbClr val="36454F"/>
-                </a:solidFill>
-                <a:latin typeface="NanumGothic"/>
-              </a:rPr>
-              <a:t>• 결과 metric으로는 test acc + paired-accept rate 사용.</a:t>
+              <a:t>• → 'streaming 승리'로 인용 금지 — publishable 신호는 paired ACCEPT.</a:t>
             </a:r>
           </a:p>
         </p:txBody>
@@ -9895,7 +10758,7 @@
                 </a:solidFill>
                 <a:latin typeface="NanumGothic"/>
               </a:rPr>
-              <a:t>분석</a:t>
+              <a:t>실험 결과</a:t>
             </a:r>
           </a:p>
         </p:txBody>
@@ -9934,21 +10797,572 @@
                 </a:solidFill>
                 <a:latin typeface="NanumGothic"/>
               </a:rPr>
-              <a:t>8.2 토큰 비용과 실패 모드</a:t>
-            </a:r>
-          </a:p>
-        </p:txBody>
-      </p:sp>
-      <p:sp>
-        <p:nvSpPr>
-          <p:cNvPr id="5" name="TextBox 4"/>
+              <a:t>7.6 Streaming run #2 (MEDIQ s=1) — Δ vs P-E +4pp 재현</a:t>
+            </a:r>
+          </a:p>
+        </p:txBody>
+      </p:sp>
+      <p:graphicFrame>
+        <p:nvGraphicFramePr>
+          <p:cNvPr id="5" name="Table 4"/>
+          <p:cNvGraphicFramePr>
+            <a:graphicFrameLocks noGrp="1"/>
+          </p:cNvGraphicFramePr>
+          <p:nvPr/>
+        </p:nvGraphicFramePr>
+        <p:xfrm>
+          <a:off x="548640" y="1280160"/>
+          <a:ext cx="11064240" cy="1463040"/>
+        </p:xfrm>
+        <a:graphic>
+          <a:graphicData uri="http://schemas.openxmlformats.org/drawingml/2006/table">
+            <a:tbl>
+              <a:tblPr firstRow="1" bandRow="1">
+                <a:tableStyleId>{5C22544A-7EE6-4342-B048-85BDC9FD1C3A}</a:tableStyleId>
+              </a:tblPr>
+              <a:tblGrid>
+                <a:gridCol w="3688080"/>
+                <a:gridCol w="3688080"/>
+                <a:gridCol w="3688080"/>
+              </a:tblGrid>
+              <a:tr h="487680">
+                <a:tc>
+                  <a:txBody>
+                    <a:bodyPr lIns="45720" rIns="45720"/>
+                    <a:lstStyle/>
+                    <a:p>
+                      <a:pPr algn="ctr"/>
+                      <a:r>
+                        <a:rPr sz="1300" b="1">
+                          <a:solidFill>
+                            <a:srgbClr val="FFFFFF"/>
+                          </a:solidFill>
+                          <a:latin typeface="NanumGothic"/>
+                        </a:rPr>
+                        <a:t/>
+                      </a:r>
+                    </a:p>
+                  </a:txBody>
+                  <a:tcPr>
+                    <a:solidFill>
+                      <a:srgbClr val="2C5F2D"/>
+                    </a:solidFill>
+                  </a:tcPr>
+                </a:tc>
+                <a:tc>
+                  <a:txBody>
+                    <a:bodyPr lIns="45720" rIns="45720"/>
+                    <a:lstStyle/>
+                    <a:p>
+                      <a:pPr algn="ctr"/>
+                      <a:r>
+                        <a:rPr sz="1300" b="1">
+                          <a:solidFill>
+                            <a:srgbClr val="FFFFFF"/>
+                          </a:solidFill>
+                          <a:latin typeface="NanumGothic"/>
+                        </a:rPr>
+                        <a:t>run #1 (s=0)</a:t>
+                      </a:r>
+                    </a:p>
+                  </a:txBody>
+                  <a:tcPr>
+                    <a:solidFill>
+                      <a:srgbClr val="2C5F2D"/>
+                    </a:solidFill>
+                  </a:tcPr>
+                </a:tc>
+                <a:tc>
+                  <a:txBody>
+                    <a:bodyPr lIns="45720" rIns="45720"/>
+                    <a:lstStyle/>
+                    <a:p>
+                      <a:pPr algn="ctr"/>
+                      <a:r>
+                        <a:rPr sz="1300" b="1">
+                          <a:solidFill>
+                            <a:srgbClr val="FFFFFF"/>
+                          </a:solidFill>
+                          <a:latin typeface="NanumGothic"/>
+                        </a:rPr>
+                        <a:t>run #2 (s=1)</a:t>
+                      </a:r>
+                    </a:p>
+                  </a:txBody>
+                  <a:tcPr>
+                    <a:solidFill>
+                      <a:srgbClr val="2C5F2D"/>
+                    </a:solidFill>
+                  </a:tcPr>
+                </a:tc>
+              </a:tr>
+              <a:tr h="487680">
+                <a:tc>
+                  <a:txBody>
+                    <a:bodyPr lIns="54864" rIns="54864"/>
+                    <a:lstStyle/>
+                    <a:p>
+                      <a:pPr algn="l"/>
+                      <a:r>
+                        <a:rPr sz="1200">
+                          <a:solidFill>
+                            <a:srgbClr val="36454F"/>
+                          </a:solidFill>
+                          <a:latin typeface="NanumGothic"/>
+                        </a:rPr>
+                        <a:t>ACCEPT / reject / INVALID</a:t>
+                      </a:r>
+                    </a:p>
+                  </a:txBody>
+                  <a:tcPr>
+                    <a:solidFill>
+                      <a:srgbClr val="F5F5F5"/>
+                    </a:solidFill>
+                  </a:tcPr>
+                </a:tc>
+                <a:tc>
+                  <a:txBody>
+                    <a:bodyPr lIns="54864" rIns="54864"/>
+                    <a:lstStyle/>
+                    <a:p>
+                      <a:pPr algn="ctr"/>
+                      <a:r>
+                        <a:rPr sz="1200">
+                          <a:solidFill>
+                            <a:srgbClr val="36454F"/>
+                          </a:solidFill>
+                          <a:latin typeface="NanumGothic"/>
+                        </a:rPr>
+                        <a:t>4 / 2 / 4</a:t>
+                      </a:r>
+                    </a:p>
+                  </a:txBody>
+                  <a:tcPr>
+                    <a:solidFill>
+                      <a:srgbClr val="F5F5F5"/>
+                    </a:solidFill>
+                  </a:tcPr>
+                </a:tc>
+                <a:tc>
+                  <a:txBody>
+                    <a:bodyPr lIns="54864" rIns="54864"/>
+                    <a:lstStyle/>
+                    <a:p>
+                      <a:pPr algn="ctr"/>
+                      <a:r>
+                        <a:rPr sz="1200">
+                          <a:solidFill>
+                            <a:srgbClr val="36454F"/>
+                          </a:solidFill>
+                          <a:latin typeface="NanumGothic"/>
+                        </a:rPr>
+                        <a:t>2 / 6 / 2</a:t>
+                      </a:r>
+                    </a:p>
+                  </a:txBody>
+                  <a:tcPr>
+                    <a:solidFill>
+                      <a:srgbClr val="F5F5F5"/>
+                    </a:solidFill>
+                  </a:tcPr>
+                </a:tc>
+              </a:tr>
+              <a:tr h="487680">
+                <a:tc>
+                  <a:txBody>
+                    <a:bodyPr lIns="54864" rIns="54864"/>
+                    <a:lstStyle/>
+                    <a:p>
+                      <a:pPr algn="l"/>
+                      <a:r>
+                        <a:rPr sz="1200">
+                          <a:solidFill>
+                            <a:srgbClr val="36454F"/>
+                          </a:solidFill>
+                          <a:latin typeface="NanumGothic"/>
+                        </a:rPr>
+                        <a:t>wall</a:t>
+                      </a:r>
+                    </a:p>
+                  </a:txBody>
+                  <a:tcPr>
+                    <a:solidFill>
+                      <a:srgbClr val="FFFFFF"/>
+                    </a:solidFill>
+                  </a:tcPr>
+                </a:tc>
+                <a:tc>
+                  <a:txBody>
+                    <a:bodyPr lIns="54864" rIns="54864"/>
+                    <a:lstStyle/>
+                    <a:p>
+                      <a:pPr algn="ctr"/>
+                      <a:r>
+                        <a:rPr sz="1200">
+                          <a:solidFill>
+                            <a:srgbClr val="36454F"/>
+                          </a:solidFill>
+                          <a:latin typeface="NanumGothic"/>
+                        </a:rPr>
+                        <a:t>9h 45m</a:t>
+                      </a:r>
+                    </a:p>
+                  </a:txBody>
+                  <a:tcPr>
+                    <a:solidFill>
+                      <a:srgbClr val="FFFFFF"/>
+                    </a:solidFill>
+                  </a:tcPr>
+                </a:tc>
+                <a:tc>
+                  <a:txBody>
+                    <a:bodyPr lIns="54864" rIns="54864"/>
+                    <a:lstStyle/>
+                    <a:p>
+                      <a:pPr algn="ctr"/>
+                      <a:r>
+                        <a:rPr sz="1200">
+                          <a:solidFill>
+                            <a:srgbClr val="36454F"/>
+                          </a:solidFill>
+                          <a:latin typeface="NanumGothic"/>
+                        </a:rPr>
+                        <a:t>9h 32m</a:t>
+                      </a:r>
+                    </a:p>
+                  </a:txBody>
+                  <a:tcPr>
+                    <a:solidFill>
+                      <a:srgbClr val="FFFFFF"/>
+                    </a:solidFill>
+                  </a:tcPr>
+                </a:tc>
+              </a:tr>
+            </a:tbl>
+          </a:graphicData>
+        </a:graphic>
+      </p:graphicFrame>
+      <p:graphicFrame>
+        <p:nvGraphicFramePr>
+          <p:cNvPr id="6" name="Table 5"/>
+          <p:cNvGraphicFramePr>
+            <a:graphicFrameLocks noGrp="1"/>
+          </p:cNvGraphicFramePr>
+          <p:nvPr/>
+        </p:nvGraphicFramePr>
+        <p:xfrm>
+          <a:off x="548640" y="2926080"/>
+          <a:ext cx="11064240" cy="1554480"/>
+        </p:xfrm>
+        <a:graphic>
+          <a:graphicData uri="http://schemas.openxmlformats.org/drawingml/2006/table">
+            <a:tbl>
+              <a:tblPr firstRow="1" bandRow="1">
+                <a:tableStyleId>{5C22544A-7EE6-4342-B048-85BDC9FD1C3A}</a:tableStyleId>
+              </a:tblPr>
+              <a:tblGrid>
+                <a:gridCol w="3688080"/>
+                <a:gridCol w="3688080"/>
+                <a:gridCol w="3688080"/>
+              </a:tblGrid>
+              <a:tr h="388620">
+                <a:tc>
+                  <a:txBody>
+                    <a:bodyPr lIns="45720" rIns="45720"/>
+                    <a:lstStyle/>
+                    <a:p>
+                      <a:pPr algn="ctr"/>
+                      <a:r>
+                        <a:rPr sz="1300" b="1">
+                          <a:solidFill>
+                            <a:srgbClr val="FFFFFF"/>
+                          </a:solidFill>
+                          <a:latin typeface="NanumGothic"/>
+                        </a:rPr>
+                        <a:t/>
+                      </a:r>
+                    </a:p>
+                  </a:txBody>
+                  <a:tcPr>
+                    <a:solidFill>
+                      <a:srgbClr val="2C5F2D"/>
+                    </a:solidFill>
+                  </a:tcPr>
+                </a:tc>
+                <a:tc>
+                  <a:txBody>
+                    <a:bodyPr lIns="45720" rIns="45720"/>
+                    <a:lstStyle/>
+                    <a:p>
+                      <a:pPr algn="ctr"/>
+                      <a:r>
+                        <a:rPr sz="1300" b="1">
+                          <a:solidFill>
+                            <a:srgbClr val="FFFFFF"/>
+                          </a:solidFill>
+                          <a:latin typeface="NanumGothic"/>
+                        </a:rPr>
+                        <a:t>run #1 (s=0)</a:t>
+                      </a:r>
+                    </a:p>
+                  </a:txBody>
+                  <a:tcPr>
+                    <a:solidFill>
+                      <a:srgbClr val="2C5F2D"/>
+                    </a:solidFill>
+                  </a:tcPr>
+                </a:tc>
+                <a:tc>
+                  <a:txBody>
+                    <a:bodyPr lIns="45720" rIns="45720"/>
+                    <a:lstStyle/>
+                    <a:p>
+                      <a:pPr algn="ctr"/>
+                      <a:r>
+                        <a:rPr sz="1300" b="1">
+                          <a:solidFill>
+                            <a:srgbClr val="FFFFFF"/>
+                          </a:solidFill>
+                          <a:latin typeface="NanumGothic"/>
+                        </a:rPr>
+                        <a:t>run #2 (s=1)</a:t>
+                      </a:r>
+                    </a:p>
+                  </a:txBody>
+                  <a:tcPr>
+                    <a:solidFill>
+                      <a:srgbClr val="2C5F2D"/>
+                    </a:solidFill>
+                  </a:tcPr>
+                </a:tc>
+              </a:tr>
+              <a:tr h="388620">
+                <a:tc>
+                  <a:txBody>
+                    <a:bodyPr lIns="54864" rIns="54864"/>
+                    <a:lstStyle/>
+                    <a:p>
+                      <a:pPr algn="l"/>
+                      <a:r>
+                        <a:rPr sz="1200">
+                          <a:solidFill>
+                            <a:srgbClr val="36454F"/>
+                          </a:solidFill>
+                          <a:latin typeface="NanumGothic"/>
+                        </a:rPr>
+                        <a:t>CoT test (n=50)</a:t>
+                      </a:r>
+                    </a:p>
+                  </a:txBody>
+                  <a:tcPr>
+                    <a:solidFill>
+                      <a:srgbClr val="F5F5F5"/>
+                    </a:solidFill>
+                  </a:tcPr>
+                </a:tc>
+                <a:tc>
+                  <a:txBody>
+                    <a:bodyPr lIns="54864" rIns="54864"/>
+                    <a:lstStyle/>
+                    <a:p>
+                      <a:pPr algn="ctr"/>
+                      <a:r>
+                        <a:rPr sz="1200">
+                          <a:solidFill>
+                            <a:srgbClr val="36454F"/>
+                          </a:solidFill>
+                          <a:latin typeface="NanumGothic"/>
+                        </a:rPr>
+                        <a:t>68 %</a:t>
+                      </a:r>
+                    </a:p>
+                  </a:txBody>
+                  <a:tcPr>
+                    <a:solidFill>
+                      <a:srgbClr val="F5F5F5"/>
+                    </a:solidFill>
+                  </a:tcPr>
+                </a:tc>
+                <a:tc>
+                  <a:txBody>
+                    <a:bodyPr lIns="54864" rIns="54864"/>
+                    <a:lstStyle/>
+                    <a:p>
+                      <a:pPr algn="ctr"/>
+                      <a:r>
+                        <a:rPr sz="1200">
+                          <a:solidFill>
+                            <a:srgbClr val="36454F"/>
+                          </a:solidFill>
+                          <a:latin typeface="NanumGothic"/>
+                        </a:rPr>
+                        <a:t>46 %</a:t>
+                      </a:r>
+                    </a:p>
+                  </a:txBody>
+                  <a:tcPr>
+                    <a:solidFill>
+                      <a:srgbClr val="F5F5F5"/>
+                    </a:solidFill>
+                  </a:tcPr>
+                </a:tc>
+              </a:tr>
+              <a:tr h="388620">
+                <a:tc>
+                  <a:txBody>
+                    <a:bodyPr lIns="54864" rIns="54864"/>
+                    <a:lstStyle/>
+                    <a:p>
+                      <a:pPr algn="l"/>
+                      <a:r>
+                        <a:rPr sz="1200">
+                          <a:solidFill>
+                            <a:srgbClr val="36454F"/>
+                          </a:solidFill>
+                          <a:latin typeface="NanumGothic"/>
+                        </a:rPr>
+                        <a:t>P-E test (n=50)</a:t>
+                      </a:r>
+                    </a:p>
+                  </a:txBody>
+                  <a:tcPr>
+                    <a:solidFill>
+                      <a:srgbClr val="FFFFFF"/>
+                    </a:solidFill>
+                  </a:tcPr>
+                </a:tc>
+                <a:tc>
+                  <a:txBody>
+                    <a:bodyPr lIns="54864" rIns="54864"/>
+                    <a:lstStyle/>
+                    <a:p>
+                      <a:pPr algn="ctr"/>
+                      <a:r>
+                        <a:rPr sz="1200">
+                          <a:solidFill>
+                            <a:srgbClr val="36454F"/>
+                          </a:solidFill>
+                          <a:latin typeface="NanumGothic"/>
+                        </a:rPr>
+                        <a:t>58 %</a:t>
+                      </a:r>
+                    </a:p>
+                  </a:txBody>
+                  <a:tcPr>
+                    <a:solidFill>
+                      <a:srgbClr val="FFFFFF"/>
+                    </a:solidFill>
+                  </a:tcPr>
+                </a:tc>
+                <a:tc>
+                  <a:txBody>
+                    <a:bodyPr lIns="54864" rIns="54864"/>
+                    <a:lstStyle/>
+                    <a:p>
+                      <a:pPr algn="ctr"/>
+                      <a:r>
+                        <a:rPr sz="1200">
+                          <a:solidFill>
+                            <a:srgbClr val="36454F"/>
+                          </a:solidFill>
+                          <a:latin typeface="NanumGothic"/>
+                        </a:rPr>
+                        <a:t>42 %</a:t>
+                      </a:r>
+                    </a:p>
+                  </a:txBody>
+                  <a:tcPr>
+                    <a:solidFill>
+                      <a:srgbClr val="FFFFFF"/>
+                    </a:solidFill>
+                  </a:tcPr>
+                </a:tc>
+              </a:tr>
+              <a:tr h="388620">
+                <a:tc>
+                  <a:txBody>
+                    <a:bodyPr lIns="54864" rIns="54864"/>
+                    <a:lstStyle/>
+                    <a:p>
+                      <a:pPr algn="l"/>
+                      <a:r>
+                        <a:rPr sz="1200">
+                          <a:solidFill>
+                            <a:srgbClr val="36454F"/>
+                          </a:solidFill>
+                          <a:latin typeface="NanumGothic"/>
+                        </a:rPr>
+                        <a:t>Evolved test (n=50)</a:t>
+                      </a:r>
+                    </a:p>
+                  </a:txBody>
+                  <a:tcPr>
+                    <a:solidFill>
+                      <a:srgbClr val="F5F5F5"/>
+                    </a:solidFill>
+                  </a:tcPr>
+                </a:tc>
+                <a:tc>
+                  <a:txBody>
+                    <a:bodyPr lIns="54864" rIns="54864"/>
+                    <a:lstStyle/>
+                    <a:p>
+                      <a:pPr algn="ctr"/>
+                      <a:r>
+                        <a:rPr sz="1200">
+                          <a:solidFill>
+                            <a:srgbClr val="36454F"/>
+                          </a:solidFill>
+                          <a:latin typeface="NanumGothic"/>
+                        </a:rPr>
+                        <a:t>62 %</a:t>
+                      </a:r>
+                    </a:p>
+                  </a:txBody>
+                  <a:tcPr>
+                    <a:solidFill>
+                      <a:srgbClr val="F5F5F5"/>
+                    </a:solidFill>
+                  </a:tcPr>
+                </a:tc>
+                <a:tc>
+                  <a:txBody>
+                    <a:bodyPr lIns="54864" rIns="54864"/>
+                    <a:lstStyle/>
+                    <a:p>
+                      <a:pPr algn="ctr"/>
+                      <a:r>
+                        <a:rPr sz="1200">
+                          <a:solidFill>
+                            <a:srgbClr val="36454F"/>
+                          </a:solidFill>
+                          <a:latin typeface="NanumGothic"/>
+                        </a:rPr>
+                        <a:t>46 %</a:t>
+                      </a:r>
+                    </a:p>
+                  </a:txBody>
+                  <a:tcPr>
+                    <a:solidFill>
+                      <a:srgbClr val="F5F5F5"/>
+                    </a:solidFill>
+                  </a:tcPr>
+                </a:tc>
+              </a:tr>
+            </a:tbl>
+          </a:graphicData>
+        </a:graphic>
+      </p:graphicFrame>
+      <p:sp>
+        <p:nvSpPr>
+          <p:cNvPr id="7" name="TextBox 6"/>
           <p:cNvSpPr txBox="1"/>
           <p:nvPr/>
         </p:nvSpPr>
         <p:spPr>
           <a:xfrm>
-            <a:off x="548640" y="1280160"/>
-            <a:ext cx="11064240" cy="5120640"/>
+            <a:off x="548640" y="4663440"/>
+            <a:ext cx="11064240" cy="1828800"/>
           </a:xfrm>
           <a:prstGeom prst="rect">
             <a:avLst/>
@@ -9967,77 +11381,45 @@
               </a:lnSpc>
             </a:pPr>
             <a:r>
-              <a:rPr sz="1400">
+              <a:rPr sz="1300">
+                <a:solidFill>
+                  <a:srgbClr val="B85042"/>
+                </a:solidFill>
+                <a:latin typeface="NanumGothic"/>
+              </a:rPr>
+              <a:t>• 절대 acc는 22 pp 변동 (CoT 68 → 46) — split 난이도가 다름.</a:t>
+            </a:r>
+          </a:p>
+          <a:p>
+            <a:pPr>
+              <a:lnSpc>
+                <a:spcPct val="130000"/>
+              </a:lnSpc>
+            </a:pPr>
+            <a:r>
+              <a:rPr sz="1300">
+                <a:solidFill>
+                  <a:srgbClr val="2C5F2D"/>
+                </a:solidFill>
+                <a:latin typeface="NanumGothic"/>
+              </a:rPr>
+              <a:t>• 그러나 Δ vs P-E = +4pp 가 두 시드에서 *동일하게* 재현 — paired Δ가 split-난이도를 cancel.</a:t>
+            </a:r>
+          </a:p>
+          <a:p>
+            <a:pPr>
+              <a:lnSpc>
+                <a:spcPct val="130000"/>
+              </a:lnSpc>
+            </a:pPr>
+            <a:r>
+              <a:rPr sz="1300">
                 <a:solidFill>
                   <a:srgbClr val="36454F"/>
                 </a:solidFill>
                 <a:latin typeface="NanumGothic"/>
               </a:rPr>
-              <a:t>• Worker 토큰이 controller 토큰 대비 ~55× (streaming run #1 기준 4.03 M : 73.7 k).</a:t>
-            </a:r>
-          </a:p>
-          <a:p>
-            <a:pPr>
-              <a:lnSpc>
-                <a:spcPct val="130000"/>
-              </a:lnSpc>
-            </a:pPr>
-            <a:r>
-              <a:rPr sz="1400">
-                <a:solidFill>
-                  <a:srgbClr val="36454F"/>
-                </a:solidFill>
-                <a:latin typeface="NanumGothic"/>
-              </a:rPr>
-              <a:t>• B × n_agents × n_steps_per_agent가 worker 비용을 좌우. n_train보다 B 줄이는 게 wall 대비 효과적.</a:t>
-            </a:r>
-          </a:p>
-          <a:p>
-            <a:pPr>
-              <a:lnSpc>
-                <a:spcPct val="130000"/>
-              </a:lnSpc>
-            </a:pPr>
-            <a:r>
-              <a:rPr sz="1400">
-                <a:solidFill>
-                  <a:srgbClr val="B85042"/>
-                </a:solidFill>
-                <a:latin typeface="NanumGothic"/>
-              </a:rPr>
-              <a:t>• 실패 모드 (run #1): max_agents=6 cap binding (3 라운드), orphaned prune (1 라운드), concept-level repeat (rounds 5-10).</a:t>
-            </a:r>
-          </a:p>
-          <a:p>
-            <a:pPr>
-              <a:lnSpc>
-                <a:spcPct val="130000"/>
-              </a:lnSpc>
-            </a:pPr>
-            <a:r>
-              <a:rPr sz="1400">
-                <a:solidFill>
-                  <a:srgbClr val="36454F"/>
-                </a:solidFill>
-                <a:latin typeface="NanumGothic"/>
-              </a:rPr>
-              <a:t>• MAST-style 실패 분류 체계는 §5.5 이후 작업으로 deferred.</a:t>
-            </a:r>
-          </a:p>
-          <a:p>
-            <a:pPr>
-              <a:lnSpc>
-                <a:spcPct val="130000"/>
-              </a:lnSpc>
-            </a:pPr>
-            <a:r>
-              <a:rPr sz="1400">
-                <a:solidFill>
-                  <a:srgbClr val="36454F"/>
-                </a:solidFill>
-                <a:latin typeface="NanumGothic"/>
-              </a:rPr>
-              <a:t>• Cost-Pareto 라인: 본 run은 중간 점 (P-E 58% → Evolved 62% @ 6.3× 토큰); 'always more = always better' 아님.</a:t>
+              <a:t>• INVALID 2건은 둘 다 orphan-edit 패턴 (run #1 4건의 동일 모드 재현) — v3에서 해결.</a:t>
             </a:r>
           </a:p>
         </p:txBody>
@@ -10203,7 +11585,7 @@
     <p:bg>
       <p:bgPr>
         <a:solidFill>
-          <a:srgbClr val="2C5F2D"/>
+          <a:srgbClr val="F5F5F5"/>
         </a:solidFill>
         <a:effectLst/>
       </p:bgPr>
@@ -10223,14 +11605,14 @@
         </p:nvSpPr>
         <p:spPr>
           <a:xfrm>
-            <a:off x="548640" y="3108960"/>
-            <a:ext cx="228600" cy="822960"/>
+            <a:off x="0" y="0"/>
+            <a:ext cx="12191695" cy="164592"/>
           </a:xfrm>
           <a:prstGeom prst="rect">
             <a:avLst/>
           </a:prstGeom>
           <a:solidFill>
-            <a:srgbClr val="97BC62"/>
+            <a:srgbClr val="2C5F2D"/>
           </a:solidFill>
           <a:ln>
             <a:noFill/>
@@ -10266,8 +11648,47 @@
         </p:nvSpPr>
         <p:spPr>
           <a:xfrm>
-            <a:off x="1005840" y="3017520"/>
-            <a:ext cx="10972800" cy="914400"/>
+            <a:off x="548640" y="246888"/>
+            <a:ext cx="10972800" cy="292608"/>
+          </a:xfrm>
+          <a:prstGeom prst="rect">
+            <a:avLst/>
+          </a:prstGeom>
+          <a:noFill/>
+        </p:spPr>
+        <p:txBody>
+          <a:bodyPr wrap="square" anchor="t" lIns="54864" rIns="54864" tIns="36576" bIns="36576">
+            <a:spAutoFit/>
+          </a:bodyPr>
+          <a:lstStyle/>
+          <a:p>
+            <a:pPr algn="l">
+              <a:lnSpc>
+                <a:spcPct val="120000"/>
+              </a:lnSpc>
+            </a:pPr>
+            <a:r>
+              <a:rPr sz="1100" b="1" i="0">
+                <a:solidFill>
+                  <a:srgbClr val="97BC62"/>
+                </a:solidFill>
+                <a:latin typeface="NanumGothic"/>
+              </a:rPr>
+              <a:t>실험 결과</a:t>
+            </a:r>
+          </a:p>
+        </p:txBody>
+      </p:sp>
+      <p:sp>
+        <p:nvSpPr>
+          <p:cNvPr id="4" name="TextBox 3"/>
+          <p:cNvSpPr txBox="1"/>
+          <p:nvPr/>
+        </p:nvSpPr>
+        <p:spPr>
+          <a:xfrm>
+            <a:off x="548640" y="502920"/>
+            <a:ext cx="11064240" cy="822960"/>
           </a:xfrm>
           <a:prstGeom prst="rect">
             <a:avLst/>
@@ -10286,27 +11707,321 @@
               </a:lnSpc>
             </a:pPr>
             <a:r>
-              <a:rPr sz="3800" b="1" i="0">
+              <a:rPr sz="3000" b="1" i="0">
+                <a:solidFill>
+                  <a:srgbClr val="36454F"/>
+                </a:solidFill>
+                <a:latin typeface="NanumGothic"/>
+              </a:rPr>
+              <a:t>7.7 §5.1.5 patches + sanity — streaming의 한계 인정</a:t>
+            </a:r>
+          </a:p>
+        </p:txBody>
+      </p:sp>
+      <p:sp>
+        <p:nvSpPr>
+          <p:cNvPr id="5" name="Rounded Rectangle 4"/>
+          <p:cNvSpPr/>
+          <p:nvPr/>
+        </p:nvSpPr>
+        <p:spPr>
+          <a:xfrm>
+            <a:off x="548640" y="1280160"/>
+            <a:ext cx="4114800" cy="457200"/>
+          </a:xfrm>
+          <a:prstGeom prst="roundRect">
+            <a:avLst/>
+          </a:prstGeom>
+          <a:solidFill>
+            <a:srgbClr val="2C5F2D"/>
+          </a:solidFill>
+          <a:ln>
+            <a:noFill/>
+          </a:ln>
+        </p:spPr>
+        <p:style>
+          <a:lnRef idx="1">
+            <a:schemeClr val="accent1"/>
+          </a:lnRef>
+          <a:fillRef idx="3">
+            <a:schemeClr val="accent1"/>
+          </a:fillRef>
+          <a:effectRef idx="2">
+            <a:schemeClr val="accent1"/>
+          </a:effectRef>
+          <a:fontRef idx="minor">
+            <a:schemeClr val="lt1"/>
+          </a:fontRef>
+        </p:style>
+        <p:txBody>
+          <a:bodyPr rtlCol="0" anchor="ctr" lIns="45720" rIns="45720" tIns="27432" bIns="27432"/>
+          <a:lstStyle/>
+          <a:p>
+            <a:pPr algn="ctr"/>
+            <a:r>
+              <a:rPr sz="1200" b="1">
                 <a:solidFill>
                   <a:srgbClr val="FFFFFF"/>
                 </a:solidFill>
                 <a:latin typeface="NanumGothic"/>
               </a:rPr>
-              <a:t>9. 한계 및 향후 작업</a:t>
-            </a:r>
-          </a:p>
-        </p:txBody>
-      </p:sp>
-      <p:sp>
-        <p:nvSpPr>
-          <p:cNvPr id="4" name="TextBox 3"/>
+              <a:t>Patches (commit 8405c78)</a:t>
+            </a:r>
+          </a:p>
+        </p:txBody>
+      </p:sp>
+      <p:sp>
+        <p:nvSpPr>
+          <p:cNvPr id="6" name="TextBox 5"/>
           <p:cNvSpPr txBox="1"/>
           <p:nvPr/>
         </p:nvSpPr>
         <p:spPr>
           <a:xfrm>
-            <a:off x="1005840" y="4023360"/>
-            <a:ext cx="10972800" cy="1280160"/>
+            <a:off x="548640" y="1783080"/>
+            <a:ext cx="5486400" cy="4572000"/>
+          </a:xfrm>
+          <a:prstGeom prst="rect">
+            <a:avLst/>
+          </a:prstGeom>
+          <a:noFill/>
+        </p:spPr>
+        <p:txBody>
+          <a:bodyPr wrap="square" lIns="54864" rIns="54864" tIns="36576" bIns="36576">
+            <a:spAutoFit/>
+          </a:bodyPr>
+          <a:lstStyle/>
+          <a:p>
+            <a:pPr>
+              <a:lnSpc>
+                <a:spcPct val="130000"/>
+              </a:lnSpc>
+            </a:pPr>
+            <a:r>
+              <a:rPr sz="1200">
+                <a:solidFill>
+                  <a:srgbClr val="36454F"/>
+                </a:solidFill>
+                <a:latin typeface="NanumGothic"/>
+              </a:rPr>
+              <a:t>• max_agents → user prompt # Constraints 라인</a:t>
+            </a:r>
+          </a:p>
+          <a:p>
+            <a:pPr>
+              <a:lnSpc>
+                <a:spcPct val="130000"/>
+              </a:lnSpc>
+            </a:pPr>
+            <a:r>
+              <a:rPr sz="1200">
+                <a:solidFill>
+                  <a:srgbClr val="36454F"/>
+                </a:solidFill>
+                <a:latin typeface="NanumGothic"/>
+              </a:rPr>
+              <a:t>• AT CAP 시 add_agent 금지 명시</a:t>
+            </a:r>
+          </a:p>
+          <a:p>
+            <a:pPr>
+              <a:lnSpc>
+                <a:spcPct val="130000"/>
+              </a:lnSpc>
+            </a:pPr>
+            <a:r>
+              <a:rPr sz="1200">
+                <a:solidFill>
+                  <a:srgbClr val="36454F"/>
+                </a:solidFill>
+                <a:latin typeface="NanumGothic"/>
+              </a:rPr>
+              <a:t>• prune-DAG reminder (orphan 방지)</a:t>
+            </a:r>
+          </a:p>
+          <a:p>
+            <a:pPr>
+              <a:lnSpc>
+                <a:spcPct val="130000"/>
+              </a:lnSpc>
+            </a:pPr>
+            <a:r>
+              <a:rPr sz="1200">
+                <a:solidFill>
+                  <a:srgbClr val="36454F"/>
+                </a:solidFill>
+                <a:latin typeface="NanumGothic"/>
+              </a:rPr>
+              <a:t>• concept-level anti-repeat callout</a:t>
+            </a:r>
+          </a:p>
+          <a:p>
+            <a:pPr>
+              <a:lnSpc>
+                <a:spcPct val="130000"/>
+              </a:lnSpc>
+            </a:pPr>
+            <a:r>
+              <a:rPr sz="1200">
+                <a:solidFill>
+                  <a:srgbClr val="36454F"/>
+                </a:solidFill>
+                <a:latin typeface="NanumGothic"/>
+              </a:rPr>
+              <a:t>• --max-agents default 6 → 8</a:t>
+            </a:r>
+          </a:p>
+        </p:txBody>
+      </p:sp>
+      <p:sp>
+        <p:nvSpPr>
+          <p:cNvPr id="7" name="Rounded Rectangle 6"/>
+          <p:cNvSpPr/>
+          <p:nvPr/>
+        </p:nvSpPr>
+        <p:spPr>
+          <a:xfrm>
+            <a:off x="6309360" y="1280160"/>
+            <a:ext cx="5212080" cy="457200"/>
+          </a:xfrm>
+          <a:prstGeom prst="roundRect">
+            <a:avLst/>
+          </a:prstGeom>
+          <a:solidFill>
+            <a:srgbClr val="2C5F2D"/>
+          </a:solidFill>
+          <a:ln>
+            <a:noFill/>
+          </a:ln>
+        </p:spPr>
+        <p:style>
+          <a:lnRef idx="1">
+            <a:schemeClr val="accent1"/>
+          </a:lnRef>
+          <a:fillRef idx="3">
+            <a:schemeClr val="accent1"/>
+          </a:fillRef>
+          <a:effectRef idx="2">
+            <a:schemeClr val="accent1"/>
+          </a:effectRef>
+          <a:fontRef idx="minor">
+            <a:schemeClr val="lt1"/>
+          </a:fontRef>
+        </p:style>
+        <p:txBody>
+          <a:bodyPr rtlCol="0" anchor="ctr" lIns="45720" rIns="45720" tIns="27432" bIns="27432"/>
+          <a:lstStyle/>
+          <a:p>
+            <a:pPr algn="ctr"/>
+            <a:r>
+              <a:rPr sz="1200" b="1">
+                <a:solidFill>
+                  <a:srgbClr val="FFFFFF"/>
+                </a:solidFill>
+                <a:latin typeface="NanumGothic"/>
+              </a:rPr>
+              <a:t>Sanity (sanity_streaming_v3_mediq_s0)</a:t>
+            </a:r>
+          </a:p>
+        </p:txBody>
+      </p:sp>
+      <p:sp>
+        <p:nvSpPr>
+          <p:cNvPr id="8" name="TextBox 7"/>
+          <p:cNvSpPr txBox="1"/>
+          <p:nvPr/>
+        </p:nvSpPr>
+        <p:spPr>
+          <a:xfrm>
+            <a:off x="6309360" y="1783080"/>
+            <a:ext cx="5212080" cy="4572000"/>
+          </a:xfrm>
+          <a:prstGeom prst="rect">
+            <a:avLst/>
+          </a:prstGeom>
+          <a:noFill/>
+        </p:spPr>
+        <p:txBody>
+          <a:bodyPr wrap="square" lIns="54864" rIns="54864" tIns="36576" bIns="36576">
+            <a:spAutoFit/>
+          </a:bodyPr>
+          <a:lstStyle/>
+          <a:p>
+            <a:pPr>
+              <a:lnSpc>
+                <a:spcPct val="130000"/>
+              </a:lnSpc>
+            </a:pPr>
+            <a:r>
+              <a:rPr sz="1200">
+                <a:solidFill>
+                  <a:srgbClr val="36454F"/>
+                </a:solidFill>
+                <a:latin typeface="NanumGothic"/>
+              </a:rPr>
+              <a:t>• B=20 R=3 mediq seed=0, ~50분 wall</a:t>
+            </a:r>
+          </a:p>
+          <a:p>
+            <a:pPr>
+              <a:lnSpc>
+                <a:spcPct val="130000"/>
+              </a:lnSpc>
+            </a:pPr>
+            <a:r>
+              <a:rPr sz="1200">
+                <a:solidFill>
+                  <a:srgbClr val="36454F"/>
+                </a:solidFill>
+                <a:latin typeface="NanumGothic"/>
+              </a:rPr>
+              <a:t>• r2 paired ACCEPT (Δ=+5pp)</a:t>
+            </a:r>
+          </a:p>
+          <a:p>
+            <a:pPr>
+              <a:lnSpc>
+                <a:spcPct val="130000"/>
+              </a:lnSpc>
+            </a:pPr>
+            <a:r>
+              <a:rPr sz="1200">
+                <a:solidFill>
+                  <a:srgbClr val="36454F"/>
+                </a:solidFill>
+                <a:latin typeface="NanumGothic"/>
+              </a:rPr>
+              <a:t>• _build_user_prompt 직접 호출로 # Constraints 렌더 확인</a:t>
+            </a:r>
+          </a:p>
+          <a:p>
+            <a:pPr>
+              <a:lnSpc>
+                <a:spcPct val="130000"/>
+              </a:lnSpc>
+            </a:pPr>
+            <a:r>
+              <a:rPr sz="1200">
+                <a:solidFill>
+                  <a:srgbClr val="B85042"/>
+                </a:solidFill>
+                <a:latin typeface="NanumGothic"/>
+              </a:rPr>
+              <a:t>• R=3 / cap=8에서 cap-binding / concept-level fire 미관찰 (sample 부족).</a:t>
+            </a:r>
+          </a:p>
+        </p:txBody>
+      </p:sp>
+      <p:sp>
+        <p:nvSpPr>
+          <p:cNvPr id="9" name="TextBox 8"/>
+          <p:cNvSpPr txBox="1"/>
+          <p:nvPr/>
+        </p:nvSpPr>
+        <p:spPr>
+          <a:xfrm>
+            <a:off x="548640" y="5943600"/>
+            <a:ext cx="11064240" cy="548640"/>
           </a:xfrm>
           <a:prstGeom prst="rect">
             <a:avLst/>
@@ -10325,13 +12040,13 @@
               </a:lnSpc>
             </a:pPr>
             <a:r>
-              <a:rPr sz="1600" b="0" i="1">
-                <a:solidFill>
-                  <a:srgbClr val="CFD3D7"/>
-                </a:solidFill>
-                <a:latin typeface="NanumGothic"/>
-              </a:rPr>
-              <a:t>정직한 자기 평가</a:t>
+              <a:rPr sz="1200" b="0" i="1">
+                <a:solidFill>
+                  <a:srgbClr val="B85042"/>
+                </a:solidFill>
+                <a:latin typeface="NanumGothic"/>
+              </a:rPr>
+              <a:t>결론: streaming의 cross-batch 절대 acc 비교는 구조적으로 깨짐 → §4.4 v3로 이행.</a:t>
             </a:r>
           </a:p>
         </p:txBody>
@@ -10439,7 +12154,7 @@
                 </a:solidFill>
                 <a:latin typeface="NanumGothic"/>
               </a:rPr>
-              <a:t>한계</a:t>
+              <a:t>실험 결과</a:t>
             </a:r>
           </a:p>
         </p:txBody>
@@ -10478,21 +12193,473 @@
                 </a:solidFill>
                 <a:latin typeface="NanumGothic"/>
               </a:rPr>
-              <a:t>9.1 한계 (Limitations)</a:t>
-            </a:r>
-          </a:p>
-        </p:txBody>
-      </p:sp>
-      <p:sp>
-        <p:nvSpPr>
-          <p:cNvPr id="5" name="TextBox 4"/>
+              <a:t>7.8 Controller v3 첫 run — Evolved beats CoT (+6pp)</a:t>
+            </a:r>
+          </a:p>
+        </p:txBody>
+      </p:sp>
+      <p:pic>
+        <p:nvPicPr>
+          <p:cNvPr id="5" name="Picture 4" descr="accuracy_vs_iter.png"/>
+          <p:cNvPicPr>
+            <a:picLocks noChangeAspect="1"/>
+          </p:cNvPicPr>
+          <p:nvPr/>
+        </p:nvPicPr>
+        <p:blipFill>
+          <a:blip r:embed="rId2"/>
+          <a:stretch>
+            <a:fillRect/>
+          </a:stretch>
+        </p:blipFill>
+        <p:spPr>
+          <a:xfrm>
+            <a:off x="365760" y="1325880"/>
+            <a:ext cx="5486400" cy="3657600"/>
+          </a:xfrm>
+          <a:prstGeom prst="rect">
+            <a:avLst/>
+          </a:prstGeom>
+        </p:spPr>
+      </p:pic>
+      <p:pic>
+        <p:nvPicPr>
+          <p:cNvPr id="6" name="Picture 5" descr="arch_size.png"/>
+          <p:cNvPicPr>
+            <a:picLocks noChangeAspect="1"/>
+          </p:cNvPicPr>
+          <p:nvPr/>
+        </p:nvPicPr>
+        <p:blipFill>
+          <a:blip r:embed="rId3"/>
+          <a:stretch>
+            <a:fillRect/>
+          </a:stretch>
+        </p:blipFill>
+        <p:spPr>
+          <a:xfrm>
+            <a:off x="6126480" y="1325880"/>
+            <a:ext cx="5486400" cy="3657600"/>
+          </a:xfrm>
+          <a:prstGeom prst="rect">
+            <a:avLst/>
+          </a:prstGeom>
+        </p:spPr>
+      </p:pic>
+      <p:graphicFrame>
+        <p:nvGraphicFramePr>
+          <p:cNvPr id="7" name="Table 6"/>
+          <p:cNvGraphicFramePr>
+            <a:graphicFrameLocks noGrp="1"/>
+          </p:cNvGraphicFramePr>
+          <p:nvPr/>
+        </p:nvGraphicFramePr>
+        <p:xfrm>
+          <a:off x="548640" y="4297680"/>
+          <a:ext cx="11064240" cy="1554480"/>
+        </p:xfrm>
+        <a:graphic>
+          <a:graphicData uri="http://schemas.openxmlformats.org/drawingml/2006/table">
+            <a:tbl>
+              <a:tblPr firstRow="1" bandRow="1">
+                <a:tableStyleId>{5C22544A-7EE6-4342-B048-85BDC9FD1C3A}</a:tableStyleId>
+              </a:tblPr>
+              <a:tblGrid>
+                <a:gridCol w="2766060"/>
+                <a:gridCol w="2766060"/>
+                <a:gridCol w="2766060"/>
+                <a:gridCol w="2766060"/>
+              </a:tblGrid>
+              <a:tr h="388620">
+                <a:tc>
+                  <a:txBody>
+                    <a:bodyPr lIns="45720" rIns="45720"/>
+                    <a:lstStyle/>
+                    <a:p>
+                      <a:pPr algn="ctr"/>
+                      <a:r>
+                        <a:rPr sz="1300" b="1">
+                          <a:solidFill>
+                            <a:srgbClr val="FFFFFF"/>
+                          </a:solidFill>
+                          <a:latin typeface="NanumGothic"/>
+                        </a:rPr>
+                        <a:t>Method</a:t>
+                      </a:r>
+                    </a:p>
+                  </a:txBody>
+                  <a:tcPr>
+                    <a:solidFill>
+                      <a:srgbClr val="2C5F2D"/>
+                    </a:solidFill>
+                  </a:tcPr>
+                </a:tc>
+                <a:tc>
+                  <a:txBody>
+                    <a:bodyPr lIns="45720" rIns="45720"/>
+                    <a:lstStyle/>
+                    <a:p>
+                      <a:pPr algn="ctr"/>
+                      <a:r>
+                        <a:rPr sz="1300" b="1">
+                          <a:solidFill>
+                            <a:srgbClr val="FFFFFF"/>
+                          </a:solidFill>
+                          <a:latin typeface="NanumGothic"/>
+                        </a:rPr>
+                        <a:t>Test acc (n=50)</a:t>
+                      </a:r>
+                    </a:p>
+                  </a:txBody>
+                  <a:tcPr>
+                    <a:solidFill>
+                      <a:srgbClr val="2C5F2D"/>
+                    </a:solidFill>
+                  </a:tcPr>
+                </a:tc>
+                <a:tc>
+                  <a:txBody>
+                    <a:bodyPr lIns="45720" rIns="45720"/>
+                    <a:lstStyle/>
+                    <a:p>
+                      <a:pPr algn="ctr"/>
+                      <a:r>
+                        <a:rPr sz="1300" b="1">
+                          <a:solidFill>
+                            <a:srgbClr val="FFFFFF"/>
+                          </a:solidFill>
+                          <a:latin typeface="NanumGothic"/>
+                        </a:rPr>
+                        <a:t>Tokens / task</a:t>
+                      </a:r>
+                    </a:p>
+                  </a:txBody>
+                  <a:tcPr>
+                    <a:solidFill>
+                      <a:srgbClr val="2C5F2D"/>
+                    </a:solidFill>
+                  </a:tcPr>
+                </a:tc>
+                <a:tc>
+                  <a:txBody>
+                    <a:bodyPr lIns="45720" rIns="45720"/>
+                    <a:lstStyle/>
+                    <a:p>
+                      <a:pPr algn="ctr"/>
+                      <a:r>
+                        <a:rPr sz="1300" b="1">
+                          <a:solidFill>
+                            <a:srgbClr val="FFFFFF"/>
+                          </a:solidFill>
+                          <a:latin typeface="NanumGothic"/>
+                        </a:rPr>
+                        <a:t>Δ vs CoT</a:t>
+                      </a:r>
+                    </a:p>
+                  </a:txBody>
+                  <a:tcPr>
+                    <a:solidFill>
+                      <a:srgbClr val="2C5F2D"/>
+                    </a:solidFill>
+                  </a:tcPr>
+                </a:tc>
+              </a:tr>
+              <a:tr h="388620">
+                <a:tc>
+                  <a:txBody>
+                    <a:bodyPr lIns="54864" rIns="54864"/>
+                    <a:lstStyle/>
+                    <a:p>
+                      <a:pPr algn="l"/>
+                      <a:r>
+                        <a:rPr sz="1200">
+                          <a:solidFill>
+                            <a:srgbClr val="36454F"/>
+                          </a:solidFill>
+                          <a:latin typeface="NanumGothic"/>
+                        </a:rPr>
+                        <a:t>CoT</a:t>
+                      </a:r>
+                    </a:p>
+                  </a:txBody>
+                  <a:tcPr>
+                    <a:solidFill>
+                      <a:srgbClr val="F5F5F5"/>
+                    </a:solidFill>
+                  </a:tcPr>
+                </a:tc>
+                <a:tc>
+                  <a:txBody>
+                    <a:bodyPr lIns="54864" rIns="54864"/>
+                    <a:lstStyle/>
+                    <a:p>
+                      <a:pPr algn="ctr"/>
+                      <a:r>
+                        <a:rPr sz="1200">
+                          <a:solidFill>
+                            <a:srgbClr val="36454F"/>
+                          </a:solidFill>
+                          <a:latin typeface="NanumGothic"/>
+                        </a:rPr>
+                        <a:t>46.0 %</a:t>
+                      </a:r>
+                    </a:p>
+                  </a:txBody>
+                  <a:tcPr>
+                    <a:solidFill>
+                      <a:srgbClr val="F5F5F5"/>
+                    </a:solidFill>
+                  </a:tcPr>
+                </a:tc>
+                <a:tc>
+                  <a:txBody>
+                    <a:bodyPr lIns="54864" rIns="54864"/>
+                    <a:lstStyle/>
+                    <a:p>
+                      <a:pPr algn="ctr"/>
+                      <a:r>
+                        <a:rPr sz="1200">
+                          <a:solidFill>
+                            <a:srgbClr val="36454F"/>
+                          </a:solidFill>
+                          <a:latin typeface="NanumGothic"/>
+                        </a:rPr>
+                        <a:t>0.55k</a:t>
+                      </a:r>
+                    </a:p>
+                  </a:txBody>
+                  <a:tcPr>
+                    <a:solidFill>
+                      <a:srgbClr val="F5F5F5"/>
+                    </a:solidFill>
+                  </a:tcPr>
+                </a:tc>
+                <a:tc>
+                  <a:txBody>
+                    <a:bodyPr lIns="54864" rIns="54864"/>
+                    <a:lstStyle/>
+                    <a:p>
+                      <a:pPr algn="ctr"/>
+                      <a:r>
+                        <a:rPr sz="1200">
+                          <a:solidFill>
+                            <a:srgbClr val="36454F"/>
+                          </a:solidFill>
+                          <a:latin typeface="NanumGothic"/>
+                        </a:rPr>
+                        <a:t>—</a:t>
+                      </a:r>
+                    </a:p>
+                  </a:txBody>
+                  <a:tcPr>
+                    <a:solidFill>
+                      <a:srgbClr val="F5F5F5"/>
+                    </a:solidFill>
+                  </a:tcPr>
+                </a:tc>
+              </a:tr>
+              <a:tr h="388620">
+                <a:tc>
+                  <a:txBody>
+                    <a:bodyPr lIns="54864" rIns="54864"/>
+                    <a:lstStyle/>
+                    <a:p>
+                      <a:pPr algn="l"/>
+                      <a:r>
+                        <a:rPr sz="1200">
+                          <a:solidFill>
+                            <a:srgbClr val="36454F"/>
+                          </a:solidFill>
+                          <a:latin typeface="NanumGothic"/>
+                        </a:rPr>
+                        <a:t>P-E</a:t>
+                      </a:r>
+                    </a:p>
+                  </a:txBody>
+                  <a:tcPr>
+                    <a:solidFill>
+                      <a:srgbClr val="FFFFFF"/>
+                    </a:solidFill>
+                  </a:tcPr>
+                </a:tc>
+                <a:tc>
+                  <a:txBody>
+                    <a:bodyPr lIns="54864" rIns="54864"/>
+                    <a:lstStyle/>
+                    <a:p>
+                      <a:pPr algn="ctr"/>
+                      <a:r>
+                        <a:rPr sz="1200">
+                          <a:solidFill>
+                            <a:srgbClr val="36454F"/>
+                          </a:solidFill>
+                          <a:latin typeface="NanumGothic"/>
+                        </a:rPr>
+                        <a:t>50.0 %</a:t>
+                      </a:r>
+                    </a:p>
+                  </a:txBody>
+                  <a:tcPr>
+                    <a:solidFill>
+                      <a:srgbClr val="FFFFFF"/>
+                    </a:solidFill>
+                  </a:tcPr>
+                </a:tc>
+                <a:tc>
+                  <a:txBody>
+                    <a:bodyPr lIns="54864" rIns="54864"/>
+                    <a:lstStyle/>
+                    <a:p>
+                      <a:pPr algn="ctr"/>
+                      <a:r>
+                        <a:rPr sz="1200">
+                          <a:solidFill>
+                            <a:srgbClr val="36454F"/>
+                          </a:solidFill>
+                          <a:latin typeface="NanumGothic"/>
+                        </a:rPr>
+                        <a:t>1.09k</a:t>
+                      </a:r>
+                    </a:p>
+                  </a:txBody>
+                  <a:tcPr>
+                    <a:solidFill>
+                      <a:srgbClr val="FFFFFF"/>
+                    </a:solidFill>
+                  </a:tcPr>
+                </a:tc>
+                <a:tc>
+                  <a:txBody>
+                    <a:bodyPr lIns="54864" rIns="54864"/>
+                    <a:lstStyle/>
+                    <a:p>
+                      <a:pPr algn="ctr"/>
+                      <a:r>
+                        <a:rPr sz="1200">
+                          <a:solidFill>
+                            <a:srgbClr val="36454F"/>
+                          </a:solidFill>
+                          <a:latin typeface="NanumGothic"/>
+                        </a:rPr>
+                        <a:t>+4 pp</a:t>
+                      </a:r>
+                    </a:p>
+                  </a:txBody>
+                  <a:tcPr>
+                    <a:solidFill>
+                      <a:srgbClr val="FFFFFF"/>
+                    </a:solidFill>
+                  </a:tcPr>
+                </a:tc>
+              </a:tr>
+              <a:tr h="388620">
+                <a:tc>
+                  <a:txBody>
+                    <a:bodyPr lIns="54864" rIns="54864"/>
+                    <a:lstStyle/>
+                    <a:p>
+                      <a:pPr algn="l"/>
+                      <a:r>
+                        <a:rPr sz="1200">
+                          <a:solidFill>
+                            <a:srgbClr val="36454F"/>
+                          </a:solidFill>
+                          <a:latin typeface="NanumGothic"/>
+                        </a:rPr>
+                        <a:t>Evolved (v3, 8 ag, 15 ed)</a:t>
+                      </a:r>
+                    </a:p>
+                  </a:txBody>
+                  <a:tcPr>
+                    <a:solidFill>
+                      <a:srgbClr val="F5F5F5"/>
+                    </a:solidFill>
+                  </a:tcPr>
+                </a:tc>
+                <a:tc>
+                  <a:txBody>
+                    <a:bodyPr lIns="54864" rIns="54864"/>
+                    <a:lstStyle/>
+                    <a:p>
+                      <a:pPr algn="ctr"/>
+                      <a:r>
+                        <a:rPr sz="1200">
+                          <a:solidFill>
+                            <a:srgbClr val="36454F"/>
+                          </a:solidFill>
+                          <a:latin typeface="NanumGothic"/>
+                        </a:rPr>
+                        <a:t>52.0 %</a:t>
+                      </a:r>
+                    </a:p>
+                  </a:txBody>
+                  <a:tcPr>
+                    <a:solidFill>
+                      <a:srgbClr val="F5F5F5"/>
+                    </a:solidFill>
+                  </a:tcPr>
+                </a:tc>
+                <a:tc>
+                  <a:txBody>
+                    <a:bodyPr lIns="54864" rIns="54864"/>
+                    <a:lstStyle/>
+                    <a:p>
+                      <a:pPr algn="ctr"/>
+                      <a:r>
+                        <a:rPr sz="1200">
+                          <a:solidFill>
+                            <a:srgbClr val="36454F"/>
+                          </a:solidFill>
+                          <a:latin typeface="NanumGothic"/>
+                        </a:rPr>
+                        <a:t>3.28k (3.0× P-E)</a:t>
+                      </a:r>
+                    </a:p>
+                  </a:txBody>
+                  <a:tcPr>
+                    <a:solidFill>
+                      <a:srgbClr val="F5F5F5"/>
+                    </a:solidFill>
+                  </a:tcPr>
+                </a:tc>
+                <a:tc>
+                  <a:txBody>
+                    <a:bodyPr lIns="54864" rIns="54864"/>
+                    <a:lstStyle/>
+                    <a:p>
+                      <a:pPr algn="ctr"/>
+                      <a:r>
+                        <a:rPr sz="1200">
+                          <a:solidFill>
+                            <a:srgbClr val="36454F"/>
+                          </a:solidFill>
+                          <a:latin typeface="NanumGothic"/>
+                        </a:rPr>
+                        <a:t>+6 pp ✓</a:t>
+                      </a:r>
+                    </a:p>
+                  </a:txBody>
+                  <a:tcPr>
+                    <a:solidFill>
+                      <a:srgbClr val="F5F5F5"/>
+                    </a:solidFill>
+                  </a:tcPr>
+                </a:tc>
+              </a:tr>
+            </a:tbl>
+          </a:graphicData>
+        </a:graphic>
+      </p:graphicFrame>
+      <p:sp>
+        <p:nvSpPr>
+          <p:cNvPr id="8" name="TextBox 7"/>
           <p:cNvSpPr txBox="1"/>
           <p:nvPr/>
         </p:nvSpPr>
         <p:spPr>
           <a:xfrm>
-            <a:off x="548640" y="1280160"/>
-            <a:ext cx="11064240" cy="5120640"/>
+            <a:off x="548640" y="5897880"/>
+            <a:ext cx="11064240" cy="365760"/>
           </a:xfrm>
           <a:prstGeom prst="rect">
             <a:avLst/>
@@ -10500,120 +12667,63 @@
           <a:noFill/>
         </p:spPr>
         <p:txBody>
-          <a:bodyPr wrap="square" lIns="54864" rIns="54864" tIns="36576" bIns="36576">
+          <a:bodyPr wrap="square" anchor="t" lIns="54864" rIns="54864" tIns="36576" bIns="36576">
             <a:spAutoFit/>
           </a:bodyPr>
           <a:lstStyle/>
           <a:p>
-            <a:pPr>
-              <a:lnSpc>
-                <a:spcPct val="130000"/>
-              </a:lnSpc>
-            </a:pPr>
-            <a:r>
-              <a:rPr sz="1400">
-                <a:solidFill>
-                  <a:srgbClr val="B85042"/>
-                </a:solidFill>
-                <a:latin typeface="NanumGothic"/>
-              </a:rPr>
-              <a:t>• v2 @ n=30이 세 도메인 모두 baseline test를 이기지 못함.</a:t>
-            </a:r>
-          </a:p>
-          <a:p>
-            <a:pPr>
-              <a:lnSpc>
-                <a:spcPct val="130000"/>
-              </a:lnSpc>
-            </a:pPr>
-            <a:r>
-              <a:rPr sz="1400">
-                <a:solidFill>
-                  <a:srgbClr val="B85042"/>
-                </a:solidFill>
-                <a:latin typeface="NanumGothic"/>
-              </a:rPr>
-              <a:t>• ±13 pp 노이즈 floor가 architectural 효과를 가림.</a:t>
-            </a:r>
-          </a:p>
-          <a:p>
-            <a:pPr>
-              <a:lnSpc>
-                <a:spcPct val="130000"/>
-              </a:lnSpc>
-            </a:pPr>
-            <a:r>
-              <a:rPr sz="1400">
-                <a:solidFill>
-                  <a:srgbClr val="B85042"/>
-                </a:solidFill>
-                <a:latin typeface="NanumGothic"/>
-              </a:rPr>
-              <a:t>• LLM-judge가 same-family Qwen → self-bias 위험.</a:t>
-            </a:r>
-          </a:p>
-          <a:p>
-            <a:pPr>
-              <a:lnSpc>
-                <a:spcPct val="130000"/>
-              </a:lnSpc>
-            </a:pPr>
-            <a:r>
-              <a:rPr sz="1400">
-                <a:solidFill>
-                  <a:srgbClr val="B85042"/>
-                </a:solidFill>
-                <a:latin typeface="NanumGothic"/>
-              </a:rPr>
-              <a:t>• 단일 백본 (Qwen2.5-32B), 단일 judge.</a:t>
-            </a:r>
-          </a:p>
-          <a:p>
-            <a:pPr>
-              <a:lnSpc>
-                <a:spcPct val="130000"/>
-              </a:lnSpc>
-            </a:pPr>
-            <a:r>
-              <a:rPr sz="1400">
-                <a:solidFill>
-                  <a:srgbClr val="B85042"/>
-                </a:solidFill>
-                <a:latin typeface="NanumGothic"/>
-              </a:rPr>
-              <a:t>• Streaming wall 9-10 h × seed × domain → 3×3 sweep 전체 ~90 h.</a:t>
-            </a:r>
-          </a:p>
-          <a:p>
-            <a:pPr>
-              <a:lnSpc>
-                <a:spcPct val="130000"/>
-              </a:lnSpc>
-            </a:pPr>
-            <a:r>
-              <a:rPr sz="1400">
-                <a:solidFill>
-                  <a:srgbClr val="B85042"/>
-                </a:solidFill>
-                <a:latin typeface="NanumGothic"/>
-              </a:rPr>
-              <a:t>• ADAS / MaAS / Puppeteer 직접 비교 미실시 (reviewer #0 질문).</a:t>
-            </a:r>
-          </a:p>
-          <a:p>
-            <a:pPr>
-              <a:lnSpc>
-                <a:spcPct val="130000"/>
-              </a:lnSpc>
-            </a:pPr>
-            <a:r>
-              <a:rPr sz="1400">
-                <a:solidFill>
-                  <a:srgbClr val="B85042"/>
-                </a:solidFill>
-                <a:latin typeface="NanumGothic"/>
-              </a:rPr>
-              <a:t>• Concept-level anti-repeat이 soft constraint, sanity_v3에서 fire 안 함 — 추가 강화 필요.</a:t>
+            <a:pPr algn="l">
+              <a:lnSpc>
+                <a:spcPct val="120000"/>
+              </a:lnSpc>
+            </a:pPr>
+            <a:r>
+              <a:rPr sz="1100" b="0" i="1">
+                <a:solidFill>
+                  <a:srgbClr val="36454F"/>
+                </a:solidFill>
+                <a:latin typeface="NanumGothic"/>
+              </a:rPr>
+              <a:t>MEDIQ seed=0, n_train=30, max_iters=10, wall ≈ 5h (v2 streaming의 ½)</a:t>
+            </a:r>
+          </a:p>
+        </p:txBody>
+      </p:sp>
+      <p:sp>
+        <p:nvSpPr>
+          <p:cNvPr id="9" name="TextBox 8"/>
+          <p:cNvSpPr txBox="1"/>
+          <p:nvPr/>
+        </p:nvSpPr>
+        <p:spPr>
+          <a:xfrm>
+            <a:off x="548640" y="6263640"/>
+            <a:ext cx="11064240" cy="365760"/>
+          </a:xfrm>
+          <a:prstGeom prst="rect">
+            <a:avLst/>
+          </a:prstGeom>
+          <a:noFill/>
+        </p:spPr>
+        <p:txBody>
+          <a:bodyPr wrap="square" anchor="t" lIns="54864" rIns="54864" tIns="36576" bIns="36576">
+            <a:spAutoFit/>
+          </a:bodyPr>
+          <a:lstStyle/>
+          <a:p>
+            <a:pPr algn="l">
+              <a:lnSpc>
+                <a:spcPct val="120000"/>
+              </a:lnSpc>
+            </a:pPr>
+            <a:r>
+              <a:rPr sz="1100" b="0" i="1">
+                <a:solidFill>
+                  <a:srgbClr val="2C5F2D"/>
+                </a:solidFill>
+                <a:latin typeface="NanumGothic"/>
+              </a:rPr>
+              <a:t>4 ACCEPT (iter 1, 5, 7, 8) / 6 reject / 0 INVALID — orphan auto-drop이 streaming 30-40% INVALID를 완전 해소.</a:t>
             </a:r>
           </a:p>
         </p:txBody>
@@ -10721,7 +12831,7 @@
                 </a:solidFill>
                 <a:latin typeface="NanumGothic"/>
               </a:rPr>
-              <a:t>향후 작업</a:t>
+              <a:t>실험 결과</a:t>
             </a:r>
           </a:p>
         </p:txBody>
@@ -10760,21 +12870,704 @@
                 </a:solidFill>
                 <a:latin typeface="NanumGothic"/>
               </a:rPr>
-              <a:t>9.2 향후 작업 (Future Work)</a:t>
-            </a:r>
-          </a:p>
-        </p:txBody>
-      </p:sp>
-      <p:sp>
-        <p:nvSpPr>
-          <p:cNvPr id="5" name="TextBox 4"/>
+              <a:t>7.9 v3 vs v2 streaming — 종합 (3 run, MEDIQ)</a:t>
+            </a:r>
+          </a:p>
+        </p:txBody>
+      </p:sp>
+      <p:graphicFrame>
+        <p:nvGraphicFramePr>
+          <p:cNvPr id="5" name="Table 4"/>
+          <p:cNvGraphicFramePr>
+            <a:graphicFrameLocks noGrp="1"/>
+          </p:cNvGraphicFramePr>
+          <p:nvPr/>
+        </p:nvGraphicFramePr>
+        <p:xfrm>
+          <a:off x="548640" y="1280160"/>
+          <a:ext cx="11064240" cy="1828800"/>
+        </p:xfrm>
+        <a:graphic>
+          <a:graphicData uri="http://schemas.openxmlformats.org/drawingml/2006/table">
+            <a:tbl>
+              <a:tblPr firstRow="1" bandRow="1">
+                <a:tableStyleId>{5C22544A-7EE6-4342-B048-85BDC9FD1C3A}</a:tableStyleId>
+              </a:tblPr>
+              <a:tblGrid>
+                <a:gridCol w="1580605"/>
+                <a:gridCol w="1580605"/>
+                <a:gridCol w="1580605"/>
+                <a:gridCol w="1580605"/>
+                <a:gridCol w="1580605"/>
+                <a:gridCol w="1580605"/>
+                <a:gridCol w="1580610"/>
+              </a:tblGrid>
+              <a:tr h="457200">
+                <a:tc>
+                  <a:txBody>
+                    <a:bodyPr lIns="45720" rIns="45720"/>
+                    <a:lstStyle/>
+                    <a:p>
+                      <a:pPr algn="ctr"/>
+                      <a:r>
+                        <a:rPr sz="1300" b="1">
+                          <a:solidFill>
+                            <a:srgbClr val="FFFFFF"/>
+                          </a:solidFill>
+                          <a:latin typeface="NanumGothic"/>
+                        </a:rPr>
+                        <a:t>Run</a:t>
+                      </a:r>
+                    </a:p>
+                  </a:txBody>
+                  <a:tcPr>
+                    <a:solidFill>
+                      <a:srgbClr val="2C5F2D"/>
+                    </a:solidFill>
+                  </a:tcPr>
+                </a:tc>
+                <a:tc>
+                  <a:txBody>
+                    <a:bodyPr lIns="45720" rIns="45720"/>
+                    <a:lstStyle/>
+                    <a:p>
+                      <a:pPr algn="ctr"/>
+                      <a:r>
+                        <a:rPr sz="1300" b="1">
+                          <a:solidFill>
+                            <a:srgbClr val="FFFFFF"/>
+                          </a:solidFill>
+                          <a:latin typeface="NanumGothic"/>
+                        </a:rPr>
+                        <a:t>wall</a:t>
+                      </a:r>
+                    </a:p>
+                  </a:txBody>
+                  <a:tcPr>
+                    <a:solidFill>
+                      <a:srgbClr val="2C5F2D"/>
+                    </a:solidFill>
+                  </a:tcPr>
+                </a:tc>
+                <a:tc>
+                  <a:txBody>
+                    <a:bodyPr lIns="45720" rIns="45720"/>
+                    <a:lstStyle/>
+                    <a:p>
+                      <a:pPr algn="ctr"/>
+                      <a:r>
+                        <a:rPr sz="1300" b="1">
+                          <a:solidFill>
+                            <a:srgbClr val="FFFFFF"/>
+                          </a:solidFill>
+                          <a:latin typeface="NanumGothic"/>
+                        </a:rPr>
+                        <a:t>ACCEPT</a:t>
+                      </a:r>
+                    </a:p>
+                  </a:txBody>
+                  <a:tcPr>
+                    <a:solidFill>
+                      <a:srgbClr val="2C5F2D"/>
+                    </a:solidFill>
+                  </a:tcPr>
+                </a:tc>
+                <a:tc>
+                  <a:txBody>
+                    <a:bodyPr lIns="45720" rIns="45720"/>
+                    <a:lstStyle/>
+                    <a:p>
+                      <a:pPr algn="ctr"/>
+                      <a:r>
+                        <a:rPr sz="1300" b="1">
+                          <a:solidFill>
+                            <a:srgbClr val="FFFFFF"/>
+                          </a:solidFill>
+                          <a:latin typeface="NanumGothic"/>
+                        </a:rPr>
+                        <a:t>INVALID</a:t>
+                      </a:r>
+                    </a:p>
+                  </a:txBody>
+                  <a:tcPr>
+                    <a:solidFill>
+                      <a:srgbClr val="2C5F2D"/>
+                    </a:solidFill>
+                  </a:tcPr>
+                </a:tc>
+                <a:tc>
+                  <a:txBody>
+                    <a:bodyPr lIns="45720" rIns="45720"/>
+                    <a:lstStyle/>
+                    <a:p>
+                      <a:pPr algn="ctr"/>
+                      <a:r>
+                        <a:rPr sz="1300" b="1">
+                          <a:solidFill>
+                            <a:srgbClr val="FFFFFF"/>
+                          </a:solidFill>
+                          <a:latin typeface="NanumGothic"/>
+                        </a:rPr>
+                        <a:t>Final n_ag</a:t>
+                      </a:r>
+                    </a:p>
+                  </a:txBody>
+                  <a:tcPr>
+                    <a:solidFill>
+                      <a:srgbClr val="2C5F2D"/>
+                    </a:solidFill>
+                  </a:tcPr>
+                </a:tc>
+                <a:tc>
+                  <a:txBody>
+                    <a:bodyPr lIns="45720" rIns="45720"/>
+                    <a:lstStyle/>
+                    <a:p>
+                      <a:pPr algn="ctr"/>
+                      <a:r>
+                        <a:rPr sz="1300" b="1">
+                          <a:solidFill>
+                            <a:srgbClr val="FFFFFF"/>
+                          </a:solidFill>
+                          <a:latin typeface="NanumGothic"/>
+                        </a:rPr>
+                        <a:t>Δ vs CoT</a:t>
+                      </a:r>
+                    </a:p>
+                  </a:txBody>
+                  <a:tcPr>
+                    <a:solidFill>
+                      <a:srgbClr val="2C5F2D"/>
+                    </a:solidFill>
+                  </a:tcPr>
+                </a:tc>
+                <a:tc>
+                  <a:txBody>
+                    <a:bodyPr lIns="45720" rIns="45720"/>
+                    <a:lstStyle/>
+                    <a:p>
+                      <a:pPr algn="ctr"/>
+                      <a:r>
+                        <a:rPr sz="1300" b="1">
+                          <a:solidFill>
+                            <a:srgbClr val="FFFFFF"/>
+                          </a:solidFill>
+                          <a:latin typeface="NanumGothic"/>
+                        </a:rPr>
+                        <a:t>Δ vs P-E</a:t>
+                      </a:r>
+                    </a:p>
+                  </a:txBody>
+                  <a:tcPr>
+                    <a:solidFill>
+                      <a:srgbClr val="2C5F2D"/>
+                    </a:solidFill>
+                  </a:tcPr>
+                </a:tc>
+              </a:tr>
+              <a:tr h="457200">
+                <a:tc>
+                  <a:txBody>
+                    <a:bodyPr lIns="54864" rIns="54864"/>
+                    <a:lstStyle/>
+                    <a:p>
+                      <a:pPr algn="l"/>
+                      <a:r>
+                        <a:rPr sz="1200">
+                          <a:solidFill>
+                            <a:srgbClr val="36454F"/>
+                          </a:solidFill>
+                          <a:latin typeface="NanumGothic"/>
+                        </a:rPr>
+                        <a:t>v2 streaming run #1 (s=0)</a:t>
+                      </a:r>
+                    </a:p>
+                  </a:txBody>
+                  <a:tcPr>
+                    <a:solidFill>
+                      <a:srgbClr val="F5F5F5"/>
+                    </a:solidFill>
+                  </a:tcPr>
+                </a:tc>
+                <a:tc>
+                  <a:txBody>
+                    <a:bodyPr lIns="54864" rIns="54864"/>
+                    <a:lstStyle/>
+                    <a:p>
+                      <a:pPr algn="ctr"/>
+                      <a:r>
+                        <a:rPr sz="1200">
+                          <a:solidFill>
+                            <a:srgbClr val="36454F"/>
+                          </a:solidFill>
+                          <a:latin typeface="NanumGothic"/>
+                        </a:rPr>
+                        <a:t>9h 45m</a:t>
+                      </a:r>
+                    </a:p>
+                  </a:txBody>
+                  <a:tcPr>
+                    <a:solidFill>
+                      <a:srgbClr val="F5F5F5"/>
+                    </a:solidFill>
+                  </a:tcPr>
+                </a:tc>
+                <a:tc>
+                  <a:txBody>
+                    <a:bodyPr lIns="54864" rIns="54864"/>
+                    <a:lstStyle/>
+                    <a:p>
+                      <a:pPr algn="ctr"/>
+                      <a:r>
+                        <a:rPr sz="1200">
+                          <a:solidFill>
+                            <a:srgbClr val="36454F"/>
+                          </a:solidFill>
+                          <a:latin typeface="NanumGothic"/>
+                        </a:rPr>
+                        <a:t>4 / 10</a:t>
+                      </a:r>
+                    </a:p>
+                  </a:txBody>
+                  <a:tcPr>
+                    <a:solidFill>
+                      <a:srgbClr val="F5F5F5"/>
+                    </a:solidFill>
+                  </a:tcPr>
+                </a:tc>
+                <a:tc>
+                  <a:txBody>
+                    <a:bodyPr lIns="54864" rIns="54864"/>
+                    <a:lstStyle/>
+                    <a:p>
+                      <a:pPr algn="ctr"/>
+                      <a:r>
+                        <a:rPr sz="1200">
+                          <a:solidFill>
+                            <a:srgbClr val="36454F"/>
+                          </a:solidFill>
+                          <a:latin typeface="NanumGothic"/>
+                        </a:rPr>
+                        <a:t>4 / 10</a:t>
+                      </a:r>
+                    </a:p>
+                  </a:txBody>
+                  <a:tcPr>
+                    <a:solidFill>
+                      <a:srgbClr val="F5F5F5"/>
+                    </a:solidFill>
+                  </a:tcPr>
+                </a:tc>
+                <a:tc>
+                  <a:txBody>
+                    <a:bodyPr lIns="54864" rIns="54864"/>
+                    <a:lstStyle/>
+                    <a:p>
+                      <a:pPr algn="ctr"/>
+                      <a:r>
+                        <a:rPr sz="1200">
+                          <a:solidFill>
+                            <a:srgbClr val="36454F"/>
+                          </a:solidFill>
+                          <a:latin typeface="NanumGothic"/>
+                        </a:rPr>
+                        <a:t>6</a:t>
+                      </a:r>
+                    </a:p>
+                  </a:txBody>
+                  <a:tcPr>
+                    <a:solidFill>
+                      <a:srgbClr val="F5F5F5"/>
+                    </a:solidFill>
+                  </a:tcPr>
+                </a:tc>
+                <a:tc>
+                  <a:txBody>
+                    <a:bodyPr lIns="54864" rIns="54864"/>
+                    <a:lstStyle/>
+                    <a:p>
+                      <a:pPr algn="ctr"/>
+                      <a:r>
+                        <a:rPr sz="1200">
+                          <a:solidFill>
+                            <a:srgbClr val="36454F"/>
+                          </a:solidFill>
+                          <a:latin typeface="NanumGothic"/>
+                        </a:rPr>
+                        <a:t>−6 pp</a:t>
+                      </a:r>
+                    </a:p>
+                  </a:txBody>
+                  <a:tcPr>
+                    <a:solidFill>
+                      <a:srgbClr val="F5F5F5"/>
+                    </a:solidFill>
+                  </a:tcPr>
+                </a:tc>
+                <a:tc>
+                  <a:txBody>
+                    <a:bodyPr lIns="54864" rIns="54864"/>
+                    <a:lstStyle/>
+                    <a:p>
+                      <a:pPr algn="ctr"/>
+                      <a:r>
+                        <a:rPr sz="1200">
+                          <a:solidFill>
+                            <a:srgbClr val="36454F"/>
+                          </a:solidFill>
+                          <a:latin typeface="NanumGothic"/>
+                        </a:rPr>
+                        <a:t>+4 pp</a:t>
+                      </a:r>
+                    </a:p>
+                  </a:txBody>
+                  <a:tcPr>
+                    <a:solidFill>
+                      <a:srgbClr val="F5F5F5"/>
+                    </a:solidFill>
+                  </a:tcPr>
+                </a:tc>
+              </a:tr>
+              <a:tr h="457200">
+                <a:tc>
+                  <a:txBody>
+                    <a:bodyPr lIns="54864" rIns="54864"/>
+                    <a:lstStyle/>
+                    <a:p>
+                      <a:pPr algn="l"/>
+                      <a:r>
+                        <a:rPr sz="1200">
+                          <a:solidFill>
+                            <a:srgbClr val="36454F"/>
+                          </a:solidFill>
+                          <a:latin typeface="NanumGothic"/>
+                        </a:rPr>
+                        <a:t>v2 streaming run #2 (s=1)</a:t>
+                      </a:r>
+                    </a:p>
+                  </a:txBody>
+                  <a:tcPr>
+                    <a:solidFill>
+                      <a:srgbClr val="FFFFFF"/>
+                    </a:solidFill>
+                  </a:tcPr>
+                </a:tc>
+                <a:tc>
+                  <a:txBody>
+                    <a:bodyPr lIns="54864" rIns="54864"/>
+                    <a:lstStyle/>
+                    <a:p>
+                      <a:pPr algn="ctr"/>
+                      <a:r>
+                        <a:rPr sz="1200">
+                          <a:solidFill>
+                            <a:srgbClr val="36454F"/>
+                          </a:solidFill>
+                          <a:latin typeface="NanumGothic"/>
+                        </a:rPr>
+                        <a:t>9h 32m</a:t>
+                      </a:r>
+                    </a:p>
+                  </a:txBody>
+                  <a:tcPr>
+                    <a:solidFill>
+                      <a:srgbClr val="FFFFFF"/>
+                    </a:solidFill>
+                  </a:tcPr>
+                </a:tc>
+                <a:tc>
+                  <a:txBody>
+                    <a:bodyPr lIns="54864" rIns="54864"/>
+                    <a:lstStyle/>
+                    <a:p>
+                      <a:pPr algn="ctr"/>
+                      <a:r>
+                        <a:rPr sz="1200">
+                          <a:solidFill>
+                            <a:srgbClr val="36454F"/>
+                          </a:solidFill>
+                          <a:latin typeface="NanumGothic"/>
+                        </a:rPr>
+                        <a:t>2 / 10</a:t>
+                      </a:r>
+                    </a:p>
+                  </a:txBody>
+                  <a:tcPr>
+                    <a:solidFill>
+                      <a:srgbClr val="FFFFFF"/>
+                    </a:solidFill>
+                  </a:tcPr>
+                </a:tc>
+                <a:tc>
+                  <a:txBody>
+                    <a:bodyPr lIns="54864" rIns="54864"/>
+                    <a:lstStyle/>
+                    <a:p>
+                      <a:pPr algn="ctr"/>
+                      <a:r>
+                        <a:rPr sz="1200">
+                          <a:solidFill>
+                            <a:srgbClr val="36454F"/>
+                          </a:solidFill>
+                          <a:latin typeface="NanumGothic"/>
+                        </a:rPr>
+                        <a:t>2 / 10</a:t>
+                      </a:r>
+                    </a:p>
+                  </a:txBody>
+                  <a:tcPr>
+                    <a:solidFill>
+                      <a:srgbClr val="FFFFFF"/>
+                    </a:solidFill>
+                  </a:tcPr>
+                </a:tc>
+                <a:tc>
+                  <a:txBody>
+                    <a:bodyPr lIns="54864" rIns="54864"/>
+                    <a:lstStyle/>
+                    <a:p>
+                      <a:pPr algn="ctr"/>
+                      <a:r>
+                        <a:rPr sz="1200">
+                          <a:solidFill>
+                            <a:srgbClr val="36454F"/>
+                          </a:solidFill>
+                          <a:latin typeface="NanumGothic"/>
+                        </a:rPr>
+                        <a:t>4</a:t>
+                      </a:r>
+                    </a:p>
+                  </a:txBody>
+                  <a:tcPr>
+                    <a:solidFill>
+                      <a:srgbClr val="FFFFFF"/>
+                    </a:solidFill>
+                  </a:tcPr>
+                </a:tc>
+                <a:tc>
+                  <a:txBody>
+                    <a:bodyPr lIns="54864" rIns="54864"/>
+                    <a:lstStyle/>
+                    <a:p>
+                      <a:pPr algn="ctr"/>
+                      <a:r>
+                        <a:rPr sz="1200">
+                          <a:solidFill>
+                            <a:srgbClr val="36454F"/>
+                          </a:solidFill>
+                          <a:latin typeface="NanumGothic"/>
+                        </a:rPr>
+                        <a:t>0 pp</a:t>
+                      </a:r>
+                    </a:p>
+                  </a:txBody>
+                  <a:tcPr>
+                    <a:solidFill>
+                      <a:srgbClr val="FFFFFF"/>
+                    </a:solidFill>
+                  </a:tcPr>
+                </a:tc>
+                <a:tc>
+                  <a:txBody>
+                    <a:bodyPr lIns="54864" rIns="54864"/>
+                    <a:lstStyle/>
+                    <a:p>
+                      <a:pPr algn="ctr"/>
+                      <a:r>
+                        <a:rPr sz="1200">
+                          <a:solidFill>
+                            <a:srgbClr val="36454F"/>
+                          </a:solidFill>
+                          <a:latin typeface="NanumGothic"/>
+                        </a:rPr>
+                        <a:t>+4 pp</a:t>
+                      </a:r>
+                    </a:p>
+                  </a:txBody>
+                  <a:tcPr>
+                    <a:solidFill>
+                      <a:srgbClr val="FFFFFF"/>
+                    </a:solidFill>
+                  </a:tcPr>
+                </a:tc>
+              </a:tr>
+              <a:tr h="457200">
+                <a:tc>
+                  <a:txBody>
+                    <a:bodyPr lIns="54864" rIns="54864"/>
+                    <a:lstStyle/>
+                    <a:p>
+                      <a:pPr algn="l"/>
+                      <a:r>
+                        <a:rPr sz="1200">
+                          <a:solidFill>
+                            <a:srgbClr val="36454F"/>
+                          </a:solidFill>
+                          <a:latin typeface="NanumGothic"/>
+                        </a:rPr>
+                        <a:t>v3 first run (s=0)</a:t>
+                      </a:r>
+                    </a:p>
+                  </a:txBody>
+                  <a:tcPr>
+                    <a:solidFill>
+                      <a:srgbClr val="F5F5F5"/>
+                    </a:solidFill>
+                  </a:tcPr>
+                </a:tc>
+                <a:tc>
+                  <a:txBody>
+                    <a:bodyPr lIns="54864" rIns="54864"/>
+                    <a:lstStyle/>
+                    <a:p>
+                      <a:pPr algn="ctr"/>
+                      <a:r>
+                        <a:rPr sz="1200">
+                          <a:solidFill>
+                            <a:srgbClr val="36454F"/>
+                          </a:solidFill>
+                          <a:latin typeface="NanumGothic"/>
+                        </a:rPr>
+                        <a:t>5h</a:t>
+                      </a:r>
+                    </a:p>
+                  </a:txBody>
+                  <a:tcPr>
+                    <a:solidFill>
+                      <a:srgbClr val="F5F5F5"/>
+                    </a:solidFill>
+                  </a:tcPr>
+                </a:tc>
+                <a:tc>
+                  <a:txBody>
+                    <a:bodyPr lIns="54864" rIns="54864"/>
+                    <a:lstStyle/>
+                    <a:p>
+                      <a:pPr algn="ctr"/>
+                      <a:r>
+                        <a:rPr sz="1200">
+                          <a:solidFill>
+                            <a:srgbClr val="36454F"/>
+                          </a:solidFill>
+                          <a:latin typeface="NanumGothic"/>
+                        </a:rPr>
+                        <a:t>4 / 10</a:t>
+                      </a:r>
+                    </a:p>
+                  </a:txBody>
+                  <a:tcPr>
+                    <a:solidFill>
+                      <a:srgbClr val="F5F5F5"/>
+                    </a:solidFill>
+                  </a:tcPr>
+                </a:tc>
+                <a:tc>
+                  <a:txBody>
+                    <a:bodyPr lIns="54864" rIns="54864"/>
+                    <a:lstStyle/>
+                    <a:p>
+                      <a:pPr algn="ctr"/>
+                      <a:r>
+                        <a:rPr sz="1200">
+                          <a:solidFill>
+                            <a:srgbClr val="36454F"/>
+                          </a:solidFill>
+                          <a:latin typeface="NanumGothic"/>
+                        </a:rPr>
+                        <a:t>0 / 10</a:t>
+                      </a:r>
+                    </a:p>
+                  </a:txBody>
+                  <a:tcPr>
+                    <a:solidFill>
+                      <a:srgbClr val="F5F5F5"/>
+                    </a:solidFill>
+                  </a:tcPr>
+                </a:tc>
+                <a:tc>
+                  <a:txBody>
+                    <a:bodyPr lIns="54864" rIns="54864"/>
+                    <a:lstStyle/>
+                    <a:p>
+                      <a:pPr algn="ctr"/>
+                      <a:r>
+                        <a:rPr sz="1200">
+                          <a:solidFill>
+                            <a:srgbClr val="36454F"/>
+                          </a:solidFill>
+                          <a:latin typeface="NanumGothic"/>
+                        </a:rPr>
+                        <a:t>8</a:t>
+                      </a:r>
+                    </a:p>
+                  </a:txBody>
+                  <a:tcPr>
+                    <a:solidFill>
+                      <a:srgbClr val="F5F5F5"/>
+                    </a:solidFill>
+                  </a:tcPr>
+                </a:tc>
+                <a:tc>
+                  <a:txBody>
+                    <a:bodyPr lIns="54864" rIns="54864"/>
+                    <a:lstStyle/>
+                    <a:p>
+                      <a:pPr algn="ctr"/>
+                      <a:r>
+                        <a:rPr sz="1200">
+                          <a:solidFill>
+                            <a:srgbClr val="36454F"/>
+                          </a:solidFill>
+                          <a:latin typeface="NanumGothic"/>
+                        </a:rPr>
+                        <a:t>+6 pp ✓</a:t>
+                      </a:r>
+                    </a:p>
+                  </a:txBody>
+                  <a:tcPr>
+                    <a:solidFill>
+                      <a:srgbClr val="F5F5F5"/>
+                    </a:solidFill>
+                  </a:tcPr>
+                </a:tc>
+                <a:tc>
+                  <a:txBody>
+                    <a:bodyPr lIns="54864" rIns="54864"/>
+                    <a:lstStyle/>
+                    <a:p>
+                      <a:pPr algn="ctr"/>
+                      <a:r>
+                        <a:rPr sz="1200">
+                          <a:solidFill>
+                            <a:srgbClr val="36454F"/>
+                          </a:solidFill>
+                          <a:latin typeface="NanumGothic"/>
+                        </a:rPr>
+                        <a:t>+2 pp</a:t>
+                      </a:r>
+                    </a:p>
+                  </a:txBody>
+                  <a:tcPr>
+                    <a:solidFill>
+                      <a:srgbClr val="F5F5F5"/>
+                    </a:solidFill>
+                  </a:tcPr>
+                </a:tc>
+              </a:tr>
+            </a:tbl>
+          </a:graphicData>
+        </a:graphic>
+      </p:graphicFrame>
+      <p:sp>
+        <p:nvSpPr>
+          <p:cNvPr id="6" name="TextBox 5"/>
           <p:cNvSpPr txBox="1"/>
           <p:nvPr/>
         </p:nvSpPr>
         <p:spPr>
           <a:xfrm>
-            <a:off x="548640" y="1280160"/>
-            <a:ext cx="11064240" cy="5120640"/>
+            <a:off x="548640" y="3383280"/>
+            <a:ext cx="11064240" cy="3108960"/>
           </a:xfrm>
           <a:prstGeom prst="rect">
             <a:avLst/>
@@ -10793,13 +13586,45 @@
               </a:lnSpc>
             </a:pPr>
             <a:r>
-              <a:rPr sz="1400">
+              <a:rPr sz="1300">
+                <a:solidFill>
+                  <a:srgbClr val="2C5F2D"/>
+                </a:solidFill>
+                <a:latin typeface="NanumGothic"/>
+              </a:rPr>
+              <a:t>• v3가 같은 ACCEPT 횟수를 ½ wall에 / INVALID 0 / 더 큰 그래프 (8 ag) 로 산출.</a:t>
+            </a:r>
+          </a:p>
+          <a:p>
+            <a:pPr>
+              <a:lnSpc>
+                <a:spcPct val="130000"/>
+              </a:lnSpc>
+            </a:pPr>
+            <a:r>
+              <a:rPr sz="1300">
+                <a:solidFill>
+                  <a:srgbClr val="2C5F2D"/>
+                </a:solidFill>
+                <a:latin typeface="NanumGothic"/>
+              </a:rPr>
+              <a:t>• Δ vs CoT = +6pp 는 파일럿 전체에서 처음 — 단일 시드 한정 강신호.</a:t>
+            </a:r>
+          </a:p>
+          <a:p>
+            <a:pPr>
+              <a:lnSpc>
+                <a:spcPct val="130000"/>
+              </a:lnSpc>
+            </a:pPr>
+            <a:r>
+              <a:rPr sz="1300">
                 <a:solidFill>
                   <a:srgbClr val="36454F"/>
                 </a:solidFill>
                 <a:latin typeface="NanumGothic"/>
               </a:rPr>
-              <a:t>• §5.2 multi-seed v2 streaming sweep (3 도메인 × 3 시드, MEDIQ seed=1 진행 중).</a:t>
+              <a:t>• Δ vs P-E 는 v3에서 +2pp로 줄었지만, 이는 P-E acc가 50%로 좋게 나온 split 효과 가능.</a:t>
             </a:r>
           </a:p>
           <a:p>
@@ -10809,13 +13634,13 @@
               </a:lnSpc>
             </a:pPr>
             <a:r>
-              <a:rPr sz="1400">
+              <a:rPr sz="1300">
                 <a:solidFill>
                   <a:srgbClr val="36454F"/>
                 </a:solidFill>
                 <a:latin typeface="NanumGothic"/>
               </a:rPr>
-              <a:t>• §5.3 random-persona ablation (v2 persona를 random text로 교체; reviewer 질문 #1).</a:t>
+              <a:t>• Robust 신호: streaming 두 시드 paired Δ vs P-E = +4pp 재현 (run #1·#2).</a:t>
             </a:r>
           </a:p>
           <a:p>
@@ -10825,77 +13650,13 @@
               </a:lnSpc>
             </a:pPr>
             <a:r>
-              <a:rPr sz="1400">
-                <a:solidFill>
-                  <a:srgbClr val="36454F"/>
-                </a:solidFill>
-                <a:latin typeface="NanumGothic"/>
-              </a:rPr>
-              <a:t>• §5.4 harness ablation — controller {none, random, fixed-topo, full}.</a:t>
-            </a:r>
-          </a:p>
-          <a:p>
-            <a:pPr>
-              <a:lnSpc>
-                <a:spcPct val="130000"/>
-              </a:lnSpc>
-            </a:pPr>
-            <a:r>
-              <a:rPr sz="1400">
-                <a:solidFill>
-                  <a:srgbClr val="36454F"/>
-                </a:solidFill>
-                <a:latin typeface="NanumGothic"/>
-              </a:rPr>
-              <a:t>• §5.5 두 번째 backbone (Qwen3-72B + Claude/GPT API).</a:t>
-            </a:r>
-          </a:p>
-          <a:p>
-            <a:pPr>
-              <a:lnSpc>
-                <a:spcPct val="130000"/>
-              </a:lnSpc>
-            </a:pPr>
-            <a:r>
-              <a:rPr sz="1400">
-                <a:solidFill>
-                  <a:srgbClr val="36454F"/>
-                </a:solidFill>
-                <a:latin typeface="NanumGothic"/>
-              </a:rPr>
-              <a:t>• §5.6 LLM-judge 교체 (Claude Haiku 4.5 또는 GPT-4.1-mini).</a:t>
-            </a:r>
-          </a:p>
-          <a:p>
-            <a:pPr>
-              <a:lnSpc>
-                <a:spcPct val="130000"/>
-              </a:lnSpc>
-            </a:pPr>
-            <a:r>
-              <a:rPr sz="1400">
+              <a:rPr sz="1300">
                 <a:solidFill>
                   <a:srgbClr val="B85042"/>
                 </a:solidFill>
                 <a:latin typeface="NanumGothic"/>
               </a:rPr>
-              <a:t>• §5.7 ADAS + (MaAS / Puppeteer / EvoMAC) 직접 baseline — 리뷰어 필수 항목.</a:t>
-            </a:r>
-          </a:p>
-          <a:p>
-            <a:pPr>
-              <a:lnSpc>
-                <a:spcPct val="130000"/>
-              </a:lnSpc>
-            </a:pPr>
-            <a:r>
-              <a:rPr sz="1400">
-                <a:solidFill>
-                  <a:srgbClr val="36454F"/>
-                </a:solidFill>
-                <a:latin typeface="NanumGothic"/>
-              </a:rPr>
-              <a:t>• MAST-style 실패 taxonomy / cost Pareto / judge 보정 실험.</a:t>
+              <a:t>• 미해결: v3는 단일 시드. multi-seed × multi-domain 재현이 venue submission 직전 핵심 작업.</a:t>
             </a:r>
           </a:p>
         </p:txBody>
@@ -10909,6 +13670,153 @@
 </file>
 
 <file path=ppt/slides/slide33.xml><?xml version="1.0" encoding="utf-8"?>
+<p:sld xmlns:a="http://schemas.openxmlformats.org/drawingml/2006/main" xmlns:p="http://schemas.openxmlformats.org/presentationml/2006/main" xmlns:r="http://schemas.openxmlformats.org/officeDocument/2006/relationships">
+  <p:cSld>
+    <p:bg>
+      <p:bgPr>
+        <a:solidFill>
+          <a:srgbClr val="2C5F2D"/>
+        </a:solidFill>
+        <a:effectLst/>
+      </p:bgPr>
+    </p:bg>
+    <p:spTree>
+      <p:nvGrpSpPr>
+        <p:cNvPr id="1" name=""/>
+        <p:cNvGrpSpPr/>
+        <p:nvPr/>
+      </p:nvGrpSpPr>
+      <p:grpSpPr/>
+      <p:sp>
+        <p:nvSpPr>
+          <p:cNvPr id="2" name="Rectangle 1"/>
+          <p:cNvSpPr/>
+          <p:nvPr/>
+        </p:nvSpPr>
+        <p:spPr>
+          <a:xfrm>
+            <a:off x="548640" y="3108960"/>
+            <a:ext cx="228600" cy="822960"/>
+          </a:xfrm>
+          <a:prstGeom prst="rect">
+            <a:avLst/>
+          </a:prstGeom>
+          <a:solidFill>
+            <a:srgbClr val="97BC62"/>
+          </a:solidFill>
+          <a:ln>
+            <a:noFill/>
+          </a:ln>
+        </p:spPr>
+        <p:style>
+          <a:lnRef idx="1">
+            <a:schemeClr val="accent1"/>
+          </a:lnRef>
+          <a:fillRef idx="3">
+            <a:schemeClr val="accent1"/>
+          </a:fillRef>
+          <a:effectRef idx="2">
+            <a:schemeClr val="accent1"/>
+          </a:effectRef>
+          <a:fontRef idx="minor">
+            <a:schemeClr val="lt1"/>
+          </a:fontRef>
+        </p:style>
+        <p:txBody>
+          <a:bodyPr rtlCol="0" anchor="ctr"/>
+          <a:lstStyle/>
+          <a:p>
+            <a:pPr algn="ctr"/>
+          </a:p>
+        </p:txBody>
+      </p:sp>
+      <p:sp>
+        <p:nvSpPr>
+          <p:cNvPr id="3" name="TextBox 2"/>
+          <p:cNvSpPr txBox="1"/>
+          <p:nvPr/>
+        </p:nvSpPr>
+        <p:spPr>
+          <a:xfrm>
+            <a:off x="1005840" y="3017520"/>
+            <a:ext cx="10972800" cy="914400"/>
+          </a:xfrm>
+          <a:prstGeom prst="rect">
+            <a:avLst/>
+          </a:prstGeom>
+          <a:noFill/>
+        </p:spPr>
+        <p:txBody>
+          <a:bodyPr wrap="square" anchor="ctr" lIns="54864" rIns="54864" tIns="36576" bIns="36576">
+            <a:spAutoFit/>
+          </a:bodyPr>
+          <a:lstStyle/>
+          <a:p>
+            <a:pPr algn="l">
+              <a:lnSpc>
+                <a:spcPct val="120000"/>
+              </a:lnSpc>
+            </a:pPr>
+            <a:r>
+              <a:rPr sz="3800" b="1" i="0">
+                <a:solidFill>
+                  <a:srgbClr val="FFFFFF"/>
+                </a:solidFill>
+                <a:latin typeface="NanumGothic"/>
+              </a:rPr>
+              <a:t>8. 분석 (Analysis)</a:t>
+            </a:r>
+          </a:p>
+        </p:txBody>
+      </p:sp>
+      <p:sp>
+        <p:nvSpPr>
+          <p:cNvPr id="4" name="TextBox 3"/>
+          <p:cNvSpPr txBox="1"/>
+          <p:nvPr/>
+        </p:nvSpPr>
+        <p:spPr>
+          <a:xfrm>
+            <a:off x="1005840" y="4023360"/>
+            <a:ext cx="10972800" cy="1280160"/>
+          </a:xfrm>
+          <a:prstGeom prst="rect">
+            <a:avLst/>
+          </a:prstGeom>
+          <a:noFill/>
+        </p:spPr>
+        <p:txBody>
+          <a:bodyPr wrap="square" anchor="t" lIns="54864" rIns="54864" tIns="36576" bIns="36576">
+            <a:spAutoFit/>
+          </a:bodyPr>
+          <a:lstStyle/>
+          <a:p>
+            <a:pPr algn="l">
+              <a:lnSpc>
+                <a:spcPct val="120000"/>
+              </a:lnSpc>
+            </a:pPr>
+            <a:r>
+              <a:rPr sz="1600" b="0" i="1">
+                <a:solidFill>
+                  <a:srgbClr val="CFD3D7"/>
+                </a:solidFill>
+                <a:latin typeface="NanumGothic"/>
+              </a:rPr>
+              <a:t>측정 노이즈 · 토큰 비용 · 실패 모드</a:t>
+            </a:r>
+          </a:p>
+        </p:txBody>
+      </p:sp>
+    </p:spTree>
+  </p:cSld>
+  <p:clrMapOvr>
+    <a:masterClrMapping/>
+  </p:clrMapOvr>
+</p:sld>
+</file>
+
+<file path=ppt/slides/slide34.xml><?xml version="1.0" encoding="utf-8"?>
 <p:sld xmlns:a="http://schemas.openxmlformats.org/drawingml/2006/main" xmlns:p="http://schemas.openxmlformats.org/presentationml/2006/main" xmlns:r="http://schemas.openxmlformats.org/officeDocument/2006/relationships">
   <p:cSld>
     <p:bg>
@@ -11003,7 +13911,7 @@
                 </a:solidFill>
                 <a:latin typeface="NanumGothic"/>
               </a:rPr>
-              <a:t>결론</a:t>
+              <a:t>분석</a:t>
             </a:r>
           </a:p>
         </p:txBody>
@@ -11042,7 +13950,7 @@
                 </a:solidFill>
                 <a:latin typeface="NanumGothic"/>
               </a:rPr>
-              <a:t>10. 결론 (Conclusion)</a:t>
+              <a:t>8.1 측정 노이즈 — paired-batch / full-pass 어떻게 다루나</a:t>
             </a:r>
           </a:p>
         </p:txBody>
@@ -11075,13 +13983,45 @@
               </a:lnSpc>
             </a:pPr>
             <a:r>
-              <a:rPr sz="1500">
+              <a:rPr sz="1300">
+                <a:solidFill>
+                  <a:srgbClr val="36454F"/>
+                </a:solidFill>
+                <a:latin typeface="NanumGothic"/>
+              </a:rPr>
+              <a:t>• Same-graph cross-run 노이즈 ±13 pp (FinanceBench v2 retry, MEDIQ run #1→#2 22pp 변동).</a:t>
+            </a:r>
+          </a:p>
+          <a:p>
+            <a:pPr>
+              <a:lnSpc>
+                <a:spcPct val="130000"/>
+              </a:lnSpc>
+            </a:pPr>
+            <a:r>
+              <a:rPr sz="1300">
+                <a:solidFill>
+                  <a:srgbClr val="36454F"/>
+                </a:solidFill>
+                <a:latin typeface="NanumGothic"/>
+              </a:rPr>
+              <a:t>• Legacy mode는 cross-batch 비교 → 작은 architectural Δ가 노이즈에 휩쓸려 reject.</a:t>
+            </a:r>
+          </a:p>
+          <a:p>
+            <a:pPr>
+              <a:lnSpc>
+                <a:spcPct val="130000"/>
+              </a:lnSpc>
+            </a:pPr>
+            <a:r>
+              <a:rPr sz="1300">
                 <a:solidFill>
                   <a:srgbClr val="2C5F2D"/>
                 </a:solidFill>
                 <a:latin typeface="NanumGothic"/>
               </a:rPr>
-              <a:t>• Reflection-only 멀티-에이전트 진화는 *그래프를 움직이게* 만든다 — v2 컨트롤러는 도메인 어휘를 가진 specialist persona를 출력한다.</a:t>
+              <a:t>• Streaming paired-batch는 best vs candidate를 SAME batch로 평가해 cancel — 1/9 → 4/10 ACCEPT, 두 시드 paired Δ vs P-E = +4pp 재현.</a:t>
             </a:r>
           </a:p>
           <a:p>
@@ -11091,13 +14031,13 @@
               </a:lnSpc>
             </a:pPr>
             <a:r>
-              <a:rPr sz="1500">
+              <a:rPr sz="1300">
                 <a:solidFill>
                   <a:srgbClr val="B85042"/>
                 </a:solidFill>
                 <a:latin typeface="NanumGothic"/>
               </a:rPr>
-              <a:t>• 그러나 n=30 단일 시드 측정에서는 baseline을 이기지 못한다 — 노이즈가 architectural 효과를 가린다.</a:t>
+              <a:t>• 그러나 streaming은 absolute acc가 bootstrap 분포에 의존 → cross-batch best_val_acc 비신뢰.</a:t>
             </a:r>
           </a:p>
           <a:p>
@@ -11107,13 +14047,13 @@
               </a:lnSpc>
             </a:pPr>
             <a:r>
-              <a:rPr sz="1500">
+              <a:rPr sz="1300">
                 <a:solidFill>
                   <a:srgbClr val="2C5F2D"/>
                 </a:solidFill>
                 <a:latin typeface="NanumGothic"/>
               </a:rPr>
-              <a:t>• Streaming paired-batch evolve는 노이즈 floor 문제를 부분적으로 해결한다 — paired ACCEPT 비율 1/9 → 4/10. 본 연구의 가장 강한 차별점.</a:t>
+              <a:t>• v3 full-pass는 동일한 30 train task 위에서 strict 비교 가능 — MEDIQ s=0에서 INVALID 0 / 4 ACCEPT 산출.</a:t>
             </a:r>
           </a:p>
           <a:p>
@@ -11123,13 +14063,13 @@
               </a:lnSpc>
             </a:pPr>
             <a:r>
-              <a:rPr sz="1500">
+              <a:rPr sz="1300">
                 <a:solidFill>
                   <a:srgbClr val="36454F"/>
                 </a:solidFill>
                 <a:latin typeface="NanumGothic"/>
               </a:rPr>
-              <a:t>• 출판 가능한 신호: paired-accept activity. 약점은 논문에서 정직하게 명시. 다음 단계는 다중 시드 / 두 번째 백본 / ADAS 직접 비교.</a:t>
+              <a:t>• Robust 신호 ranking: paired Δ vs P-E = +4pp (두 시드) &gt; v3 +6pp vs CoT (단일 시드).</a:t>
             </a:r>
           </a:p>
         </p:txBody>
@@ -11142,7 +14082,257 @@
 </p:sld>
 </file>
 
-<file path=ppt/slides/slide34.xml><?xml version="1.0" encoding="utf-8"?>
+<file path=ppt/slides/slide35.xml><?xml version="1.0" encoding="utf-8"?>
+<p:sld xmlns:a="http://schemas.openxmlformats.org/drawingml/2006/main" xmlns:p="http://schemas.openxmlformats.org/presentationml/2006/main" xmlns:r="http://schemas.openxmlformats.org/officeDocument/2006/relationships">
+  <p:cSld>
+    <p:bg>
+      <p:bgPr>
+        <a:solidFill>
+          <a:srgbClr val="F5F5F5"/>
+        </a:solidFill>
+        <a:effectLst/>
+      </p:bgPr>
+    </p:bg>
+    <p:spTree>
+      <p:nvGrpSpPr>
+        <p:cNvPr id="1" name=""/>
+        <p:cNvGrpSpPr/>
+        <p:nvPr/>
+      </p:nvGrpSpPr>
+      <p:grpSpPr/>
+      <p:sp>
+        <p:nvSpPr>
+          <p:cNvPr id="2" name="Rectangle 1"/>
+          <p:cNvSpPr/>
+          <p:nvPr/>
+        </p:nvSpPr>
+        <p:spPr>
+          <a:xfrm>
+            <a:off x="0" y="0"/>
+            <a:ext cx="12191695" cy="164592"/>
+          </a:xfrm>
+          <a:prstGeom prst="rect">
+            <a:avLst/>
+          </a:prstGeom>
+          <a:solidFill>
+            <a:srgbClr val="2C5F2D"/>
+          </a:solidFill>
+          <a:ln>
+            <a:noFill/>
+          </a:ln>
+        </p:spPr>
+        <p:style>
+          <a:lnRef idx="1">
+            <a:schemeClr val="accent1"/>
+          </a:lnRef>
+          <a:fillRef idx="3">
+            <a:schemeClr val="accent1"/>
+          </a:fillRef>
+          <a:effectRef idx="2">
+            <a:schemeClr val="accent1"/>
+          </a:effectRef>
+          <a:fontRef idx="minor">
+            <a:schemeClr val="lt1"/>
+          </a:fontRef>
+        </p:style>
+        <p:txBody>
+          <a:bodyPr rtlCol="0" anchor="ctr"/>
+          <a:lstStyle/>
+          <a:p>
+            <a:pPr algn="ctr"/>
+          </a:p>
+        </p:txBody>
+      </p:sp>
+      <p:sp>
+        <p:nvSpPr>
+          <p:cNvPr id="3" name="TextBox 2"/>
+          <p:cNvSpPr txBox="1"/>
+          <p:nvPr/>
+        </p:nvSpPr>
+        <p:spPr>
+          <a:xfrm>
+            <a:off x="548640" y="246888"/>
+            <a:ext cx="10972800" cy="292608"/>
+          </a:xfrm>
+          <a:prstGeom prst="rect">
+            <a:avLst/>
+          </a:prstGeom>
+          <a:noFill/>
+        </p:spPr>
+        <p:txBody>
+          <a:bodyPr wrap="square" anchor="t" lIns="54864" rIns="54864" tIns="36576" bIns="36576">
+            <a:spAutoFit/>
+          </a:bodyPr>
+          <a:lstStyle/>
+          <a:p>
+            <a:pPr algn="l">
+              <a:lnSpc>
+                <a:spcPct val="120000"/>
+              </a:lnSpc>
+            </a:pPr>
+            <a:r>
+              <a:rPr sz="1100" b="1" i="0">
+                <a:solidFill>
+                  <a:srgbClr val="97BC62"/>
+                </a:solidFill>
+                <a:latin typeface="NanumGothic"/>
+              </a:rPr>
+              <a:t>분석</a:t>
+            </a:r>
+          </a:p>
+        </p:txBody>
+      </p:sp>
+      <p:sp>
+        <p:nvSpPr>
+          <p:cNvPr id="4" name="TextBox 3"/>
+          <p:cNvSpPr txBox="1"/>
+          <p:nvPr/>
+        </p:nvSpPr>
+        <p:spPr>
+          <a:xfrm>
+            <a:off x="548640" y="502920"/>
+            <a:ext cx="11064240" cy="822960"/>
+          </a:xfrm>
+          <a:prstGeom prst="rect">
+            <a:avLst/>
+          </a:prstGeom>
+          <a:noFill/>
+        </p:spPr>
+        <p:txBody>
+          <a:bodyPr wrap="square" anchor="ctr" lIns="54864" rIns="54864" tIns="36576" bIns="36576">
+            <a:spAutoFit/>
+          </a:bodyPr>
+          <a:lstStyle/>
+          <a:p>
+            <a:pPr algn="l">
+              <a:lnSpc>
+                <a:spcPct val="120000"/>
+              </a:lnSpc>
+            </a:pPr>
+            <a:r>
+              <a:rPr sz="3000" b="1" i="0">
+                <a:solidFill>
+                  <a:srgbClr val="36454F"/>
+                </a:solidFill>
+                <a:latin typeface="NanumGothic"/>
+              </a:rPr>
+              <a:t>8.2 토큰 비용과 실패 모드 (3 모드 종합)</a:t>
+            </a:r>
+          </a:p>
+        </p:txBody>
+      </p:sp>
+      <p:sp>
+        <p:nvSpPr>
+          <p:cNvPr id="5" name="TextBox 4"/>
+          <p:cNvSpPr txBox="1"/>
+          <p:nvPr/>
+        </p:nvSpPr>
+        <p:spPr>
+          <a:xfrm>
+            <a:off x="548640" y="1280160"/>
+            <a:ext cx="11064240" cy="5120640"/>
+          </a:xfrm>
+          <a:prstGeom prst="rect">
+            <a:avLst/>
+          </a:prstGeom>
+          <a:noFill/>
+        </p:spPr>
+        <p:txBody>
+          <a:bodyPr wrap="square" lIns="54864" rIns="54864" tIns="36576" bIns="36576">
+            <a:spAutoFit/>
+          </a:bodyPr>
+          <a:lstStyle/>
+          <a:p>
+            <a:pPr>
+              <a:lnSpc>
+                <a:spcPct val="130000"/>
+              </a:lnSpc>
+            </a:pPr>
+            <a:r>
+              <a:rPr sz="1200">
+                <a:solidFill>
+                  <a:srgbClr val="36454F"/>
+                </a:solidFill>
+                <a:latin typeface="NanumGothic"/>
+              </a:rPr>
+              <a:t>• Worker 토큰이 controller 토큰 대비 ~55× (streaming run #1: 4.03M : 73.7k).</a:t>
+            </a:r>
+          </a:p>
+          <a:p>
+            <a:pPr>
+              <a:lnSpc>
+                <a:spcPct val="130000"/>
+              </a:lnSpc>
+            </a:pPr>
+            <a:r>
+              <a:rPr sz="1200">
+                <a:solidFill>
+                  <a:srgbClr val="2C5F2D"/>
+                </a:solidFill>
+                <a:latin typeface="NanumGothic"/>
+              </a:rPr>
+              <a:t>• v3은 [QUERY] fire 시 노드당 1 → 3 LLM 호출 → worker 비용 평균 1.5-2× 증가, 그러나 INVALID 0 으로 wall efficiency는 streaming의 ½.</a:t>
+            </a:r>
+          </a:p>
+          <a:p>
+            <a:pPr>
+              <a:lnSpc>
+                <a:spcPct val="130000"/>
+              </a:lnSpc>
+            </a:pPr>
+            <a:r>
+              <a:rPr sz="1200">
+                <a:solidFill>
+                  <a:srgbClr val="B85042"/>
+                </a:solidFill>
+                <a:latin typeface="NanumGothic"/>
+              </a:rPr>
+              <a:t>• 실패 모드 (v2 run #1·#2 종합): cap binding (6 round), orphan prune (4 round), concept-level repeat (rounds 5-10).</a:t>
+            </a:r>
+          </a:p>
+          <a:p>
+            <a:pPr>
+              <a:lnSpc>
+                <a:spcPct val="130000"/>
+              </a:lnSpc>
+            </a:pPr>
+            <a:r>
+              <a:rPr sz="1200">
+                <a:solidFill>
+                  <a:srgbClr val="2C5F2D"/>
+                </a:solidFill>
+                <a:latin typeface="NanumGothic"/>
+              </a:rPr>
+              <a:t>• v3 해결: (1) max_agents prompt + apply_edits HARD plumbing, (2) orphan auto-drop, (3) concept-level repeat은 여전히 soft → orchestration-layer hard enforcement는 향후.</a:t>
+            </a:r>
+          </a:p>
+          <a:p>
+            <a:pPr>
+              <a:lnSpc>
+                <a:spcPct val="130000"/>
+              </a:lnSpc>
+            </a:pPr>
+            <a:r>
+              <a:rPr sz="1200">
+                <a:solidFill>
+                  <a:srgbClr val="36454F"/>
+                </a:solidFill>
+                <a:latin typeface="NanumGothic"/>
+              </a:rPr>
+              <a:t>• Cost-Pareto: v3 (52% @ 3.28k tokens) vs CoT (46% @ 0.55k); 6× 토큰에 +6pp — tokens-for-acc 트레이드오프는 도메인별로 검증 필요.</a:t>
+            </a:r>
+          </a:p>
+        </p:txBody>
+      </p:sp>
+    </p:spTree>
+  </p:cSld>
+  <p:clrMapOvr>
+    <a:masterClrMapping/>
+  </p:clrMapOvr>
+</p:sld>
+</file>
+
+<file path=ppt/slides/slide36.xml><?xml version="1.0" encoding="utf-8"?>
 <p:sld xmlns:a="http://schemas.openxmlformats.org/drawingml/2006/main" xmlns:p="http://schemas.openxmlformats.org/presentationml/2006/main" xmlns:r="http://schemas.openxmlformats.org/officeDocument/2006/relationships">
   <p:cSld>
     <p:bg>
@@ -11162,14 +14352,57 @@
       <p:grpSpPr/>
       <p:sp>
         <p:nvSpPr>
-          <p:cNvPr id="2" name="TextBox 1"/>
+          <p:cNvPr id="2" name="Rectangle 1"/>
+          <p:cNvSpPr/>
+          <p:nvPr/>
+        </p:nvSpPr>
+        <p:spPr>
+          <a:xfrm>
+            <a:off x="548640" y="3108960"/>
+            <a:ext cx="228600" cy="822960"/>
+          </a:xfrm>
+          <a:prstGeom prst="rect">
+            <a:avLst/>
+          </a:prstGeom>
+          <a:solidFill>
+            <a:srgbClr val="97BC62"/>
+          </a:solidFill>
+          <a:ln>
+            <a:noFill/>
+          </a:ln>
+        </p:spPr>
+        <p:style>
+          <a:lnRef idx="1">
+            <a:schemeClr val="accent1"/>
+          </a:lnRef>
+          <a:fillRef idx="3">
+            <a:schemeClr val="accent1"/>
+          </a:fillRef>
+          <a:effectRef idx="2">
+            <a:schemeClr val="accent1"/>
+          </a:effectRef>
+          <a:fontRef idx="minor">
+            <a:schemeClr val="lt1"/>
+          </a:fontRef>
+        </p:style>
+        <p:txBody>
+          <a:bodyPr rtlCol="0" anchor="ctr"/>
+          <a:lstStyle/>
+          <a:p>
+            <a:pPr algn="ctr"/>
+          </a:p>
+        </p:txBody>
+      </p:sp>
+      <p:sp>
+        <p:nvSpPr>
+          <p:cNvPr id="3" name="TextBox 2"/>
           <p:cNvSpPr txBox="1"/>
           <p:nvPr/>
         </p:nvSpPr>
         <p:spPr>
           <a:xfrm>
-            <a:off x="548640" y="2377440"/>
-            <a:ext cx="11064240" cy="1188720"/>
+            <a:off x="1005840" y="3017520"/>
+            <a:ext cx="10972800" cy="914400"/>
           </a:xfrm>
           <a:prstGeom prst="rect">
             <a:avLst/>
@@ -11182,33 +14415,33 @@
           </a:bodyPr>
           <a:lstStyle/>
           <a:p>
-            <a:pPr algn="ctr">
+            <a:pPr algn="l">
               <a:lnSpc>
                 <a:spcPct val="120000"/>
               </a:lnSpc>
             </a:pPr>
             <a:r>
-              <a:rPr sz="4600" b="1" i="0">
+              <a:rPr sz="3800" b="1" i="0">
                 <a:solidFill>
                   <a:srgbClr val="FFFFFF"/>
                 </a:solidFill>
                 <a:latin typeface="NanumGothic"/>
               </a:rPr>
-              <a:t>감사합니다 — 질의응답</a:t>
-            </a:r>
-          </a:p>
-        </p:txBody>
-      </p:sp>
-      <p:sp>
-        <p:nvSpPr>
-          <p:cNvPr id="3" name="TextBox 2"/>
+              <a:t>9. 한계 및 향후 작업</a:t>
+            </a:r>
+          </a:p>
+        </p:txBody>
+      </p:sp>
+      <p:sp>
+        <p:nvSpPr>
+          <p:cNvPr id="4" name="TextBox 3"/>
           <p:cNvSpPr txBox="1"/>
           <p:nvPr/>
         </p:nvSpPr>
         <p:spPr>
           <a:xfrm>
-            <a:off x="548640" y="3749039"/>
-            <a:ext cx="11064240" cy="1463040"/>
+            <a:off x="1005840" y="4023360"/>
+            <a:ext cx="10972800" cy="1280160"/>
           </a:xfrm>
           <a:prstGeom prst="rect">
             <a:avLst/>
@@ -11221,19 +14454,849 @@
           </a:bodyPr>
           <a:lstStyle/>
           <a:p>
-            <a:pPr algn="ctr">
+            <a:pPr algn="l">
               <a:lnSpc>
                 <a:spcPct val="120000"/>
               </a:lnSpc>
             </a:pPr>
             <a:r>
-              <a:rPr sz="1800" b="0" i="0">
+              <a:rPr sz="1600" b="0" i="1">
                 <a:solidFill>
                   <a:srgbClr val="CFD3D7"/>
                 </a:solidFill>
                 <a:latin typeface="NanumGothic"/>
               </a:rPr>
-              <a:t>코드 + 결과: github.com/namam3gy · 로드맵: references/roadmap_ko.md</a:t>
+              <a:t>정직한 자기 평가</a:t>
+            </a:r>
+          </a:p>
+        </p:txBody>
+      </p:sp>
+    </p:spTree>
+  </p:cSld>
+  <p:clrMapOvr>
+    <a:masterClrMapping/>
+  </p:clrMapOvr>
+</p:sld>
+</file>
+
+<file path=ppt/slides/slide37.xml><?xml version="1.0" encoding="utf-8"?>
+<p:sld xmlns:a="http://schemas.openxmlformats.org/drawingml/2006/main" xmlns:p="http://schemas.openxmlformats.org/presentationml/2006/main" xmlns:r="http://schemas.openxmlformats.org/officeDocument/2006/relationships">
+  <p:cSld>
+    <p:bg>
+      <p:bgPr>
+        <a:solidFill>
+          <a:srgbClr val="F5F5F5"/>
+        </a:solidFill>
+        <a:effectLst/>
+      </p:bgPr>
+    </p:bg>
+    <p:spTree>
+      <p:nvGrpSpPr>
+        <p:cNvPr id="1" name=""/>
+        <p:cNvGrpSpPr/>
+        <p:nvPr/>
+      </p:nvGrpSpPr>
+      <p:grpSpPr/>
+      <p:sp>
+        <p:nvSpPr>
+          <p:cNvPr id="2" name="Rectangle 1"/>
+          <p:cNvSpPr/>
+          <p:nvPr/>
+        </p:nvSpPr>
+        <p:spPr>
+          <a:xfrm>
+            <a:off x="0" y="0"/>
+            <a:ext cx="12191695" cy="164592"/>
+          </a:xfrm>
+          <a:prstGeom prst="rect">
+            <a:avLst/>
+          </a:prstGeom>
+          <a:solidFill>
+            <a:srgbClr val="2C5F2D"/>
+          </a:solidFill>
+          <a:ln>
+            <a:noFill/>
+          </a:ln>
+        </p:spPr>
+        <p:style>
+          <a:lnRef idx="1">
+            <a:schemeClr val="accent1"/>
+          </a:lnRef>
+          <a:fillRef idx="3">
+            <a:schemeClr val="accent1"/>
+          </a:fillRef>
+          <a:effectRef idx="2">
+            <a:schemeClr val="accent1"/>
+          </a:effectRef>
+          <a:fontRef idx="minor">
+            <a:schemeClr val="lt1"/>
+          </a:fontRef>
+        </p:style>
+        <p:txBody>
+          <a:bodyPr rtlCol="0" anchor="ctr"/>
+          <a:lstStyle/>
+          <a:p>
+            <a:pPr algn="ctr"/>
+          </a:p>
+        </p:txBody>
+      </p:sp>
+      <p:sp>
+        <p:nvSpPr>
+          <p:cNvPr id="3" name="TextBox 2"/>
+          <p:cNvSpPr txBox="1"/>
+          <p:nvPr/>
+        </p:nvSpPr>
+        <p:spPr>
+          <a:xfrm>
+            <a:off x="548640" y="246888"/>
+            <a:ext cx="10972800" cy="292608"/>
+          </a:xfrm>
+          <a:prstGeom prst="rect">
+            <a:avLst/>
+          </a:prstGeom>
+          <a:noFill/>
+        </p:spPr>
+        <p:txBody>
+          <a:bodyPr wrap="square" anchor="t" lIns="54864" rIns="54864" tIns="36576" bIns="36576">
+            <a:spAutoFit/>
+          </a:bodyPr>
+          <a:lstStyle/>
+          <a:p>
+            <a:pPr algn="l">
+              <a:lnSpc>
+                <a:spcPct val="120000"/>
+              </a:lnSpc>
+            </a:pPr>
+            <a:r>
+              <a:rPr sz="1100" b="1" i="0">
+                <a:solidFill>
+                  <a:srgbClr val="97BC62"/>
+                </a:solidFill>
+                <a:latin typeface="NanumGothic"/>
+              </a:rPr>
+              <a:t>한계</a:t>
+            </a:r>
+          </a:p>
+        </p:txBody>
+      </p:sp>
+      <p:sp>
+        <p:nvSpPr>
+          <p:cNvPr id="4" name="TextBox 3"/>
+          <p:cNvSpPr txBox="1"/>
+          <p:nvPr/>
+        </p:nvSpPr>
+        <p:spPr>
+          <a:xfrm>
+            <a:off x="548640" y="502920"/>
+            <a:ext cx="11064240" cy="822960"/>
+          </a:xfrm>
+          <a:prstGeom prst="rect">
+            <a:avLst/>
+          </a:prstGeom>
+          <a:noFill/>
+        </p:spPr>
+        <p:txBody>
+          <a:bodyPr wrap="square" anchor="ctr" lIns="54864" rIns="54864" tIns="36576" bIns="36576">
+            <a:spAutoFit/>
+          </a:bodyPr>
+          <a:lstStyle/>
+          <a:p>
+            <a:pPr algn="l">
+              <a:lnSpc>
+                <a:spcPct val="120000"/>
+              </a:lnSpc>
+            </a:pPr>
+            <a:r>
+              <a:rPr sz="3000" b="1" i="0">
+                <a:solidFill>
+                  <a:srgbClr val="36454F"/>
+                </a:solidFill>
+                <a:latin typeface="NanumGothic"/>
+              </a:rPr>
+              <a:t>9.1 한계 (Limitations) — v3 반영</a:t>
+            </a:r>
+          </a:p>
+        </p:txBody>
+      </p:sp>
+      <p:sp>
+        <p:nvSpPr>
+          <p:cNvPr id="5" name="TextBox 4"/>
+          <p:cNvSpPr txBox="1"/>
+          <p:nvPr/>
+        </p:nvSpPr>
+        <p:spPr>
+          <a:xfrm>
+            <a:off x="548640" y="1280160"/>
+            <a:ext cx="11064240" cy="5120640"/>
+          </a:xfrm>
+          <a:prstGeom prst="rect">
+            <a:avLst/>
+          </a:prstGeom>
+          <a:noFill/>
+        </p:spPr>
+        <p:txBody>
+          <a:bodyPr wrap="square" lIns="54864" rIns="54864" tIns="36576" bIns="36576">
+            <a:spAutoFit/>
+          </a:bodyPr>
+          <a:lstStyle/>
+          <a:p>
+            <a:pPr>
+              <a:lnSpc>
+                <a:spcPct val="130000"/>
+              </a:lnSpc>
+            </a:pPr>
+            <a:r>
+              <a:rPr sz="1300">
+                <a:solidFill>
+                  <a:srgbClr val="B85042"/>
+                </a:solidFill>
+                <a:latin typeface="NanumGothic"/>
+              </a:rPr>
+              <a:t>• v3 +6pp vs CoT 는 *단일 시드 단일 도메인* (MEDIQ s=0) — multi-seed × multi-domain 재현 미완.</a:t>
+            </a:r>
+          </a:p>
+          <a:p>
+            <a:pPr>
+              <a:lnSpc>
+                <a:spcPct val="130000"/>
+              </a:lnSpc>
+            </a:pPr>
+            <a:r>
+              <a:rPr sz="1300">
+                <a:solidFill>
+                  <a:srgbClr val="B85042"/>
+                </a:solidFill>
+                <a:latin typeface="NanumGothic"/>
+              </a:rPr>
+              <a:t>• ±13 pp 노이즈 floor 가 v3에서도 여전 (run-to-run absolute 22pp 변동 관찰됨).</a:t>
+            </a:r>
+          </a:p>
+          <a:p>
+            <a:pPr>
+              <a:lnSpc>
+                <a:spcPct val="130000"/>
+              </a:lnSpc>
+            </a:pPr>
+            <a:r>
+              <a:rPr sz="1300">
+                <a:solidFill>
+                  <a:srgbClr val="B85042"/>
+                </a:solidFill>
+                <a:latin typeface="NanumGothic"/>
+              </a:rPr>
+              <a:t>• LLM-judge가 same-family Qwen → self-bias 위험 (FinanceBench, AgentClinic).</a:t>
+            </a:r>
+          </a:p>
+          <a:p>
+            <a:pPr>
+              <a:lnSpc>
+                <a:spcPct val="130000"/>
+              </a:lnSpc>
+            </a:pPr>
+            <a:r>
+              <a:rPr sz="1300">
+                <a:solidFill>
+                  <a:srgbClr val="B85042"/>
+                </a:solidFill>
+                <a:latin typeface="NanumGothic"/>
+              </a:rPr>
+              <a:t>• 단일 backbone (Qwen2.5-32B), 단일 judge.</a:t>
+            </a:r>
+          </a:p>
+          <a:p>
+            <a:pPr>
+              <a:lnSpc>
+                <a:spcPct val="130000"/>
+              </a:lnSpc>
+            </a:pPr>
+            <a:r>
+              <a:rPr sz="1300">
+                <a:solidFill>
+                  <a:srgbClr val="B85042"/>
+                </a:solidFill>
+                <a:latin typeface="NanumGothic"/>
+              </a:rPr>
+              <a:t>• v3 wall 5h × seed × domain → 3×3 sweep ~45h (streaming 의 ½, 그러나 여전히 multi-day).</a:t>
+            </a:r>
+          </a:p>
+          <a:p>
+            <a:pPr>
+              <a:lnSpc>
+                <a:spcPct val="130000"/>
+              </a:lnSpc>
+            </a:pPr>
+            <a:r>
+              <a:rPr sz="1300">
+                <a:solidFill>
+                  <a:srgbClr val="B85042"/>
+                </a:solidFill>
+                <a:latin typeface="NanumGothic"/>
+              </a:rPr>
+              <a:t>• ADAS / MaAS / Puppeteer 직접 비교 미실시 — reviewer 첫 질문이 될 항목.</a:t>
+            </a:r>
+          </a:p>
+          <a:p>
+            <a:pPr>
+              <a:lnSpc>
+                <a:spcPct val="130000"/>
+              </a:lnSpc>
+            </a:pPr>
+            <a:r>
+              <a:rPr sz="1300">
+                <a:solidFill>
+                  <a:srgbClr val="B85042"/>
+                </a:solidFill>
+                <a:latin typeface="NanumGothic"/>
+              </a:rPr>
+              <a:t>• Concept-level anti-repeat이 v3에서도 prompt-only soft — orch-layer hard enforcement 필요.</a:t>
+            </a:r>
+          </a:p>
+          <a:p>
+            <a:pPr>
+              <a:lnSpc>
+                <a:spcPct val="130000"/>
+              </a:lnSpc>
+            </a:pPr>
+            <a:r>
+              <a:rPr sz="1300">
+                <a:solidFill>
+                  <a:srgbClr val="B85042"/>
+                </a:solidFill>
+                <a:latin typeface="NanumGothic"/>
+              </a:rPr>
+              <a:t>• [QUERY] fire-rate / parse-rate / 효과 측정 미완 — v3 component-level ablation의 input.</a:t>
+            </a:r>
+          </a:p>
+        </p:txBody>
+      </p:sp>
+    </p:spTree>
+  </p:cSld>
+  <p:clrMapOvr>
+    <a:masterClrMapping/>
+  </p:clrMapOvr>
+</p:sld>
+</file>
+
+<file path=ppt/slides/slide38.xml><?xml version="1.0" encoding="utf-8"?>
+<p:sld xmlns:a="http://schemas.openxmlformats.org/drawingml/2006/main" xmlns:p="http://schemas.openxmlformats.org/presentationml/2006/main" xmlns:r="http://schemas.openxmlformats.org/officeDocument/2006/relationships">
+  <p:cSld>
+    <p:bg>
+      <p:bgPr>
+        <a:solidFill>
+          <a:srgbClr val="F5F5F5"/>
+        </a:solidFill>
+        <a:effectLst/>
+      </p:bgPr>
+    </p:bg>
+    <p:spTree>
+      <p:nvGrpSpPr>
+        <p:cNvPr id="1" name=""/>
+        <p:cNvGrpSpPr/>
+        <p:nvPr/>
+      </p:nvGrpSpPr>
+      <p:grpSpPr/>
+      <p:sp>
+        <p:nvSpPr>
+          <p:cNvPr id="2" name="Rectangle 1"/>
+          <p:cNvSpPr/>
+          <p:nvPr/>
+        </p:nvSpPr>
+        <p:spPr>
+          <a:xfrm>
+            <a:off x="0" y="0"/>
+            <a:ext cx="12191695" cy="164592"/>
+          </a:xfrm>
+          <a:prstGeom prst="rect">
+            <a:avLst/>
+          </a:prstGeom>
+          <a:solidFill>
+            <a:srgbClr val="2C5F2D"/>
+          </a:solidFill>
+          <a:ln>
+            <a:noFill/>
+          </a:ln>
+        </p:spPr>
+        <p:style>
+          <a:lnRef idx="1">
+            <a:schemeClr val="accent1"/>
+          </a:lnRef>
+          <a:fillRef idx="3">
+            <a:schemeClr val="accent1"/>
+          </a:fillRef>
+          <a:effectRef idx="2">
+            <a:schemeClr val="accent1"/>
+          </a:effectRef>
+          <a:fontRef idx="minor">
+            <a:schemeClr val="lt1"/>
+          </a:fontRef>
+        </p:style>
+        <p:txBody>
+          <a:bodyPr rtlCol="0" anchor="ctr"/>
+          <a:lstStyle/>
+          <a:p>
+            <a:pPr algn="ctr"/>
+          </a:p>
+        </p:txBody>
+      </p:sp>
+      <p:sp>
+        <p:nvSpPr>
+          <p:cNvPr id="3" name="TextBox 2"/>
+          <p:cNvSpPr txBox="1"/>
+          <p:nvPr/>
+        </p:nvSpPr>
+        <p:spPr>
+          <a:xfrm>
+            <a:off x="548640" y="246888"/>
+            <a:ext cx="10972800" cy="292608"/>
+          </a:xfrm>
+          <a:prstGeom prst="rect">
+            <a:avLst/>
+          </a:prstGeom>
+          <a:noFill/>
+        </p:spPr>
+        <p:txBody>
+          <a:bodyPr wrap="square" anchor="t" lIns="54864" rIns="54864" tIns="36576" bIns="36576">
+            <a:spAutoFit/>
+          </a:bodyPr>
+          <a:lstStyle/>
+          <a:p>
+            <a:pPr algn="l">
+              <a:lnSpc>
+                <a:spcPct val="120000"/>
+              </a:lnSpc>
+            </a:pPr>
+            <a:r>
+              <a:rPr sz="1100" b="1" i="0">
+                <a:solidFill>
+                  <a:srgbClr val="97BC62"/>
+                </a:solidFill>
+                <a:latin typeface="NanumGothic"/>
+              </a:rPr>
+              <a:t>향후 작업</a:t>
+            </a:r>
+          </a:p>
+        </p:txBody>
+      </p:sp>
+      <p:sp>
+        <p:nvSpPr>
+          <p:cNvPr id="4" name="TextBox 3"/>
+          <p:cNvSpPr txBox="1"/>
+          <p:nvPr/>
+        </p:nvSpPr>
+        <p:spPr>
+          <a:xfrm>
+            <a:off x="548640" y="502920"/>
+            <a:ext cx="11064240" cy="822960"/>
+          </a:xfrm>
+          <a:prstGeom prst="rect">
+            <a:avLst/>
+          </a:prstGeom>
+          <a:noFill/>
+        </p:spPr>
+        <p:txBody>
+          <a:bodyPr wrap="square" anchor="ctr" lIns="54864" rIns="54864" tIns="36576" bIns="36576">
+            <a:spAutoFit/>
+          </a:bodyPr>
+          <a:lstStyle/>
+          <a:p>
+            <a:pPr algn="l">
+              <a:lnSpc>
+                <a:spcPct val="120000"/>
+              </a:lnSpc>
+            </a:pPr>
+            <a:r>
+              <a:rPr sz="3000" b="1" i="0">
+                <a:solidFill>
+                  <a:srgbClr val="36454F"/>
+                </a:solidFill>
+                <a:latin typeface="NanumGothic"/>
+              </a:rPr>
+              <a:t>9.2 향후 작업 (Future Work)</a:t>
+            </a:r>
+          </a:p>
+        </p:txBody>
+      </p:sp>
+      <p:sp>
+        <p:nvSpPr>
+          <p:cNvPr id="5" name="TextBox 4"/>
+          <p:cNvSpPr txBox="1"/>
+          <p:nvPr/>
+        </p:nvSpPr>
+        <p:spPr>
+          <a:xfrm>
+            <a:off x="548640" y="1280160"/>
+            <a:ext cx="11064240" cy="5120640"/>
+          </a:xfrm>
+          <a:prstGeom prst="rect">
+            <a:avLst/>
+          </a:prstGeom>
+          <a:noFill/>
+        </p:spPr>
+        <p:txBody>
+          <a:bodyPr wrap="square" lIns="54864" rIns="54864" tIns="36576" bIns="36576">
+            <a:spAutoFit/>
+          </a:bodyPr>
+          <a:lstStyle/>
+          <a:p>
+            <a:pPr>
+              <a:lnSpc>
+                <a:spcPct val="130000"/>
+              </a:lnSpc>
+            </a:pPr>
+            <a:r>
+              <a:rPr sz="1300">
+                <a:solidFill>
+                  <a:srgbClr val="2C5F2D"/>
+                </a:solidFill>
+                <a:latin typeface="NanumGothic"/>
+              </a:rPr>
+              <a:t>• §5.2 v3 multi-seed sweep — MEDIQ s={1,2}, AgentClinic s={0,1,2}, FinanceBench s={0,1,2} (예상 ~45h, venue submission 직전 핵심).</a:t>
+            </a:r>
+          </a:p>
+          <a:p>
+            <a:pPr>
+              <a:lnSpc>
+                <a:spcPct val="130000"/>
+              </a:lnSpc>
+            </a:pPr>
+            <a:r>
+              <a:rPr sz="1300">
+                <a:solidFill>
+                  <a:srgbClr val="36454F"/>
+                </a:solidFill>
+                <a:latin typeface="NanumGothic"/>
+              </a:rPr>
+              <a:t>• §5.3 random-persona ablation (v3 persona를 random text로 교체; reviewer 질문 #1).</a:t>
+            </a:r>
+          </a:p>
+          <a:p>
+            <a:pPr>
+              <a:lnSpc>
+                <a:spcPct val="130000"/>
+              </a:lnSpc>
+            </a:pPr>
+            <a:r>
+              <a:rPr sz="1300">
+                <a:solidFill>
+                  <a:srgbClr val="36454F"/>
+                </a:solidFill>
+                <a:latin typeface="NanumGothic"/>
+              </a:rPr>
+              <a:t>• §5.4 harness ablation — controller {none, random, fixed-topo, full v3}.</a:t>
+            </a:r>
+          </a:p>
+          <a:p>
+            <a:pPr>
+              <a:lnSpc>
+                <a:spcPct val="130000"/>
+              </a:lnSpc>
+            </a:pPr>
+            <a:r>
+              <a:rPr sz="1300">
+                <a:solidFill>
+                  <a:srgbClr val="36454F"/>
+                </a:solidFill>
+                <a:latin typeface="NanumGothic"/>
+              </a:rPr>
+              <a:t>• §5.5 [QUERY] / [SUMMARY] component ablation — 각 채널 끄고 효과 격리.</a:t>
+            </a:r>
+          </a:p>
+          <a:p>
+            <a:pPr>
+              <a:lnSpc>
+                <a:spcPct val="130000"/>
+              </a:lnSpc>
+            </a:pPr>
+            <a:r>
+              <a:rPr sz="1300">
+                <a:solidFill>
+                  <a:srgbClr val="36454F"/>
+                </a:solidFill>
+                <a:latin typeface="NanumGothic"/>
+              </a:rPr>
+              <a:t>• §5.6 두 번째 backbone (Qwen3-72B + Claude/GPT API).</a:t>
+            </a:r>
+          </a:p>
+          <a:p>
+            <a:pPr>
+              <a:lnSpc>
+                <a:spcPct val="130000"/>
+              </a:lnSpc>
+            </a:pPr>
+            <a:r>
+              <a:rPr sz="1300">
+                <a:solidFill>
+                  <a:srgbClr val="36454F"/>
+                </a:solidFill>
+                <a:latin typeface="NanumGothic"/>
+              </a:rPr>
+              <a:t>• §5.7 LLM-judge 교체 (Claude Haiku 4.5 또는 GPT-4.1-mini).</a:t>
+            </a:r>
+          </a:p>
+          <a:p>
+            <a:pPr>
+              <a:lnSpc>
+                <a:spcPct val="130000"/>
+              </a:lnSpc>
+            </a:pPr>
+            <a:r>
+              <a:rPr sz="1300">
+                <a:solidFill>
+                  <a:srgbClr val="B85042"/>
+                </a:solidFill>
+                <a:latin typeface="NanumGothic"/>
+              </a:rPr>
+              <a:t>• §5.8 ADAS + (MaAS / Puppeteer / EvoMAC) 직접 baseline — 리뷰어 필수 항목, 비협상.</a:t>
+            </a:r>
+          </a:p>
+        </p:txBody>
+      </p:sp>
+    </p:spTree>
+  </p:cSld>
+  <p:clrMapOvr>
+    <a:masterClrMapping/>
+  </p:clrMapOvr>
+</p:sld>
+</file>
+
+<file path=ppt/slides/slide39.xml><?xml version="1.0" encoding="utf-8"?>
+<p:sld xmlns:a="http://schemas.openxmlformats.org/drawingml/2006/main" xmlns:p="http://schemas.openxmlformats.org/presentationml/2006/main" xmlns:r="http://schemas.openxmlformats.org/officeDocument/2006/relationships">
+  <p:cSld>
+    <p:bg>
+      <p:bgPr>
+        <a:solidFill>
+          <a:srgbClr val="F5F5F5"/>
+        </a:solidFill>
+        <a:effectLst/>
+      </p:bgPr>
+    </p:bg>
+    <p:spTree>
+      <p:nvGrpSpPr>
+        <p:cNvPr id="1" name=""/>
+        <p:cNvGrpSpPr/>
+        <p:nvPr/>
+      </p:nvGrpSpPr>
+      <p:grpSpPr/>
+      <p:sp>
+        <p:nvSpPr>
+          <p:cNvPr id="2" name="Rectangle 1"/>
+          <p:cNvSpPr/>
+          <p:nvPr/>
+        </p:nvSpPr>
+        <p:spPr>
+          <a:xfrm>
+            <a:off x="0" y="0"/>
+            <a:ext cx="12191695" cy="164592"/>
+          </a:xfrm>
+          <a:prstGeom prst="rect">
+            <a:avLst/>
+          </a:prstGeom>
+          <a:solidFill>
+            <a:srgbClr val="2C5F2D"/>
+          </a:solidFill>
+          <a:ln>
+            <a:noFill/>
+          </a:ln>
+        </p:spPr>
+        <p:style>
+          <a:lnRef idx="1">
+            <a:schemeClr val="accent1"/>
+          </a:lnRef>
+          <a:fillRef idx="3">
+            <a:schemeClr val="accent1"/>
+          </a:fillRef>
+          <a:effectRef idx="2">
+            <a:schemeClr val="accent1"/>
+          </a:effectRef>
+          <a:fontRef idx="minor">
+            <a:schemeClr val="lt1"/>
+          </a:fontRef>
+        </p:style>
+        <p:txBody>
+          <a:bodyPr rtlCol="0" anchor="ctr"/>
+          <a:lstStyle/>
+          <a:p>
+            <a:pPr algn="ctr"/>
+          </a:p>
+        </p:txBody>
+      </p:sp>
+      <p:sp>
+        <p:nvSpPr>
+          <p:cNvPr id="3" name="TextBox 2"/>
+          <p:cNvSpPr txBox="1"/>
+          <p:nvPr/>
+        </p:nvSpPr>
+        <p:spPr>
+          <a:xfrm>
+            <a:off x="548640" y="246888"/>
+            <a:ext cx="10972800" cy="292608"/>
+          </a:xfrm>
+          <a:prstGeom prst="rect">
+            <a:avLst/>
+          </a:prstGeom>
+          <a:noFill/>
+        </p:spPr>
+        <p:txBody>
+          <a:bodyPr wrap="square" anchor="t" lIns="54864" rIns="54864" tIns="36576" bIns="36576">
+            <a:spAutoFit/>
+          </a:bodyPr>
+          <a:lstStyle/>
+          <a:p>
+            <a:pPr algn="l">
+              <a:lnSpc>
+                <a:spcPct val="120000"/>
+              </a:lnSpc>
+            </a:pPr>
+            <a:r>
+              <a:rPr sz="1100" b="1" i="0">
+                <a:solidFill>
+                  <a:srgbClr val="97BC62"/>
+                </a:solidFill>
+                <a:latin typeface="NanumGothic"/>
+              </a:rPr>
+              <a:t>결론</a:t>
+            </a:r>
+          </a:p>
+        </p:txBody>
+      </p:sp>
+      <p:sp>
+        <p:nvSpPr>
+          <p:cNvPr id="4" name="TextBox 3"/>
+          <p:cNvSpPr txBox="1"/>
+          <p:nvPr/>
+        </p:nvSpPr>
+        <p:spPr>
+          <a:xfrm>
+            <a:off x="548640" y="502920"/>
+            <a:ext cx="11064240" cy="822960"/>
+          </a:xfrm>
+          <a:prstGeom prst="rect">
+            <a:avLst/>
+          </a:prstGeom>
+          <a:noFill/>
+        </p:spPr>
+        <p:txBody>
+          <a:bodyPr wrap="square" anchor="ctr" lIns="54864" rIns="54864" tIns="36576" bIns="36576">
+            <a:spAutoFit/>
+          </a:bodyPr>
+          <a:lstStyle/>
+          <a:p>
+            <a:pPr algn="l">
+              <a:lnSpc>
+                <a:spcPct val="120000"/>
+              </a:lnSpc>
+            </a:pPr>
+            <a:r>
+              <a:rPr sz="3000" b="1" i="0">
+                <a:solidFill>
+                  <a:srgbClr val="36454F"/>
+                </a:solidFill>
+                <a:latin typeface="NanumGothic"/>
+              </a:rPr>
+              <a:t>10. 결론 (Conclusion)</a:t>
+            </a:r>
+          </a:p>
+        </p:txBody>
+      </p:sp>
+      <p:sp>
+        <p:nvSpPr>
+          <p:cNvPr id="5" name="TextBox 4"/>
+          <p:cNvSpPr txBox="1"/>
+          <p:nvPr/>
+        </p:nvSpPr>
+        <p:spPr>
+          <a:xfrm>
+            <a:off x="548640" y="1280160"/>
+            <a:ext cx="11064240" cy="5120640"/>
+          </a:xfrm>
+          <a:prstGeom prst="rect">
+            <a:avLst/>
+          </a:prstGeom>
+          <a:noFill/>
+        </p:spPr>
+        <p:txBody>
+          <a:bodyPr wrap="square" lIns="54864" rIns="54864" tIns="36576" bIns="36576">
+            <a:spAutoFit/>
+          </a:bodyPr>
+          <a:lstStyle/>
+          <a:p>
+            <a:pPr>
+              <a:lnSpc>
+                <a:spcPct val="130000"/>
+              </a:lnSpc>
+            </a:pPr>
+            <a:r>
+              <a:rPr sz="1300">
+                <a:solidFill>
+                  <a:srgbClr val="2C5F2D"/>
+                </a:solidFill>
+                <a:latin typeface="NanumGothic"/>
+              </a:rPr>
+              <a:t>• Reflection-only 멀티-에이전트 진화는 *그래프를 움직이게* 만든다 — v2가 도메인 어휘를 가진 specialist persona / triage department 구조를 출력함이 그 증거.</a:t>
+            </a:r>
+          </a:p>
+          <a:p>
+            <a:pPr>
+              <a:lnSpc>
+                <a:spcPct val="130000"/>
+              </a:lnSpc>
+            </a:pPr>
+            <a:r>
+              <a:rPr sz="1300">
+                <a:solidFill>
+                  <a:srgbClr val="B85042"/>
+                </a:solidFill>
+                <a:latin typeface="NanumGothic"/>
+              </a:rPr>
+              <a:t>• v2 @ n=30 단일 시드는 baseline을 못 이김 — ±13pp 노이즈가 architectural 효과를 가림.</a:t>
+            </a:r>
+          </a:p>
+          <a:p>
+            <a:pPr>
+              <a:lnSpc>
+                <a:spcPct val="130000"/>
+              </a:lnSpc>
+            </a:pPr>
+            <a:r>
+              <a:rPr sz="1300">
+                <a:solidFill>
+                  <a:srgbClr val="2C5F2D"/>
+                </a:solidFill>
+                <a:latin typeface="NanumGothic"/>
+              </a:rPr>
+              <a:t>• Streaming paired-batch가 노이즈 floor를 부분 해결 — 1/9 → 4/10 ACCEPT, 두 시드 paired Δ vs P-E = +4pp 재현.</a:t>
+            </a:r>
+          </a:p>
+          <a:p>
+            <a:pPr>
+              <a:lnSpc>
+                <a:spcPct val="130000"/>
+              </a:lnSpc>
+            </a:pPr>
+            <a:r>
+              <a:rPr sz="1300">
+                <a:solidFill>
+                  <a:srgbClr val="2C5F2D"/>
+                </a:solidFill>
+                <a:latin typeface="NanumGothic"/>
+              </a:rPr>
+              <a:t>• Controller v3 (full-pass + 샘플 단위 reflection 30→3→1 + side-channel Q&amp;A + orphan auto-drop) 는 INVALID 0, wall ½, MEDIQ s=0에서 *처음으로* CoT 를 +6pp로 이김.</a:t>
+            </a:r>
+          </a:p>
+          <a:p>
+            <a:pPr>
+              <a:lnSpc>
+                <a:spcPct val="130000"/>
+              </a:lnSpc>
+            </a:pPr>
+            <a:r>
+              <a:rPr sz="1300">
+                <a:solidFill>
+                  <a:srgbClr val="36454F"/>
+                </a:solidFill>
+                <a:latin typeface="NanumGothic"/>
+              </a:rPr>
+              <a:t>• 미해결: 단일 시드 한정 강신호. multi-seed × multi-domain × 두 번째 백본 × ADAS 직접 비교가 venue submission 직전 잔여 작업.</a:t>
             </a:r>
           </a:p>
         </p:txBody>
@@ -11480,6 +15543,110 @@
 </p:sld>
 </file>
 
+<file path=ppt/slides/slide40.xml><?xml version="1.0" encoding="utf-8"?>
+<p:sld xmlns:a="http://schemas.openxmlformats.org/drawingml/2006/main" xmlns:p="http://schemas.openxmlformats.org/presentationml/2006/main" xmlns:r="http://schemas.openxmlformats.org/officeDocument/2006/relationships">
+  <p:cSld>
+    <p:bg>
+      <p:bgPr>
+        <a:solidFill>
+          <a:srgbClr val="2C5F2D"/>
+        </a:solidFill>
+        <a:effectLst/>
+      </p:bgPr>
+    </p:bg>
+    <p:spTree>
+      <p:nvGrpSpPr>
+        <p:cNvPr id="1" name=""/>
+        <p:cNvGrpSpPr/>
+        <p:nvPr/>
+      </p:nvGrpSpPr>
+      <p:grpSpPr/>
+      <p:sp>
+        <p:nvSpPr>
+          <p:cNvPr id="2" name="TextBox 1"/>
+          <p:cNvSpPr txBox="1"/>
+          <p:nvPr/>
+        </p:nvSpPr>
+        <p:spPr>
+          <a:xfrm>
+            <a:off x="548640" y="2377440"/>
+            <a:ext cx="11064240" cy="1188720"/>
+          </a:xfrm>
+          <a:prstGeom prst="rect">
+            <a:avLst/>
+          </a:prstGeom>
+          <a:noFill/>
+        </p:spPr>
+        <p:txBody>
+          <a:bodyPr wrap="square" anchor="ctr" lIns="54864" rIns="54864" tIns="36576" bIns="36576">
+            <a:spAutoFit/>
+          </a:bodyPr>
+          <a:lstStyle/>
+          <a:p>
+            <a:pPr algn="ctr">
+              <a:lnSpc>
+                <a:spcPct val="120000"/>
+              </a:lnSpc>
+            </a:pPr>
+            <a:r>
+              <a:rPr sz="4600" b="1" i="0">
+                <a:solidFill>
+                  <a:srgbClr val="FFFFFF"/>
+                </a:solidFill>
+                <a:latin typeface="NanumGothic"/>
+              </a:rPr>
+              <a:t>감사합니다 — 질의응답</a:t>
+            </a:r>
+          </a:p>
+        </p:txBody>
+      </p:sp>
+      <p:sp>
+        <p:nvSpPr>
+          <p:cNvPr id="3" name="TextBox 2"/>
+          <p:cNvSpPr txBox="1"/>
+          <p:nvPr/>
+        </p:nvSpPr>
+        <p:spPr>
+          <a:xfrm>
+            <a:off x="548640" y="3749039"/>
+            <a:ext cx="11064240" cy="1463040"/>
+          </a:xfrm>
+          <a:prstGeom prst="rect">
+            <a:avLst/>
+          </a:prstGeom>
+          <a:noFill/>
+        </p:spPr>
+        <p:txBody>
+          <a:bodyPr wrap="square" anchor="t" lIns="54864" rIns="54864" tIns="36576" bIns="36576">
+            <a:spAutoFit/>
+          </a:bodyPr>
+          <a:lstStyle/>
+          <a:p>
+            <a:pPr algn="ctr">
+              <a:lnSpc>
+                <a:spcPct val="120000"/>
+              </a:lnSpc>
+            </a:pPr>
+            <a:r>
+              <a:rPr sz="1800" b="0" i="0">
+                <a:solidFill>
+                  <a:srgbClr val="CFD3D7"/>
+                </a:solidFill>
+                <a:latin typeface="NanumGothic"/>
+              </a:rPr>
+              <a:t>코드 + 결과: github.com/namam3gy · 로드맵: references/roadmap_ko.md</a:t>
+            </a:r>
+          </a:p>
+        </p:txBody>
+      </p:sp>
+    </p:spTree>
+  </p:cSld>
+  <p:clrMapOvr>
+    <a:masterClrMapping/>
+  </p:clrMapOvr>
+</p:sld>
+</file>
+
 <file path=ppt/slides/slide5.xml><?xml version="1.0" encoding="utf-8"?>
 <p:sld xmlns:a="http://schemas.openxmlformats.org/drawingml/2006/main" xmlns:p="http://schemas.openxmlformats.org/presentationml/2006/main" xmlns:r="http://schemas.openxmlformats.org/officeDocument/2006/relationships">
   <p:cSld>
@@ -11627,8 +15794,8 @@
         </p:nvSpPr>
         <p:spPr>
           <a:xfrm>
-            <a:off x="548640" y="1371600"/>
-            <a:ext cx="11064240" cy="457200"/>
+            <a:off x="548640" y="1188720"/>
+            <a:ext cx="11064240" cy="365760"/>
           </a:xfrm>
           <a:prstGeom prst="roundRect">
             <a:avLst/>
@@ -11660,7 +15827,7 @@
           <a:p>
             <a:pPr algn="ctr"/>
             <a:r>
-              <a:rPr sz="1400" b="1">
+              <a:rPr sz="1200" b="1">
                 <a:solidFill>
                   <a:srgbClr val="FFFFFF"/>
                 </a:solidFill>
@@ -11679,8 +15846,8 @@
         </p:nvSpPr>
         <p:spPr>
           <a:xfrm>
-            <a:off x="548640" y="1874519"/>
-            <a:ext cx="11064240" cy="822960"/>
+            <a:off x="548640" y="1572768"/>
+            <a:ext cx="11064240" cy="548640"/>
           </a:xfrm>
           <a:prstGeom prst="rect">
             <a:avLst/>
@@ -11699,7 +15866,7 @@
               </a:lnSpc>
             </a:pPr>
             <a:r>
-              <a:rPr sz="1300" b="0" i="0">
+              <a:rPr sz="1100" b="0" i="0">
                 <a:solidFill>
                   <a:srgbClr val="36454F"/>
                 </a:solidFill>
@@ -11718,8 +15885,8 @@
         </p:nvSpPr>
         <p:spPr>
           <a:xfrm>
-            <a:off x="548640" y="2743200"/>
-            <a:ext cx="11064240" cy="457200"/>
+            <a:off x="548640" y="2212848"/>
+            <a:ext cx="11064240" cy="365760"/>
           </a:xfrm>
           <a:prstGeom prst="roundRect">
             <a:avLst/>
@@ -11751,13 +15918,13 @@
           <a:p>
             <a:pPr algn="ctr"/>
             <a:r>
-              <a:rPr sz="1400" b="1">
+              <a:rPr sz="1200" b="1">
                 <a:solidFill>
                   <a:srgbClr val="FFFFFF"/>
                 </a:solidFill>
                 <a:latin typeface="NanumGothic"/>
               </a:rPr>
-              <a:t>(2) v2 컨트롤러: organization-designer 프레이밍 + 도메인 brief + 전문가 persona 규칙</a:t>
+              <a:t>(2) v2 컨트롤러: organization-designer 프레이밍 + 도메인 brief</a:t>
             </a:r>
           </a:p>
         </p:txBody>
@@ -11770,8 +15937,8 @@
         </p:nvSpPr>
         <p:spPr>
           <a:xfrm>
-            <a:off x="548640" y="3246120"/>
-            <a:ext cx="11064240" cy="822960"/>
+            <a:off x="548640" y="2596896"/>
+            <a:ext cx="11064240" cy="548640"/>
           </a:xfrm>
           <a:prstGeom prst="rect">
             <a:avLst/>
@@ -11790,13 +15957,13 @@
               </a:lnSpc>
             </a:pPr>
             <a:r>
-              <a:rPr sz="1300" b="0" i="0">
+              <a:rPr sz="1100" b="0" i="0">
                 <a:solidFill>
                   <a:srgbClr val="36454F"/>
                 </a:solidFill>
                 <a:latin typeface="NanumGothic"/>
               </a:rPr>
-              <a:t>도메인 어휘를 강제하여 generic 'verifier' 반사를 방지; 같은 backbone이 도메인별로 다른 전문가처럼 행동하게 한다.</a:t>
+              <a:t>도메인 어휘 강제 + 전문가 persona 규칙으로 generic 'verifier' 반사 차단; 같은 backbone이 도메인별로 다른 전문가처럼 행동.</a:t>
             </a:r>
           </a:p>
         </p:txBody>
@@ -11809,8 +15976,8 @@
         </p:nvSpPr>
         <p:spPr>
           <a:xfrm>
-            <a:off x="548640" y="4114800"/>
-            <a:ext cx="11064240" cy="457200"/>
+            <a:off x="548640" y="3236976"/>
+            <a:ext cx="11064240" cy="365760"/>
           </a:xfrm>
           <a:prstGeom prst="roundRect">
             <a:avLst/>
@@ -11842,13 +16009,13 @@
           <a:p>
             <a:pPr algn="ctr"/>
             <a:r>
-              <a:rPr sz="1400" b="1">
+              <a:rPr sz="1200" b="1">
                 <a:solidFill>
                   <a:srgbClr val="FFFFFF"/>
                 </a:solidFill>
                 <a:latin typeface="NanumGothic"/>
               </a:rPr>
-              <a:t>(3) Streaming paired-batch evolve mode — paired ACCEPT 비율을 1/9 → 4/10 으로</a:t>
+              <a:t>(3) Streaming paired-batch — paired ACCEPT 1/9 → 4/10, Δ vs P-E = +4pp 두 시드 재현</a:t>
             </a:r>
           </a:p>
         </p:txBody>
@@ -11861,8 +16028,8 @@
         </p:nvSpPr>
         <p:spPr>
           <a:xfrm>
-            <a:off x="548640" y="4617720"/>
-            <a:ext cx="11064240" cy="914400"/>
+            <a:off x="548640" y="3621024"/>
+            <a:ext cx="11064240" cy="548640"/>
           </a:xfrm>
           <a:prstGeom prst="rect">
             <a:avLst/>
@@ -11881,13 +16048,104 @@
               </a:lnSpc>
             </a:pPr>
             <a:r>
-              <a:rPr sz="1300" b="0" i="0">
+              <a:rPr sz="1100" b="0" i="0">
                 <a:solidFill>
                   <a:srgbClr val="36454F"/>
                 </a:solidFill>
                 <a:latin typeface="NanumGothic"/>
               </a:rPr>
-              <a:t>라운드별 부트스트랩 미니배치에서 best와 candidate를 같은 batch로 평가하여 cross-batch 노이즈를 제거; architectural 변경이 노이즈에 묻히지 않도록 한다.</a:t>
+              <a:t>best vs candidate를 SAME batch로 평가해 cross-batch 노이즈 cancel.</a:t>
+            </a:r>
+          </a:p>
+        </p:txBody>
+      </p:sp>
+      <p:sp>
+        <p:nvSpPr>
+          <p:cNvPr id="11" name="Rounded Rectangle 10"/>
+          <p:cNvSpPr/>
+          <p:nvPr/>
+        </p:nvSpPr>
+        <p:spPr>
+          <a:xfrm>
+            <a:off x="548640" y="4261104"/>
+            <a:ext cx="11064240" cy="365760"/>
+          </a:xfrm>
+          <a:prstGeom prst="roundRect">
+            <a:avLst/>
+          </a:prstGeom>
+          <a:solidFill>
+            <a:srgbClr val="B85042"/>
+          </a:solidFill>
+          <a:ln>
+            <a:noFill/>
+          </a:ln>
+        </p:spPr>
+        <p:style>
+          <a:lnRef idx="1">
+            <a:schemeClr val="accent1"/>
+          </a:lnRef>
+          <a:fillRef idx="3">
+            <a:schemeClr val="accent1"/>
+          </a:fillRef>
+          <a:effectRef idx="2">
+            <a:schemeClr val="accent1"/>
+          </a:effectRef>
+          <a:fontRef idx="minor">
+            <a:schemeClr val="lt1"/>
+          </a:fontRef>
+        </p:style>
+        <p:txBody>
+          <a:bodyPr rtlCol="0" anchor="ctr" lIns="45720" rIns="45720" tIns="27432" bIns="27432"/>
+          <a:lstStyle/>
+          <a:p>
+            <a:pPr algn="ctr"/>
+            <a:r>
+              <a:rPr sz="1200" b="1">
+                <a:solidFill>
+                  <a:srgbClr val="FFFFFF"/>
+                </a:solidFill>
+                <a:latin typeface="NanumGothic"/>
+              </a:rPr>
+              <a:t>(4) Controller v3 — full-pass + 샘플 단위 reflection + side-channel Q&amp;A</a:t>
+            </a:r>
+          </a:p>
+        </p:txBody>
+      </p:sp>
+      <p:sp>
+        <p:nvSpPr>
+          <p:cNvPr id="12" name="TextBox 11"/>
+          <p:cNvSpPr txBox="1"/>
+          <p:nvPr/>
+        </p:nvSpPr>
+        <p:spPr>
+          <a:xfrm>
+            <a:off x="548640" y="4645152"/>
+            <a:ext cx="11064240" cy="1783080"/>
+          </a:xfrm>
+          <a:prstGeom prst="rect">
+            <a:avLst/>
+          </a:prstGeom>
+          <a:noFill/>
+        </p:spPr>
+        <p:txBody>
+          <a:bodyPr wrap="square" anchor="t" lIns="54864" rIns="54864" tIns="36576" bIns="36576">
+            <a:spAutoFit/>
+          </a:bodyPr>
+          <a:lstStyle/>
+          <a:p>
+            <a:pPr algn="l">
+              <a:lnSpc>
+                <a:spcPct val="120000"/>
+              </a:lnSpc>
+            </a:pPr>
+            <a:r>
+              <a:rPr sz="1100" b="0" i="0">
+                <a:solidFill>
+                  <a:srgbClr val="36454F"/>
+                </a:solidFill>
+                <a:latin typeface="NanumGothic"/>
+              </a:rPr>
+              <a:t>(a) train n=30 sample-level evals → 30→3→1 hierarchical aggregation; (b) 워커 DAG에 [SUMMARY] transcript + [QUERY] one-shot Q&amp;A; (c) orphan auto-drop으로 INVALID 0; (d) MEDIQ s=0에서 Evolved 52% &gt; CoT 46% (+6pp) — 파일럿 최초 CoT-beat 결과 (단일 시드).</a:t>
             </a:r>
           </a:p>
         </p:txBody>
